--- a/schedule/04-building-context-part-1/04-building-context-part-1.pptx
+++ b/schedule/04-building-context-part-1/04-building-context-part-1.pptx
@@ -4,31 +4,34 @@
   <p:sldMasterIdLst>
     <p:sldMasterId id="2147483648" r:id="rId1"/>
   </p:sldMasterIdLst>
+  <p:notesMasterIdLst>
+    <p:notesMasterId r:id="rId24"/>
+  </p:notesMasterIdLst>
   <p:sldIdLst>
-    <p:sldId id="256" r:id="rId7"/>
-    <p:sldId id="257" r:id="rId9"/>
-    <p:sldId id="258" r:id="rId10"/>
-    <p:sldId id="259" r:id="rId11"/>
-    <p:sldId id="260" r:id="rId12"/>
-    <p:sldId id="261" r:id="rId13"/>
-    <p:sldId id="262" r:id="rId14"/>
-    <p:sldId id="263" r:id="rId15"/>
-    <p:sldId id="264" r:id="rId16"/>
-    <p:sldId id="265" r:id="rId17"/>
-    <p:sldId id="266" r:id="rId18"/>
-    <p:sldId id="267" r:id="rId19"/>
-    <p:sldId id="268" r:id="rId20"/>
-    <p:sldId id="269" r:id="rId21"/>
-    <p:sldId id="270" r:id="rId22"/>
-    <p:sldId id="271" r:id="rId23"/>
-    <p:sldId id="272" r:id="rId24"/>
-    <p:sldId id="273" r:id="rId25"/>
-    <p:sldId id="274" r:id="rId26"/>
-    <p:sldId id="275" r:id="rId27"/>
-    <p:sldId id="276" r:id="rId28"/>
-    <p:sldId id="277" r:id="rId29"/>
+    <p:sldId id="256" r:id="rId2"/>
+    <p:sldId id="257" r:id="rId3"/>
+    <p:sldId id="258" r:id="rId4"/>
+    <p:sldId id="259" r:id="rId5"/>
+    <p:sldId id="260" r:id="rId6"/>
+    <p:sldId id="261" r:id="rId7"/>
+    <p:sldId id="262" r:id="rId8"/>
+    <p:sldId id="263" r:id="rId9"/>
+    <p:sldId id="264" r:id="rId10"/>
+    <p:sldId id="265" r:id="rId11"/>
+    <p:sldId id="266" r:id="rId12"/>
+    <p:sldId id="267" r:id="rId13"/>
+    <p:sldId id="268" r:id="rId14"/>
+    <p:sldId id="269" r:id="rId15"/>
+    <p:sldId id="270" r:id="rId16"/>
+    <p:sldId id="271" r:id="rId17"/>
+    <p:sldId id="272" r:id="rId18"/>
+    <p:sldId id="273" r:id="rId19"/>
+    <p:sldId id="274" r:id="rId20"/>
+    <p:sldId id="275" r:id="rId21"/>
+    <p:sldId id="276" r:id="rId22"/>
+    <p:sldId id="277" r:id="rId23"/>
   </p:sldIdLst>
-  <p:sldSz cx="18288000" cy="10287000" type="screen4x3"/>
+  <p:sldSz cx="18288000" cy="10287000"/>
   <p:notesSz cx="6858000" cy="9144000"/>
   <p:defaultTextStyle>
     <a:defPPr>
@@ -125,11 +128,27 @@
       </a:defRPr>
     </a:lvl9pPr>
   </p:defaultTextStyle>
+  <p:extLst>
+    <p:ext uri="{EFAFB233-063F-42B5-8137-9DF3F51BA10A}">
+      <p15:sldGuideLst xmlns:p15="http://schemas.microsoft.com/office/powerpoint/2012/main">
+        <p15:guide id="1" orient="horz" pos="2160">
+          <p15:clr>
+            <a:srgbClr val="A4A3A4"/>
+          </p15:clr>
+        </p15:guide>
+        <p15:guide id="2" pos="2880">
+          <p15:clr>
+            <a:srgbClr val="A4A3A4"/>
+          </p15:clr>
+        </p15:guide>
+      </p15:sldGuideLst>
+    </p:ext>
+  </p:extLst>
 </p:presentation>
 </file>
 
 <file path=ppt/notesMasters/notesMaster1.xml><?xml version="1.0" encoding="utf-8"?>
-<p:notesMaster xmlns:a="http://schemas.openxmlformats.org/drawingml/2006/main" xmlns:p="http://schemas.openxmlformats.org/presentationml/2006/main" xmlns:r="http://schemas.openxmlformats.org/officeDocument/2006/relationships">
+<p:notesMaster xmlns:a="http://schemas.openxmlformats.org/drawingml/2006/main" xmlns:r="http://schemas.openxmlformats.org/officeDocument/2006/relationships" xmlns:p="http://schemas.openxmlformats.org/presentationml/2006/main">
   <p:cSld>
     <p:bg>
       <p:bgRef idx="1001">
@@ -150,241 +169,16 @@
           <a:chExt cx="0" cy="0"/>
         </a:xfrm>
       </p:grpSpPr>
-      <p:sp>
-        <p:nvSpPr>
-          <p:cNvPr id="2" name="Header Placeholder 1"/>
-          <p:cNvSpPr>
-            <a:spLocks noGrp="1"/>
-          </p:cNvSpPr>
-          <p:nvPr>
-            <p:ph type="hdr" sz="quarter"/>
-          </p:nvPr>
-        </p:nvSpPr>
-        <p:spPr>
-          <a:xfrm>
-            <a:off x="0" y="0"/>
-            <a:ext cx="2971800" cy="457200"/>
-          </a:xfrm>
-          <a:prstGeom prst="rect">
-            <a:avLst/>
-          </a:prstGeom>
-        </p:spPr>
-        <p:txBody>
-          <a:bodyPr vert="horz" lIns="91440" tIns="45720" rIns="91440" bIns="45720" rtlCol="0"/>
-          <a:lstStyle>
-            <a:lvl1pPr algn="l">
-              <a:defRPr sz="1200"/>
-            </a:lvl1pPr>
-          </a:lstStyle>
-          <a:p>
-            <a:endParaRPr lang="en-US"/>
-          </a:p>
-        </p:txBody>
-      </p:sp>
-      <p:sp>
-        <p:nvSpPr>
-          <p:cNvPr id="3" name="Date Placeholder 2"/>
-          <p:cNvSpPr>
-            <a:spLocks noGrp="1"/>
-          </p:cNvSpPr>
-          <p:nvPr>
-            <p:ph type="dt" idx="1"/>
-          </p:nvPr>
-        </p:nvSpPr>
-        <p:spPr>
-          <a:xfrm>
-            <a:off x="3884613" y="0"/>
-            <a:ext cx="2971800" cy="457200"/>
-          </a:xfrm>
-          <a:prstGeom prst="rect">
-            <a:avLst/>
-          </a:prstGeom>
-        </p:spPr>
-        <p:txBody>
-          <a:bodyPr vert="horz" lIns="91440" tIns="45720" rIns="91440" bIns="45720" rtlCol="0"/>
-          <a:lstStyle>
-            <a:lvl1pPr algn="r">
-              <a:defRPr sz="1200"/>
-            </a:lvl1pPr>
-          </a:lstStyle>
-          <a:p>
-            <a:fld id="{0F89C1C7-3DCD-1040-A9CF-14679D8B5DDD}" type="datetimeFigureOut">
-              <a:rPr lang="en-US" smtClean="0"/>
-              <a:t>10/17/16</a:t>
-            </a:fld>
-            <a:endParaRPr lang="en-US"/>
-          </a:p>
-        </p:txBody>
-      </p:sp>
-      <p:sp>
-        <p:nvSpPr>
-          <p:cNvPr id="4" name="Slide Image Placeholder 3"/>
-          <p:cNvSpPr>
-            <a:spLocks noGrp="1" noRot="1" noChangeAspect="1"/>
-          </p:cNvSpPr>
-          <p:nvPr>
-            <p:ph type="sldImg" idx="2"/>
-          </p:nvPr>
-        </p:nvSpPr>
-        <p:spPr>
-          <a:xfrm>
-            <a:off x="1143000" y="685800"/>
-            <a:ext cx="4572000" cy="3429000"/>
-          </a:xfrm>
-          <a:prstGeom prst="rect">
-            <a:avLst/>
-          </a:prstGeom>
-          <a:noFill/>
-          <a:ln w="12700">
-            <a:solidFill>
-              <a:prstClr val="black"/>
-            </a:solidFill>
-          </a:ln>
-        </p:spPr>
-        <p:txBody>
-          <a:bodyPr vert="horz" lIns="91440" tIns="45720" rIns="91440" bIns="45720" rtlCol="0" anchor="ctr"/>
-          <a:lstStyle/>
-          <a:p>
-            <a:endParaRPr lang="en-US"/>
-          </a:p>
-        </p:txBody>
-      </p:sp>
-      <p:sp>
-        <p:nvSpPr>
-          <p:cNvPr id="5" name="Notes Placeholder 4"/>
-          <p:cNvSpPr>
-            <a:spLocks noGrp="1"/>
-          </p:cNvSpPr>
-          <p:nvPr>
-            <p:ph type="body" sz="quarter" idx="3"/>
-          </p:nvPr>
-        </p:nvSpPr>
-        <p:spPr>
-          <a:xfrm>
-            <a:off x="685800" y="4343400"/>
-            <a:ext cx="5486400" cy="4114800"/>
-          </a:xfrm>
-          <a:prstGeom prst="rect">
-            <a:avLst/>
-          </a:prstGeom>
-        </p:spPr>
-        <p:txBody>
-          <a:bodyPr vert="horz" lIns="91440" tIns="45720" rIns="91440" bIns="45720" rtlCol="0"/>
-          <a:lstStyle/>
-          <a:p>
-            <a:pPr lvl="0"/>
-            <a:r>
-              <a:rPr lang="en-US" smtClean="0"/>
-              <a:t>Click to edit Master text styles</a:t>
-            </a:r>
-          </a:p>
-          <a:p>
-            <a:pPr lvl="1"/>
-            <a:r>
-              <a:rPr lang="en-US" smtClean="0"/>
-              <a:t>Second level</a:t>
-            </a:r>
-          </a:p>
-          <a:p>
-            <a:pPr lvl="2"/>
-            <a:r>
-              <a:rPr lang="en-US" smtClean="0"/>
-              <a:t>Third level</a:t>
-            </a:r>
-          </a:p>
-          <a:p>
-            <a:pPr lvl="3"/>
-            <a:r>
-              <a:rPr lang="en-US" smtClean="0"/>
-              <a:t>Fourth level</a:t>
-            </a:r>
-          </a:p>
-          <a:p>
-            <a:pPr lvl="4"/>
-            <a:r>
-              <a:rPr lang="en-US" smtClean="0"/>
-              <a:t>Fifth level</a:t>
-            </a:r>
-            <a:endParaRPr lang="en-US"/>
-          </a:p>
-        </p:txBody>
-      </p:sp>
-      <p:sp>
-        <p:nvSpPr>
-          <p:cNvPr id="6" name="Footer Placeholder 5"/>
-          <p:cNvSpPr>
-            <a:spLocks noGrp="1"/>
-          </p:cNvSpPr>
-          <p:nvPr>
-            <p:ph type="ftr" sz="quarter" idx="4"/>
-          </p:nvPr>
-        </p:nvSpPr>
-        <p:spPr>
-          <a:xfrm>
-            <a:off x="0" y="8685213"/>
-            <a:ext cx="2971800" cy="457200"/>
-          </a:xfrm>
-          <a:prstGeom prst="rect">
-            <a:avLst/>
-          </a:prstGeom>
-        </p:spPr>
-        <p:txBody>
-          <a:bodyPr vert="horz" lIns="91440" tIns="45720" rIns="91440" bIns="45720" rtlCol="0" anchor="b"/>
-          <a:lstStyle>
-            <a:lvl1pPr algn="l">
-              <a:defRPr sz="1200"/>
-            </a:lvl1pPr>
-          </a:lstStyle>
-          <a:p>
-            <a:endParaRPr lang="en-US"/>
-          </a:p>
-        </p:txBody>
-      </p:sp>
-      <p:sp>
-        <p:nvSpPr>
-          <p:cNvPr id="7" name="Slide Number Placeholder 6"/>
-          <p:cNvSpPr>
-            <a:spLocks noGrp="1"/>
-          </p:cNvSpPr>
-          <p:nvPr>
-            <p:ph type="sldNum" sz="quarter" idx="5"/>
-          </p:nvPr>
-        </p:nvSpPr>
-        <p:spPr>
-          <a:xfrm>
-            <a:off x="3884613" y="8685213"/>
-            <a:ext cx="2971800" cy="457200"/>
-          </a:xfrm>
-          <a:prstGeom prst="rect">
-            <a:avLst/>
-          </a:prstGeom>
-        </p:spPr>
-        <p:txBody>
-          <a:bodyPr vert="horz" lIns="91440" tIns="45720" rIns="91440" bIns="45720" rtlCol="0" anchor="b"/>
-          <a:lstStyle>
-            <a:lvl1pPr algn="r">
-              <a:defRPr sz="1200"/>
-            </a:lvl1pPr>
-          </a:lstStyle>
-          <a:p>
-            <a:fld id="{BB5E49A5-4136-284D-997B-48E1D791AD67}" type="slidenum">
-              <a:rPr lang="en-US" smtClean="0"/>
-              <a:t>‹#›</a:t>
-            </a:fld>
-            <a:endParaRPr lang="en-US"/>
-          </a:p>
-        </p:txBody>
-      </p:sp>
     </p:spTree>
     <p:extLst>
       <p:ext uri="{BB962C8B-B14F-4D97-AF65-F5344CB8AC3E}">
-        <p14:creationId xmlns:p14="http://schemas.microsoft.com/office/powerpoint/2010/main" val="2623252185"/>
+        <p14:creationId xmlns:p14="http://schemas.microsoft.com/office/powerpoint/2010/main" val="3651919138"/>
       </p:ext>
     </p:extLst>
   </p:cSld>
   <p:clrMap bg1="lt1" tx1="dk1" bg2="lt2" tx2="dk2" accent1="accent1" accent2="accent2" accent3="accent3" accent4="accent4" accent5="accent5" accent6="accent6" hlink="hlink" folHlink="folHlink"/>
   <p:notesStyle>
-    <a:lvl1pPr marL="0" algn="l" defTabSz="457200" rtl="0" eaLnBrk="1" latinLnBrk="0" hangingPunct="1">
+    <a:lvl1pPr marL="0" algn="l" defTabSz="914400" rtl="0" eaLnBrk="1" latinLnBrk="0" hangingPunct="1">
       <a:defRPr sz="1200" kern="1200">
         <a:solidFill>
           <a:schemeClr val="tx1"/>
@@ -394,7 +188,7 @@
         <a:cs typeface="+mn-cs"/>
       </a:defRPr>
     </a:lvl1pPr>
-    <a:lvl2pPr marL="457200" algn="l" defTabSz="457200" rtl="0" eaLnBrk="1" latinLnBrk="0" hangingPunct="1">
+    <a:lvl2pPr marL="457200" algn="l" defTabSz="914400" rtl="0" eaLnBrk="1" latinLnBrk="0" hangingPunct="1">
       <a:defRPr sz="1200" kern="1200">
         <a:solidFill>
           <a:schemeClr val="tx1"/>
@@ -404,7 +198,7 @@
         <a:cs typeface="+mn-cs"/>
       </a:defRPr>
     </a:lvl2pPr>
-    <a:lvl3pPr marL="914400" algn="l" defTabSz="457200" rtl="0" eaLnBrk="1" latinLnBrk="0" hangingPunct="1">
+    <a:lvl3pPr marL="914400" algn="l" defTabSz="914400" rtl="0" eaLnBrk="1" latinLnBrk="0" hangingPunct="1">
       <a:defRPr sz="1200" kern="1200">
         <a:solidFill>
           <a:schemeClr val="tx1"/>
@@ -414,7 +208,7 @@
         <a:cs typeface="+mn-cs"/>
       </a:defRPr>
     </a:lvl3pPr>
-    <a:lvl4pPr marL="1371600" algn="l" defTabSz="457200" rtl="0" eaLnBrk="1" latinLnBrk="0" hangingPunct="1">
+    <a:lvl4pPr marL="1371600" algn="l" defTabSz="914400" rtl="0" eaLnBrk="1" latinLnBrk="0" hangingPunct="1">
       <a:defRPr sz="1200" kern="1200">
         <a:solidFill>
           <a:schemeClr val="tx1"/>
@@ -424,7 +218,7 @@
         <a:cs typeface="+mn-cs"/>
       </a:defRPr>
     </a:lvl4pPr>
-    <a:lvl5pPr marL="1828800" algn="l" defTabSz="457200" rtl="0" eaLnBrk="1" latinLnBrk="0" hangingPunct="1">
+    <a:lvl5pPr marL="1828800" algn="l" defTabSz="914400" rtl="0" eaLnBrk="1" latinLnBrk="0" hangingPunct="1">
       <a:defRPr sz="1200" kern="1200">
         <a:solidFill>
           <a:schemeClr val="tx1"/>
@@ -434,7 +228,7 @@
         <a:cs typeface="+mn-cs"/>
       </a:defRPr>
     </a:lvl5pPr>
-    <a:lvl6pPr marL="2286000" algn="l" defTabSz="457200" rtl="0" eaLnBrk="1" latinLnBrk="0" hangingPunct="1">
+    <a:lvl6pPr marL="2286000" algn="l" defTabSz="914400" rtl="0" eaLnBrk="1" latinLnBrk="0" hangingPunct="1">
       <a:defRPr sz="1200" kern="1200">
         <a:solidFill>
           <a:schemeClr val="tx1"/>
@@ -444,7 +238,7 @@
         <a:cs typeface="+mn-cs"/>
       </a:defRPr>
     </a:lvl6pPr>
-    <a:lvl7pPr marL="2743200" algn="l" defTabSz="457200" rtl="0" eaLnBrk="1" latinLnBrk="0" hangingPunct="1">
+    <a:lvl7pPr marL="2743200" algn="l" defTabSz="914400" rtl="0" eaLnBrk="1" latinLnBrk="0" hangingPunct="1">
       <a:defRPr sz="1200" kern="1200">
         <a:solidFill>
           <a:schemeClr val="tx1"/>
@@ -454,7 +248,7 @@
         <a:cs typeface="+mn-cs"/>
       </a:defRPr>
     </a:lvl7pPr>
-    <a:lvl8pPr marL="3200400" algn="l" defTabSz="457200" rtl="0" eaLnBrk="1" latinLnBrk="0" hangingPunct="1">
+    <a:lvl8pPr marL="3200400" algn="l" defTabSz="914400" rtl="0" eaLnBrk="1" latinLnBrk="0" hangingPunct="1">
       <a:defRPr sz="1200" kern="1200">
         <a:solidFill>
           <a:schemeClr val="tx1"/>
@@ -464,7 +258,7 @@
         <a:cs typeface="+mn-cs"/>
       </a:defRPr>
     </a:lvl8pPr>
-    <a:lvl9pPr marL="3657600" algn="l" defTabSz="457200" rtl="0" eaLnBrk="1" latinLnBrk="0" hangingPunct="1">
+    <a:lvl9pPr marL="3657600" algn="l" defTabSz="914400" rtl="0" eaLnBrk="1" latinLnBrk="0" hangingPunct="1">
       <a:defRPr sz="1200" kern="1200">
         <a:solidFill>
           <a:schemeClr val="tx1"/>
@@ -479,7 +273,7 @@
 </file>
 
 <file path=ppt/notesSlides/notesSlide1.xml><?xml version="1.0" encoding="utf-8"?>
-<p:notes xmlns:a="http://schemas.openxmlformats.org/drawingml/2006/main" xmlns:p="http://schemas.openxmlformats.org/presentationml/2006/main" xmlns:r="http://schemas.openxmlformats.org/officeDocument/2006/relationships">
+<p:notes xmlns:a="http://schemas.openxmlformats.org/drawingml/2006/main" xmlns:r="http://schemas.openxmlformats.org/officeDocument/2006/relationships" xmlns:p="http://schemas.openxmlformats.org/presentationml/2006/main">
   <p:cSld>
     <p:spTree>
       <p:nvGrpSpPr>
@@ -499,7 +293,7 @@
         <p:nvSpPr>
           <p:cNvPr id="2" name="Slide Image Placeholder 1"/>
           <p:cNvSpPr>
-            <a:spLocks noGrp="1"/>
+            <a:spLocks noGrp="1" noRot="1" noChangeAspect="1"/>
           </p:cNvSpPr>
           <p:nvPr>
             <p:ph type="sldImg" idx="2"/>
@@ -514,7 +308,7 @@
             <a:spLocks noGrp="1"/>
           </p:cNvSpPr>
           <p:nvPr>
-            <p:ph type="body" idx="3" sz="quarter"/>
+            <p:ph type="body" sz="quarter" idx="3"/>
           </p:nvPr>
         </p:nvSpPr>
         <p:spPr/>
@@ -535,7 +329,7 @@
             <a:spLocks noGrp="1"/>
           </p:cNvSpPr>
           <p:nvPr>
-            <p:ph type="sldNum" idx="5" sz="quarter"/>
+            <p:ph type="sldNum" sz="quarter" idx="5"/>
           </p:nvPr>
         </p:nvSpPr>
         <p:spPr/>
@@ -549,7 +343,7 @@
 </file>
 
 <file path=ppt/notesSlides/notesSlide10.xml><?xml version="1.0" encoding="utf-8"?>
-<p:notes xmlns:a="http://schemas.openxmlformats.org/drawingml/2006/main" xmlns:p="http://schemas.openxmlformats.org/presentationml/2006/main" xmlns:r="http://schemas.openxmlformats.org/officeDocument/2006/relationships">
+<p:notes xmlns:a="http://schemas.openxmlformats.org/drawingml/2006/main" xmlns:r="http://schemas.openxmlformats.org/officeDocument/2006/relationships" xmlns:p="http://schemas.openxmlformats.org/presentationml/2006/main">
   <p:cSld>
     <p:spTree>
       <p:nvGrpSpPr>
@@ -569,7 +363,7 @@
         <p:nvSpPr>
           <p:cNvPr id="2" name="Slide Image Placeholder 1"/>
           <p:cNvSpPr>
-            <a:spLocks noGrp="1"/>
+            <a:spLocks noGrp="1" noRot="1" noChangeAspect="1"/>
           </p:cNvSpPr>
           <p:nvPr>
             <p:ph type="sldImg" idx="2"/>
@@ -584,7 +378,7 @@
             <a:spLocks noGrp="1"/>
           </p:cNvSpPr>
           <p:nvPr>
-            <p:ph type="body" idx="3" sz="quarter"/>
+            <p:ph type="body" sz="quarter" idx="3"/>
           </p:nvPr>
         </p:nvSpPr>
         <p:spPr/>
@@ -605,7 +399,7 @@
             <a:spLocks noGrp="1"/>
           </p:cNvSpPr>
           <p:nvPr>
-            <p:ph type="sldNum" idx="5" sz="quarter"/>
+            <p:ph type="sldNum" sz="quarter" idx="5"/>
           </p:nvPr>
         </p:nvSpPr>
         <p:spPr/>
@@ -619,7 +413,7 @@
 </file>
 
 <file path=ppt/notesSlides/notesSlide11.xml><?xml version="1.0" encoding="utf-8"?>
-<p:notes xmlns:a="http://schemas.openxmlformats.org/drawingml/2006/main" xmlns:p="http://schemas.openxmlformats.org/presentationml/2006/main" xmlns:r="http://schemas.openxmlformats.org/officeDocument/2006/relationships">
+<p:notes xmlns:a="http://schemas.openxmlformats.org/drawingml/2006/main" xmlns:r="http://schemas.openxmlformats.org/officeDocument/2006/relationships" xmlns:p="http://schemas.openxmlformats.org/presentationml/2006/main">
   <p:cSld>
     <p:spTree>
       <p:nvGrpSpPr>
@@ -639,7 +433,7 @@
         <p:nvSpPr>
           <p:cNvPr id="2" name="Slide Image Placeholder 1"/>
           <p:cNvSpPr>
-            <a:spLocks noGrp="1"/>
+            <a:spLocks noGrp="1" noRot="1" noChangeAspect="1"/>
           </p:cNvSpPr>
           <p:nvPr>
             <p:ph type="sldImg" idx="2"/>
@@ -654,7 +448,7 @@
             <a:spLocks noGrp="1"/>
           </p:cNvSpPr>
           <p:nvPr>
-            <p:ph type="body" idx="3" sz="quarter"/>
+            <p:ph type="body" sz="quarter" idx="3"/>
           </p:nvPr>
         </p:nvSpPr>
         <p:spPr/>
@@ -675,7 +469,7 @@
             <a:spLocks noGrp="1"/>
           </p:cNvSpPr>
           <p:nvPr>
-            <p:ph type="sldNum" idx="5" sz="quarter"/>
+            <p:ph type="sldNum" sz="quarter" idx="5"/>
           </p:nvPr>
         </p:nvSpPr>
         <p:spPr/>
@@ -689,7 +483,7 @@
 </file>
 
 <file path=ppt/notesSlides/notesSlide12.xml><?xml version="1.0" encoding="utf-8"?>
-<p:notes xmlns:a="http://schemas.openxmlformats.org/drawingml/2006/main" xmlns:p="http://schemas.openxmlformats.org/presentationml/2006/main" xmlns:r="http://schemas.openxmlformats.org/officeDocument/2006/relationships">
+<p:notes xmlns:a="http://schemas.openxmlformats.org/drawingml/2006/main" xmlns:r="http://schemas.openxmlformats.org/officeDocument/2006/relationships" xmlns:p="http://schemas.openxmlformats.org/presentationml/2006/main">
   <p:cSld>
     <p:spTree>
       <p:nvGrpSpPr>
@@ -709,7 +503,7 @@
         <p:nvSpPr>
           <p:cNvPr id="2" name="Slide Image Placeholder 1"/>
           <p:cNvSpPr>
-            <a:spLocks noGrp="1"/>
+            <a:spLocks noGrp="1" noRot="1" noChangeAspect="1"/>
           </p:cNvSpPr>
           <p:nvPr>
             <p:ph type="sldImg" idx="2"/>
@@ -724,7 +518,7 @@
             <a:spLocks noGrp="1"/>
           </p:cNvSpPr>
           <p:nvPr>
-            <p:ph type="body" idx="3" sz="quarter"/>
+            <p:ph type="body" sz="quarter" idx="3"/>
           </p:nvPr>
         </p:nvSpPr>
         <p:spPr/>
@@ -745,7 +539,7 @@
             <a:spLocks noGrp="1"/>
           </p:cNvSpPr>
           <p:nvPr>
-            <p:ph type="sldNum" idx="5" sz="quarter"/>
+            <p:ph type="sldNum" sz="quarter" idx="5"/>
           </p:nvPr>
         </p:nvSpPr>
         <p:spPr/>
@@ -759,7 +553,7 @@
 </file>
 
 <file path=ppt/notesSlides/notesSlide13.xml><?xml version="1.0" encoding="utf-8"?>
-<p:notes xmlns:a="http://schemas.openxmlformats.org/drawingml/2006/main" xmlns:p="http://schemas.openxmlformats.org/presentationml/2006/main" xmlns:r="http://schemas.openxmlformats.org/officeDocument/2006/relationships">
+<p:notes xmlns:a="http://schemas.openxmlformats.org/drawingml/2006/main" xmlns:r="http://schemas.openxmlformats.org/officeDocument/2006/relationships" xmlns:p="http://schemas.openxmlformats.org/presentationml/2006/main">
   <p:cSld>
     <p:spTree>
       <p:nvGrpSpPr>
@@ -779,7 +573,7 @@
         <p:nvSpPr>
           <p:cNvPr id="2" name="Slide Image Placeholder 1"/>
           <p:cNvSpPr>
-            <a:spLocks noGrp="1"/>
+            <a:spLocks noGrp="1" noRot="1" noChangeAspect="1"/>
           </p:cNvSpPr>
           <p:nvPr>
             <p:ph type="sldImg" idx="2"/>
@@ -794,7 +588,7 @@
             <a:spLocks noGrp="1"/>
           </p:cNvSpPr>
           <p:nvPr>
-            <p:ph type="body" idx="3" sz="quarter"/>
+            <p:ph type="body" sz="quarter" idx="3"/>
           </p:nvPr>
         </p:nvSpPr>
         <p:spPr/>
@@ -815,7 +609,7 @@
             <a:spLocks noGrp="1"/>
           </p:cNvSpPr>
           <p:nvPr>
-            <p:ph type="sldNum" idx="5" sz="quarter"/>
+            <p:ph type="sldNum" sz="quarter" idx="5"/>
           </p:nvPr>
         </p:nvSpPr>
         <p:spPr/>
@@ -829,7 +623,7 @@
 </file>
 
 <file path=ppt/notesSlides/notesSlide14.xml><?xml version="1.0" encoding="utf-8"?>
-<p:notes xmlns:a="http://schemas.openxmlformats.org/drawingml/2006/main" xmlns:p="http://schemas.openxmlformats.org/presentationml/2006/main" xmlns:r="http://schemas.openxmlformats.org/officeDocument/2006/relationships">
+<p:notes xmlns:a="http://schemas.openxmlformats.org/drawingml/2006/main" xmlns:r="http://schemas.openxmlformats.org/officeDocument/2006/relationships" xmlns:p="http://schemas.openxmlformats.org/presentationml/2006/main">
   <p:cSld>
     <p:spTree>
       <p:nvGrpSpPr>
@@ -849,7 +643,7 @@
         <p:nvSpPr>
           <p:cNvPr id="2" name="Slide Image Placeholder 1"/>
           <p:cNvSpPr>
-            <a:spLocks noGrp="1"/>
+            <a:spLocks noGrp="1" noRot="1" noChangeAspect="1"/>
           </p:cNvSpPr>
           <p:nvPr>
             <p:ph type="sldImg" idx="2"/>
@@ -864,7 +658,7 @@
             <a:spLocks noGrp="1"/>
           </p:cNvSpPr>
           <p:nvPr>
-            <p:ph type="body" idx="3" sz="quarter"/>
+            <p:ph type="body" sz="quarter" idx="3"/>
           </p:nvPr>
         </p:nvSpPr>
         <p:spPr/>
@@ -885,7 +679,7 @@
             <a:spLocks noGrp="1"/>
           </p:cNvSpPr>
           <p:nvPr>
-            <p:ph type="sldNum" idx="5" sz="quarter"/>
+            <p:ph type="sldNum" sz="quarter" idx="5"/>
           </p:nvPr>
         </p:nvSpPr>
         <p:spPr/>
@@ -899,7 +693,7 @@
 </file>
 
 <file path=ppt/notesSlides/notesSlide15.xml><?xml version="1.0" encoding="utf-8"?>
-<p:notes xmlns:a="http://schemas.openxmlformats.org/drawingml/2006/main" xmlns:p="http://schemas.openxmlformats.org/presentationml/2006/main" xmlns:r="http://schemas.openxmlformats.org/officeDocument/2006/relationships">
+<p:notes xmlns:a="http://schemas.openxmlformats.org/drawingml/2006/main" xmlns:r="http://schemas.openxmlformats.org/officeDocument/2006/relationships" xmlns:p="http://schemas.openxmlformats.org/presentationml/2006/main">
   <p:cSld>
     <p:spTree>
       <p:nvGrpSpPr>
@@ -919,7 +713,7 @@
         <p:nvSpPr>
           <p:cNvPr id="2" name="Slide Image Placeholder 1"/>
           <p:cNvSpPr>
-            <a:spLocks noGrp="1"/>
+            <a:spLocks noGrp="1" noRot="1" noChangeAspect="1"/>
           </p:cNvSpPr>
           <p:nvPr>
             <p:ph type="sldImg" idx="2"/>
@@ -934,7 +728,7 @@
             <a:spLocks noGrp="1"/>
           </p:cNvSpPr>
           <p:nvPr>
-            <p:ph type="body" idx="3" sz="quarter"/>
+            <p:ph type="body" sz="quarter" idx="3"/>
           </p:nvPr>
         </p:nvSpPr>
         <p:spPr/>
@@ -955,7 +749,7 @@
             <a:spLocks noGrp="1"/>
           </p:cNvSpPr>
           <p:nvPr>
-            <p:ph type="sldNum" idx="5" sz="quarter"/>
+            <p:ph type="sldNum" sz="quarter" idx="5"/>
           </p:nvPr>
         </p:nvSpPr>
         <p:spPr/>
@@ -969,7 +763,7 @@
 </file>
 
 <file path=ppt/notesSlides/notesSlide16.xml><?xml version="1.0" encoding="utf-8"?>
-<p:notes xmlns:a="http://schemas.openxmlformats.org/drawingml/2006/main" xmlns:p="http://schemas.openxmlformats.org/presentationml/2006/main" xmlns:r="http://schemas.openxmlformats.org/officeDocument/2006/relationships">
+<p:notes xmlns:a="http://schemas.openxmlformats.org/drawingml/2006/main" xmlns:r="http://schemas.openxmlformats.org/officeDocument/2006/relationships" xmlns:p="http://schemas.openxmlformats.org/presentationml/2006/main">
   <p:cSld>
     <p:spTree>
       <p:nvGrpSpPr>
@@ -989,7 +783,7 @@
         <p:nvSpPr>
           <p:cNvPr id="2" name="Slide Image Placeholder 1"/>
           <p:cNvSpPr>
-            <a:spLocks noGrp="1"/>
+            <a:spLocks noGrp="1" noRot="1" noChangeAspect="1"/>
           </p:cNvSpPr>
           <p:nvPr>
             <p:ph type="sldImg" idx="2"/>
@@ -1004,7 +798,7 @@
             <a:spLocks noGrp="1"/>
           </p:cNvSpPr>
           <p:nvPr>
-            <p:ph type="body" idx="3" sz="quarter"/>
+            <p:ph type="body" sz="quarter" idx="3"/>
           </p:nvPr>
         </p:nvSpPr>
         <p:spPr/>
@@ -1025,7 +819,7 @@
             <a:spLocks noGrp="1"/>
           </p:cNvSpPr>
           <p:nvPr>
-            <p:ph type="sldNum" idx="5" sz="quarter"/>
+            <p:ph type="sldNum" sz="quarter" idx="5"/>
           </p:nvPr>
         </p:nvSpPr>
         <p:spPr/>
@@ -1039,7 +833,7 @@
 </file>
 
 <file path=ppt/notesSlides/notesSlide17.xml><?xml version="1.0" encoding="utf-8"?>
-<p:notes xmlns:a="http://schemas.openxmlformats.org/drawingml/2006/main" xmlns:p="http://schemas.openxmlformats.org/presentationml/2006/main" xmlns:r="http://schemas.openxmlformats.org/officeDocument/2006/relationships">
+<p:notes xmlns:a="http://schemas.openxmlformats.org/drawingml/2006/main" xmlns:r="http://schemas.openxmlformats.org/officeDocument/2006/relationships" xmlns:p="http://schemas.openxmlformats.org/presentationml/2006/main">
   <p:cSld>
     <p:spTree>
       <p:nvGrpSpPr>
@@ -1059,7 +853,7 @@
         <p:nvSpPr>
           <p:cNvPr id="2" name="Slide Image Placeholder 1"/>
           <p:cNvSpPr>
-            <a:spLocks noGrp="1"/>
+            <a:spLocks noGrp="1" noRot="1" noChangeAspect="1"/>
           </p:cNvSpPr>
           <p:nvPr>
             <p:ph type="sldImg" idx="2"/>
@@ -1074,7 +868,7 @@
             <a:spLocks noGrp="1"/>
           </p:cNvSpPr>
           <p:nvPr>
-            <p:ph type="body" idx="3" sz="quarter"/>
+            <p:ph type="body" sz="quarter" idx="3"/>
           </p:nvPr>
         </p:nvSpPr>
         <p:spPr/>
@@ -1095,7 +889,7 @@
             <a:spLocks noGrp="1"/>
           </p:cNvSpPr>
           <p:nvPr>
-            <p:ph type="sldNum" idx="5" sz="quarter"/>
+            <p:ph type="sldNum" sz="quarter" idx="5"/>
           </p:nvPr>
         </p:nvSpPr>
         <p:spPr/>
@@ -1109,7 +903,7 @@
 </file>
 
 <file path=ppt/notesSlides/notesSlide18.xml><?xml version="1.0" encoding="utf-8"?>
-<p:notes xmlns:a="http://schemas.openxmlformats.org/drawingml/2006/main" xmlns:p="http://schemas.openxmlformats.org/presentationml/2006/main" xmlns:r="http://schemas.openxmlformats.org/officeDocument/2006/relationships">
+<p:notes xmlns:a="http://schemas.openxmlformats.org/drawingml/2006/main" xmlns:r="http://schemas.openxmlformats.org/officeDocument/2006/relationships" xmlns:p="http://schemas.openxmlformats.org/presentationml/2006/main">
   <p:cSld>
     <p:spTree>
       <p:nvGrpSpPr>
@@ -1129,7 +923,7 @@
         <p:nvSpPr>
           <p:cNvPr id="2" name="Slide Image Placeholder 1"/>
           <p:cNvSpPr>
-            <a:spLocks noGrp="1"/>
+            <a:spLocks noGrp="1" noRot="1" noChangeAspect="1"/>
           </p:cNvSpPr>
           <p:nvPr>
             <p:ph type="sldImg" idx="2"/>
@@ -1144,7 +938,7 @@
             <a:spLocks noGrp="1"/>
           </p:cNvSpPr>
           <p:nvPr>
-            <p:ph type="body" idx="3" sz="quarter"/>
+            <p:ph type="body" sz="quarter" idx="3"/>
           </p:nvPr>
         </p:nvSpPr>
         <p:spPr/>
@@ -1165,7 +959,7 @@
             <a:spLocks noGrp="1"/>
           </p:cNvSpPr>
           <p:nvPr>
-            <p:ph type="sldNum" idx="5" sz="quarter"/>
+            <p:ph type="sldNum" sz="quarter" idx="5"/>
           </p:nvPr>
         </p:nvSpPr>
         <p:spPr/>
@@ -1179,7 +973,7 @@
 </file>
 
 <file path=ppt/notesSlides/notesSlide19.xml><?xml version="1.0" encoding="utf-8"?>
-<p:notes xmlns:a="http://schemas.openxmlformats.org/drawingml/2006/main" xmlns:p="http://schemas.openxmlformats.org/presentationml/2006/main" xmlns:r="http://schemas.openxmlformats.org/officeDocument/2006/relationships">
+<p:notes xmlns:a="http://schemas.openxmlformats.org/drawingml/2006/main" xmlns:r="http://schemas.openxmlformats.org/officeDocument/2006/relationships" xmlns:p="http://schemas.openxmlformats.org/presentationml/2006/main">
   <p:cSld>
     <p:spTree>
       <p:nvGrpSpPr>
@@ -1199,7 +993,7 @@
         <p:nvSpPr>
           <p:cNvPr id="2" name="Slide Image Placeholder 1"/>
           <p:cNvSpPr>
-            <a:spLocks noGrp="1"/>
+            <a:spLocks noGrp="1" noRot="1" noChangeAspect="1"/>
           </p:cNvSpPr>
           <p:nvPr>
             <p:ph type="sldImg" idx="2"/>
@@ -1214,7 +1008,7 @@
             <a:spLocks noGrp="1"/>
           </p:cNvSpPr>
           <p:nvPr>
-            <p:ph type="body" idx="3" sz="quarter"/>
+            <p:ph type="body" sz="quarter" idx="3"/>
           </p:nvPr>
         </p:nvSpPr>
         <p:spPr/>
@@ -1235,7 +1029,7 @@
             <a:spLocks noGrp="1"/>
           </p:cNvSpPr>
           <p:nvPr>
-            <p:ph type="sldNum" idx="5" sz="quarter"/>
+            <p:ph type="sldNum" sz="quarter" idx="5"/>
           </p:nvPr>
         </p:nvSpPr>
         <p:spPr/>
@@ -1249,7 +1043,7 @@
 </file>
 
 <file path=ppt/notesSlides/notesSlide2.xml><?xml version="1.0" encoding="utf-8"?>
-<p:notes xmlns:a="http://schemas.openxmlformats.org/drawingml/2006/main" xmlns:p="http://schemas.openxmlformats.org/presentationml/2006/main" xmlns:r="http://schemas.openxmlformats.org/officeDocument/2006/relationships">
+<p:notes xmlns:a="http://schemas.openxmlformats.org/drawingml/2006/main" xmlns:r="http://schemas.openxmlformats.org/officeDocument/2006/relationships" xmlns:p="http://schemas.openxmlformats.org/presentationml/2006/main">
   <p:cSld>
     <p:spTree>
       <p:nvGrpSpPr>
@@ -1269,7 +1063,7 @@
         <p:nvSpPr>
           <p:cNvPr id="2" name="Slide Image Placeholder 1"/>
           <p:cNvSpPr>
-            <a:spLocks noGrp="1"/>
+            <a:spLocks noGrp="1" noRot="1" noChangeAspect="1"/>
           </p:cNvSpPr>
           <p:nvPr>
             <p:ph type="sldImg" idx="2"/>
@@ -1284,7 +1078,7 @@
             <a:spLocks noGrp="1"/>
           </p:cNvSpPr>
           <p:nvPr>
-            <p:ph type="body" idx="3" sz="quarter"/>
+            <p:ph type="body" sz="quarter" idx="3"/>
           </p:nvPr>
         </p:nvSpPr>
         <p:spPr/>
@@ -1305,7 +1099,7 @@
             <a:spLocks noGrp="1"/>
           </p:cNvSpPr>
           <p:nvPr>
-            <p:ph type="sldNum" idx="5" sz="quarter"/>
+            <p:ph type="sldNum" sz="quarter" idx="5"/>
           </p:nvPr>
         </p:nvSpPr>
         <p:spPr/>
@@ -1319,7 +1113,7 @@
 </file>
 
 <file path=ppt/notesSlides/notesSlide20.xml><?xml version="1.0" encoding="utf-8"?>
-<p:notes xmlns:a="http://schemas.openxmlformats.org/drawingml/2006/main" xmlns:p="http://schemas.openxmlformats.org/presentationml/2006/main" xmlns:r="http://schemas.openxmlformats.org/officeDocument/2006/relationships">
+<p:notes xmlns:a="http://schemas.openxmlformats.org/drawingml/2006/main" xmlns:r="http://schemas.openxmlformats.org/officeDocument/2006/relationships" xmlns:p="http://schemas.openxmlformats.org/presentationml/2006/main">
   <p:cSld>
     <p:spTree>
       <p:nvGrpSpPr>
@@ -1339,7 +1133,7 @@
         <p:nvSpPr>
           <p:cNvPr id="2" name="Slide Image Placeholder 1"/>
           <p:cNvSpPr>
-            <a:spLocks noGrp="1"/>
+            <a:spLocks noGrp="1" noRot="1" noChangeAspect="1"/>
           </p:cNvSpPr>
           <p:nvPr>
             <p:ph type="sldImg" idx="2"/>
@@ -1354,7 +1148,7 @@
             <a:spLocks noGrp="1"/>
           </p:cNvSpPr>
           <p:nvPr>
-            <p:ph type="body" idx="3" sz="quarter"/>
+            <p:ph type="body" sz="quarter" idx="3"/>
           </p:nvPr>
         </p:nvSpPr>
         <p:spPr/>
@@ -1375,7 +1169,7 @@
             <a:spLocks noGrp="1"/>
           </p:cNvSpPr>
           <p:nvPr>
-            <p:ph type="sldNum" idx="5" sz="quarter"/>
+            <p:ph type="sldNum" sz="quarter" idx="5"/>
           </p:nvPr>
         </p:nvSpPr>
         <p:spPr/>
@@ -1389,7 +1183,7 @@
 </file>
 
 <file path=ppt/notesSlides/notesSlide21.xml><?xml version="1.0" encoding="utf-8"?>
-<p:notes xmlns:a="http://schemas.openxmlformats.org/drawingml/2006/main" xmlns:p="http://schemas.openxmlformats.org/presentationml/2006/main" xmlns:r="http://schemas.openxmlformats.org/officeDocument/2006/relationships">
+<p:notes xmlns:a="http://schemas.openxmlformats.org/drawingml/2006/main" xmlns:r="http://schemas.openxmlformats.org/officeDocument/2006/relationships" xmlns:p="http://schemas.openxmlformats.org/presentationml/2006/main">
   <p:cSld>
     <p:spTree>
       <p:nvGrpSpPr>
@@ -1409,7 +1203,7 @@
         <p:nvSpPr>
           <p:cNvPr id="2" name="Slide Image Placeholder 1"/>
           <p:cNvSpPr>
-            <a:spLocks noGrp="1"/>
+            <a:spLocks noGrp="1" noRot="1" noChangeAspect="1"/>
           </p:cNvSpPr>
           <p:nvPr>
             <p:ph type="sldImg" idx="2"/>
@@ -1424,7 +1218,7 @@
             <a:spLocks noGrp="1"/>
           </p:cNvSpPr>
           <p:nvPr>
-            <p:ph type="body" idx="3" sz="quarter"/>
+            <p:ph type="body" sz="quarter" idx="3"/>
           </p:nvPr>
         </p:nvSpPr>
         <p:spPr/>
@@ -1445,7 +1239,7 @@
             <a:spLocks noGrp="1"/>
           </p:cNvSpPr>
           <p:nvPr>
-            <p:ph type="sldNum" idx="5" sz="quarter"/>
+            <p:ph type="sldNum" sz="quarter" idx="5"/>
           </p:nvPr>
         </p:nvSpPr>
         <p:spPr/>
@@ -1459,7 +1253,7 @@
 </file>
 
 <file path=ppt/notesSlides/notesSlide22.xml><?xml version="1.0" encoding="utf-8"?>
-<p:notes xmlns:a="http://schemas.openxmlformats.org/drawingml/2006/main" xmlns:p="http://schemas.openxmlformats.org/presentationml/2006/main" xmlns:r="http://schemas.openxmlformats.org/officeDocument/2006/relationships">
+<p:notes xmlns:a="http://schemas.openxmlformats.org/drawingml/2006/main" xmlns:r="http://schemas.openxmlformats.org/officeDocument/2006/relationships" xmlns:p="http://schemas.openxmlformats.org/presentationml/2006/main">
   <p:cSld>
     <p:spTree>
       <p:nvGrpSpPr>
@@ -1479,7 +1273,7 @@
         <p:nvSpPr>
           <p:cNvPr id="2" name="Slide Image Placeholder 1"/>
           <p:cNvSpPr>
-            <a:spLocks noGrp="1"/>
+            <a:spLocks noGrp="1" noRot="1" noChangeAspect="1"/>
           </p:cNvSpPr>
           <p:nvPr>
             <p:ph type="sldImg" idx="2"/>
@@ -1494,7 +1288,7 @@
             <a:spLocks noGrp="1"/>
           </p:cNvSpPr>
           <p:nvPr>
-            <p:ph type="body" idx="3" sz="quarter"/>
+            <p:ph type="body" sz="quarter" idx="3"/>
           </p:nvPr>
         </p:nvSpPr>
         <p:spPr/>
@@ -1515,7 +1309,7 @@
             <a:spLocks noGrp="1"/>
           </p:cNvSpPr>
           <p:nvPr>
-            <p:ph type="sldNum" idx="5" sz="quarter"/>
+            <p:ph type="sldNum" sz="quarter" idx="5"/>
           </p:nvPr>
         </p:nvSpPr>
         <p:spPr/>
@@ -1529,7 +1323,7 @@
 </file>
 
 <file path=ppt/notesSlides/notesSlide3.xml><?xml version="1.0" encoding="utf-8"?>
-<p:notes xmlns:a="http://schemas.openxmlformats.org/drawingml/2006/main" xmlns:p="http://schemas.openxmlformats.org/presentationml/2006/main" xmlns:r="http://schemas.openxmlformats.org/officeDocument/2006/relationships">
+<p:notes xmlns:a="http://schemas.openxmlformats.org/drawingml/2006/main" xmlns:r="http://schemas.openxmlformats.org/officeDocument/2006/relationships" xmlns:p="http://schemas.openxmlformats.org/presentationml/2006/main">
   <p:cSld>
     <p:spTree>
       <p:nvGrpSpPr>
@@ -1549,7 +1343,7 @@
         <p:nvSpPr>
           <p:cNvPr id="2" name="Slide Image Placeholder 1"/>
           <p:cNvSpPr>
-            <a:spLocks noGrp="1"/>
+            <a:spLocks noGrp="1" noRot="1" noChangeAspect="1"/>
           </p:cNvSpPr>
           <p:nvPr>
             <p:ph type="sldImg" idx="2"/>
@@ -1564,7 +1358,7 @@
             <a:spLocks noGrp="1"/>
           </p:cNvSpPr>
           <p:nvPr>
-            <p:ph type="body" idx="3" sz="quarter"/>
+            <p:ph type="body" sz="quarter" idx="3"/>
           </p:nvPr>
         </p:nvSpPr>
         <p:spPr/>
@@ -1585,7 +1379,7 @@
             <a:spLocks noGrp="1"/>
           </p:cNvSpPr>
           <p:nvPr>
-            <p:ph type="sldNum" idx="5" sz="quarter"/>
+            <p:ph type="sldNum" sz="quarter" idx="5"/>
           </p:nvPr>
         </p:nvSpPr>
         <p:spPr/>
@@ -1599,7 +1393,7 @@
 </file>
 
 <file path=ppt/notesSlides/notesSlide4.xml><?xml version="1.0" encoding="utf-8"?>
-<p:notes xmlns:a="http://schemas.openxmlformats.org/drawingml/2006/main" xmlns:p="http://schemas.openxmlformats.org/presentationml/2006/main" xmlns:r="http://schemas.openxmlformats.org/officeDocument/2006/relationships">
+<p:notes xmlns:a="http://schemas.openxmlformats.org/drawingml/2006/main" xmlns:r="http://schemas.openxmlformats.org/officeDocument/2006/relationships" xmlns:p="http://schemas.openxmlformats.org/presentationml/2006/main">
   <p:cSld>
     <p:spTree>
       <p:nvGrpSpPr>
@@ -1619,7 +1413,7 @@
         <p:nvSpPr>
           <p:cNvPr id="2" name="Slide Image Placeholder 1"/>
           <p:cNvSpPr>
-            <a:spLocks noGrp="1"/>
+            <a:spLocks noGrp="1" noRot="1" noChangeAspect="1"/>
           </p:cNvSpPr>
           <p:nvPr>
             <p:ph type="sldImg" idx="2"/>
@@ -1634,7 +1428,7 @@
             <a:spLocks noGrp="1"/>
           </p:cNvSpPr>
           <p:nvPr>
-            <p:ph type="body" idx="3" sz="quarter"/>
+            <p:ph type="body" sz="quarter" idx="3"/>
           </p:nvPr>
         </p:nvSpPr>
         <p:spPr/>
@@ -1655,7 +1449,7 @@
             <a:spLocks noGrp="1"/>
           </p:cNvSpPr>
           <p:nvPr>
-            <p:ph type="sldNum" idx="5" sz="quarter"/>
+            <p:ph type="sldNum" sz="quarter" idx="5"/>
           </p:nvPr>
         </p:nvSpPr>
         <p:spPr/>
@@ -1669,7 +1463,7 @@
 </file>
 
 <file path=ppt/notesSlides/notesSlide5.xml><?xml version="1.0" encoding="utf-8"?>
-<p:notes xmlns:a="http://schemas.openxmlformats.org/drawingml/2006/main" xmlns:p="http://schemas.openxmlformats.org/presentationml/2006/main" xmlns:r="http://schemas.openxmlformats.org/officeDocument/2006/relationships">
+<p:notes xmlns:a="http://schemas.openxmlformats.org/drawingml/2006/main" xmlns:r="http://schemas.openxmlformats.org/officeDocument/2006/relationships" xmlns:p="http://schemas.openxmlformats.org/presentationml/2006/main">
   <p:cSld>
     <p:spTree>
       <p:nvGrpSpPr>
@@ -1689,7 +1483,7 @@
         <p:nvSpPr>
           <p:cNvPr id="2" name="Slide Image Placeholder 1"/>
           <p:cNvSpPr>
-            <a:spLocks noGrp="1"/>
+            <a:spLocks noGrp="1" noRot="1" noChangeAspect="1"/>
           </p:cNvSpPr>
           <p:nvPr>
             <p:ph type="sldImg" idx="2"/>
@@ -1704,7 +1498,7 @@
             <a:spLocks noGrp="1"/>
           </p:cNvSpPr>
           <p:nvPr>
-            <p:ph type="body" idx="3" sz="quarter"/>
+            <p:ph type="body" sz="quarter" idx="3"/>
           </p:nvPr>
         </p:nvSpPr>
         <p:spPr/>
@@ -1725,7 +1519,7 @@
             <a:spLocks noGrp="1"/>
           </p:cNvSpPr>
           <p:nvPr>
-            <p:ph type="sldNum" idx="5" sz="quarter"/>
+            <p:ph type="sldNum" sz="quarter" idx="5"/>
           </p:nvPr>
         </p:nvSpPr>
         <p:spPr/>
@@ -1739,7 +1533,7 @@
 </file>
 
 <file path=ppt/notesSlides/notesSlide6.xml><?xml version="1.0" encoding="utf-8"?>
-<p:notes xmlns:a="http://schemas.openxmlformats.org/drawingml/2006/main" xmlns:p="http://schemas.openxmlformats.org/presentationml/2006/main" xmlns:r="http://schemas.openxmlformats.org/officeDocument/2006/relationships">
+<p:notes xmlns:a="http://schemas.openxmlformats.org/drawingml/2006/main" xmlns:r="http://schemas.openxmlformats.org/officeDocument/2006/relationships" xmlns:p="http://schemas.openxmlformats.org/presentationml/2006/main">
   <p:cSld>
     <p:spTree>
       <p:nvGrpSpPr>
@@ -1759,7 +1553,7 @@
         <p:nvSpPr>
           <p:cNvPr id="2" name="Slide Image Placeholder 1"/>
           <p:cNvSpPr>
-            <a:spLocks noGrp="1"/>
+            <a:spLocks noGrp="1" noRot="1" noChangeAspect="1"/>
           </p:cNvSpPr>
           <p:nvPr>
             <p:ph type="sldImg" idx="2"/>
@@ -1774,7 +1568,7 @@
             <a:spLocks noGrp="1"/>
           </p:cNvSpPr>
           <p:nvPr>
-            <p:ph type="body" idx="3" sz="quarter"/>
+            <p:ph type="body" sz="quarter" idx="3"/>
           </p:nvPr>
         </p:nvSpPr>
         <p:spPr/>
@@ -1795,7 +1589,7 @@
             <a:spLocks noGrp="1"/>
           </p:cNvSpPr>
           <p:nvPr>
-            <p:ph type="sldNum" idx="5" sz="quarter"/>
+            <p:ph type="sldNum" sz="quarter" idx="5"/>
           </p:nvPr>
         </p:nvSpPr>
         <p:spPr/>
@@ -1809,7 +1603,7 @@
 </file>
 
 <file path=ppt/notesSlides/notesSlide7.xml><?xml version="1.0" encoding="utf-8"?>
-<p:notes xmlns:a="http://schemas.openxmlformats.org/drawingml/2006/main" xmlns:p="http://schemas.openxmlformats.org/presentationml/2006/main" xmlns:r="http://schemas.openxmlformats.org/officeDocument/2006/relationships">
+<p:notes xmlns:a="http://schemas.openxmlformats.org/drawingml/2006/main" xmlns:r="http://schemas.openxmlformats.org/officeDocument/2006/relationships" xmlns:p="http://schemas.openxmlformats.org/presentationml/2006/main">
   <p:cSld>
     <p:spTree>
       <p:nvGrpSpPr>
@@ -1829,7 +1623,7 @@
         <p:nvSpPr>
           <p:cNvPr id="2" name="Slide Image Placeholder 1"/>
           <p:cNvSpPr>
-            <a:spLocks noGrp="1"/>
+            <a:spLocks noGrp="1" noRot="1" noChangeAspect="1"/>
           </p:cNvSpPr>
           <p:nvPr>
             <p:ph type="sldImg" idx="2"/>
@@ -1844,7 +1638,7 @@
             <a:spLocks noGrp="1"/>
           </p:cNvSpPr>
           <p:nvPr>
-            <p:ph type="body" idx="3" sz="quarter"/>
+            <p:ph type="body" sz="quarter" idx="3"/>
           </p:nvPr>
         </p:nvSpPr>
         <p:spPr/>
@@ -1865,7 +1659,7 @@
             <a:spLocks noGrp="1"/>
           </p:cNvSpPr>
           <p:nvPr>
-            <p:ph type="sldNum" idx="5" sz="quarter"/>
+            <p:ph type="sldNum" sz="quarter" idx="5"/>
           </p:nvPr>
         </p:nvSpPr>
         <p:spPr/>
@@ -1879,7 +1673,7 @@
 </file>
 
 <file path=ppt/notesSlides/notesSlide8.xml><?xml version="1.0" encoding="utf-8"?>
-<p:notes xmlns:a="http://schemas.openxmlformats.org/drawingml/2006/main" xmlns:p="http://schemas.openxmlformats.org/presentationml/2006/main" xmlns:r="http://schemas.openxmlformats.org/officeDocument/2006/relationships">
+<p:notes xmlns:a="http://schemas.openxmlformats.org/drawingml/2006/main" xmlns:r="http://schemas.openxmlformats.org/officeDocument/2006/relationships" xmlns:p="http://schemas.openxmlformats.org/presentationml/2006/main">
   <p:cSld>
     <p:spTree>
       <p:nvGrpSpPr>
@@ -1899,7 +1693,7 @@
         <p:nvSpPr>
           <p:cNvPr id="2" name="Slide Image Placeholder 1"/>
           <p:cNvSpPr>
-            <a:spLocks noGrp="1"/>
+            <a:spLocks noGrp="1" noRot="1" noChangeAspect="1"/>
           </p:cNvSpPr>
           <p:nvPr>
             <p:ph type="sldImg" idx="2"/>
@@ -1914,7 +1708,7 @@
             <a:spLocks noGrp="1"/>
           </p:cNvSpPr>
           <p:nvPr>
-            <p:ph type="body" idx="3" sz="quarter"/>
+            <p:ph type="body" sz="quarter" idx="3"/>
           </p:nvPr>
         </p:nvSpPr>
         <p:spPr/>
@@ -1935,7 +1729,7 @@
             <a:spLocks noGrp="1"/>
           </p:cNvSpPr>
           <p:nvPr>
-            <p:ph type="sldNum" idx="5" sz="quarter"/>
+            <p:ph type="sldNum" sz="quarter" idx="5"/>
           </p:nvPr>
         </p:nvSpPr>
         <p:spPr/>
@@ -1949,7 +1743,7 @@
 </file>
 
 <file path=ppt/notesSlides/notesSlide9.xml><?xml version="1.0" encoding="utf-8"?>
-<p:notes xmlns:a="http://schemas.openxmlformats.org/drawingml/2006/main" xmlns:p="http://schemas.openxmlformats.org/presentationml/2006/main" xmlns:r="http://schemas.openxmlformats.org/officeDocument/2006/relationships">
+<p:notes xmlns:a="http://schemas.openxmlformats.org/drawingml/2006/main" xmlns:r="http://schemas.openxmlformats.org/officeDocument/2006/relationships" xmlns:p="http://schemas.openxmlformats.org/presentationml/2006/main">
   <p:cSld>
     <p:spTree>
       <p:nvGrpSpPr>
@@ -1969,7 +1763,7 @@
         <p:nvSpPr>
           <p:cNvPr id="2" name="Slide Image Placeholder 1"/>
           <p:cNvSpPr>
-            <a:spLocks noGrp="1"/>
+            <a:spLocks noGrp="1" noRot="1" noChangeAspect="1"/>
           </p:cNvSpPr>
           <p:nvPr>
             <p:ph type="sldImg" idx="2"/>
@@ -1984,7 +1778,7 @@
             <a:spLocks noGrp="1"/>
           </p:cNvSpPr>
           <p:nvPr>
-            <p:ph type="body" idx="3" sz="quarter"/>
+            <p:ph type="body" sz="quarter" idx="3"/>
           </p:nvPr>
         </p:nvSpPr>
         <p:spPr/>
@@ -2005,7 +1799,7 @@
             <a:spLocks noGrp="1"/>
           </p:cNvSpPr>
           <p:nvPr>
-            <p:ph type="sldNum" idx="5" sz="quarter"/>
+            <p:ph type="sldNum" sz="quarter" idx="5"/>
           </p:nvPr>
         </p:nvSpPr>
         <p:spPr/>
@@ -2056,10 +1850,9 @@
           <a:lstStyle/>
           <a:p>
             <a:r>
-              <a:rPr lang="en-US" smtClean="0"/>
+              <a:rPr lang="en-US"/>
               <a:t>Click to edit Master title style</a:t>
             </a:r>
-            <a:endParaRPr lang="en-US"/>
           </a:p>
         </p:txBody>
       </p:sp>
@@ -2175,10 +1968,9 @@
           </a:lstStyle>
           <a:p>
             <a:r>
-              <a:rPr lang="en-US" smtClean="0"/>
+              <a:rPr lang="en-US"/>
               <a:t>Click to edit Master subtitle style</a:t>
             </a:r>
-            <a:endParaRPr lang="en-US"/>
           </a:p>
         </p:txBody>
       </p:sp>
@@ -2199,7 +1991,7 @@
           <a:p>
             <a:fld id="{5BCAD085-E8A6-8845-BD4E-CB4CCA059FC4}" type="datetimeFigureOut">
               <a:rPr lang="en-US" smtClean="0"/>
-              <a:t>1/27/13</a:t>
+              <a:t>5/6/26</a:t>
             </a:fld>
             <a:endParaRPr lang="en-US"/>
           </a:p>
@@ -2293,10 +2085,9 @@
           <a:lstStyle/>
           <a:p>
             <a:r>
-              <a:rPr lang="en-US" smtClean="0"/>
+              <a:rPr lang="en-US"/>
               <a:t>Click to edit Master title style</a:t>
             </a:r>
-            <a:endParaRPr lang="en-US"/>
           </a:p>
         </p:txBody>
       </p:sp>
@@ -2317,38 +2108,37 @@
           <a:p>
             <a:pPr lvl="0"/>
             <a:r>
-              <a:rPr lang="en-US" smtClean="0"/>
+              <a:rPr lang="en-US"/>
               <a:t>Click to edit Master text styles</a:t>
             </a:r>
           </a:p>
           <a:p>
             <a:pPr lvl="1"/>
             <a:r>
-              <a:rPr lang="en-US" smtClean="0"/>
+              <a:rPr lang="en-US"/>
               <a:t>Second level</a:t>
             </a:r>
           </a:p>
           <a:p>
             <a:pPr lvl="2"/>
             <a:r>
-              <a:rPr lang="en-US" smtClean="0"/>
+              <a:rPr lang="en-US"/>
               <a:t>Third level</a:t>
             </a:r>
           </a:p>
           <a:p>
             <a:pPr lvl="3"/>
             <a:r>
-              <a:rPr lang="en-US" smtClean="0"/>
+              <a:rPr lang="en-US"/>
               <a:t>Fourth level</a:t>
             </a:r>
           </a:p>
           <a:p>
             <a:pPr lvl="4"/>
             <a:r>
-              <a:rPr lang="en-US" smtClean="0"/>
+              <a:rPr lang="en-US"/>
               <a:t>Fifth level</a:t>
             </a:r>
-            <a:endParaRPr lang="en-US"/>
           </a:p>
         </p:txBody>
       </p:sp>
@@ -2369,7 +2159,7 @@
           <a:p>
             <a:fld id="{5BCAD085-E8A6-8845-BD4E-CB4CCA059FC4}" type="datetimeFigureOut">
               <a:rPr lang="en-US" smtClean="0"/>
-              <a:t>1/27/13</a:t>
+              <a:t>5/6/26</a:t>
             </a:fld>
             <a:endParaRPr lang="en-US"/>
           </a:p>
@@ -2468,10 +2258,9 @@
           <a:lstStyle/>
           <a:p>
             <a:r>
-              <a:rPr lang="en-US" smtClean="0"/>
+              <a:rPr lang="en-US"/>
               <a:t>Click to edit Master title style</a:t>
             </a:r>
-            <a:endParaRPr lang="en-US"/>
           </a:p>
         </p:txBody>
       </p:sp>
@@ -2497,38 +2286,37 @@
           <a:p>
             <a:pPr lvl="0"/>
             <a:r>
-              <a:rPr lang="en-US" smtClean="0"/>
+              <a:rPr lang="en-US"/>
               <a:t>Click to edit Master text styles</a:t>
             </a:r>
           </a:p>
           <a:p>
             <a:pPr lvl="1"/>
             <a:r>
-              <a:rPr lang="en-US" smtClean="0"/>
+              <a:rPr lang="en-US"/>
               <a:t>Second level</a:t>
             </a:r>
           </a:p>
           <a:p>
             <a:pPr lvl="2"/>
             <a:r>
-              <a:rPr lang="en-US" smtClean="0"/>
+              <a:rPr lang="en-US"/>
               <a:t>Third level</a:t>
             </a:r>
           </a:p>
           <a:p>
             <a:pPr lvl="3"/>
             <a:r>
-              <a:rPr lang="en-US" smtClean="0"/>
+              <a:rPr lang="en-US"/>
               <a:t>Fourth level</a:t>
             </a:r>
           </a:p>
           <a:p>
             <a:pPr lvl="4"/>
             <a:r>
-              <a:rPr lang="en-US" smtClean="0"/>
+              <a:rPr lang="en-US"/>
               <a:t>Fifth level</a:t>
             </a:r>
-            <a:endParaRPr lang="en-US"/>
           </a:p>
         </p:txBody>
       </p:sp>
@@ -2549,7 +2337,7 @@
           <a:p>
             <a:fld id="{5BCAD085-E8A6-8845-BD4E-CB4CCA059FC4}" type="datetimeFigureOut">
               <a:rPr lang="en-US" smtClean="0"/>
-              <a:t>1/27/13</a:t>
+              <a:t>5/6/26</a:t>
             </a:fld>
             <a:endParaRPr lang="en-US"/>
           </a:p>
@@ -2643,10 +2431,9 @@
           <a:lstStyle/>
           <a:p>
             <a:r>
-              <a:rPr lang="en-US" smtClean="0"/>
+              <a:rPr lang="en-US"/>
               <a:t>Click to edit Master title style</a:t>
             </a:r>
-            <a:endParaRPr lang="en-US"/>
           </a:p>
         </p:txBody>
       </p:sp>
@@ -2667,38 +2454,37 @@
           <a:p>
             <a:pPr lvl="0"/>
             <a:r>
-              <a:rPr lang="en-US" smtClean="0"/>
+              <a:rPr lang="en-US"/>
               <a:t>Click to edit Master text styles</a:t>
             </a:r>
           </a:p>
           <a:p>
             <a:pPr lvl="1"/>
             <a:r>
-              <a:rPr lang="en-US" smtClean="0"/>
+              <a:rPr lang="en-US"/>
               <a:t>Second level</a:t>
             </a:r>
           </a:p>
           <a:p>
             <a:pPr lvl="2"/>
             <a:r>
-              <a:rPr lang="en-US" smtClean="0"/>
+              <a:rPr lang="en-US"/>
               <a:t>Third level</a:t>
             </a:r>
           </a:p>
           <a:p>
             <a:pPr lvl="3"/>
             <a:r>
-              <a:rPr lang="en-US" smtClean="0"/>
+              <a:rPr lang="en-US"/>
               <a:t>Fourth level</a:t>
             </a:r>
           </a:p>
           <a:p>
             <a:pPr lvl="4"/>
             <a:r>
-              <a:rPr lang="en-US" smtClean="0"/>
+              <a:rPr lang="en-US"/>
               <a:t>Fifth level</a:t>
             </a:r>
-            <a:endParaRPr lang="en-US"/>
           </a:p>
         </p:txBody>
       </p:sp>
@@ -2719,7 +2505,7 @@
           <a:p>
             <a:fld id="{5BCAD085-E8A6-8845-BD4E-CB4CCA059FC4}" type="datetimeFigureOut">
               <a:rPr lang="en-US" smtClean="0"/>
-              <a:t>1/27/13</a:t>
+              <a:t>5/6/26</a:t>
             </a:fld>
             <a:endParaRPr lang="en-US"/>
           </a:p>
@@ -2822,10 +2608,9 @@
           </a:lstStyle>
           <a:p>
             <a:r>
-              <a:rPr lang="en-US" smtClean="0"/>
+              <a:rPr lang="en-US"/>
               <a:t>Click to edit Master title style</a:t>
             </a:r>
-            <a:endParaRPr lang="en-US"/>
           </a:p>
         </p:txBody>
       </p:sp>
@@ -2942,7 +2727,7 @@
           <a:p>
             <a:pPr lvl="0"/>
             <a:r>
-              <a:rPr lang="en-US" smtClean="0"/>
+              <a:rPr lang="en-US"/>
               <a:t>Click to edit Master text styles</a:t>
             </a:r>
           </a:p>
@@ -2965,7 +2750,7 @@
           <a:p>
             <a:fld id="{5BCAD085-E8A6-8845-BD4E-CB4CCA059FC4}" type="datetimeFigureOut">
               <a:rPr lang="en-US" smtClean="0"/>
-              <a:t>1/27/13</a:t>
+              <a:t>5/6/26</a:t>
             </a:fld>
             <a:endParaRPr lang="en-US"/>
           </a:p>
@@ -3059,10 +2844,9 @@
           <a:lstStyle/>
           <a:p>
             <a:r>
-              <a:rPr lang="en-US" smtClean="0"/>
+              <a:rPr lang="en-US"/>
               <a:t>Click to edit Master title style</a:t>
             </a:r>
-            <a:endParaRPr lang="en-US"/>
           </a:p>
         </p:txBody>
       </p:sp>
@@ -3116,38 +2900,37 @@
           <a:p>
             <a:pPr lvl="0"/>
             <a:r>
-              <a:rPr lang="en-US" smtClean="0"/>
+              <a:rPr lang="en-US"/>
               <a:t>Click to edit Master text styles</a:t>
             </a:r>
           </a:p>
           <a:p>
             <a:pPr lvl="1"/>
             <a:r>
-              <a:rPr lang="en-US" smtClean="0"/>
+              <a:rPr lang="en-US"/>
               <a:t>Second level</a:t>
             </a:r>
           </a:p>
           <a:p>
             <a:pPr lvl="2"/>
             <a:r>
-              <a:rPr lang="en-US" smtClean="0"/>
+              <a:rPr lang="en-US"/>
               <a:t>Third level</a:t>
             </a:r>
           </a:p>
           <a:p>
             <a:pPr lvl="3"/>
             <a:r>
-              <a:rPr lang="en-US" smtClean="0"/>
+              <a:rPr lang="en-US"/>
               <a:t>Fourth level</a:t>
             </a:r>
           </a:p>
           <a:p>
             <a:pPr lvl="4"/>
             <a:r>
-              <a:rPr lang="en-US" smtClean="0"/>
+              <a:rPr lang="en-US"/>
               <a:t>Fifth level</a:t>
             </a:r>
-            <a:endParaRPr lang="en-US"/>
           </a:p>
         </p:txBody>
       </p:sp>
@@ -3201,38 +2984,37 @@
           <a:p>
             <a:pPr lvl="0"/>
             <a:r>
-              <a:rPr lang="en-US" smtClean="0"/>
+              <a:rPr lang="en-US"/>
               <a:t>Click to edit Master text styles</a:t>
             </a:r>
           </a:p>
           <a:p>
             <a:pPr lvl="1"/>
             <a:r>
-              <a:rPr lang="en-US" smtClean="0"/>
+              <a:rPr lang="en-US"/>
               <a:t>Second level</a:t>
             </a:r>
           </a:p>
           <a:p>
             <a:pPr lvl="2"/>
             <a:r>
-              <a:rPr lang="en-US" smtClean="0"/>
+              <a:rPr lang="en-US"/>
               <a:t>Third level</a:t>
             </a:r>
           </a:p>
           <a:p>
             <a:pPr lvl="3"/>
             <a:r>
-              <a:rPr lang="en-US" smtClean="0"/>
+              <a:rPr lang="en-US"/>
               <a:t>Fourth level</a:t>
             </a:r>
           </a:p>
           <a:p>
             <a:pPr lvl="4"/>
             <a:r>
-              <a:rPr lang="en-US" smtClean="0"/>
+              <a:rPr lang="en-US"/>
               <a:t>Fifth level</a:t>
             </a:r>
-            <a:endParaRPr lang="en-US"/>
           </a:p>
         </p:txBody>
       </p:sp>
@@ -3253,7 +3035,7 @@
           <a:p>
             <a:fld id="{5BCAD085-E8A6-8845-BD4E-CB4CCA059FC4}" type="datetimeFigureOut">
               <a:rPr lang="en-US" smtClean="0"/>
-              <a:t>1/27/13</a:t>
+              <a:t>5/6/26</a:t>
             </a:fld>
             <a:endParaRPr lang="en-US"/>
           </a:p>
@@ -3351,10 +3133,9 @@
           </a:lstStyle>
           <a:p>
             <a:r>
-              <a:rPr lang="en-US" smtClean="0"/>
+              <a:rPr lang="en-US"/>
               <a:t>Click to edit Master title style</a:t>
             </a:r>
-            <a:endParaRPr lang="en-US"/>
           </a:p>
         </p:txBody>
       </p:sp>
@@ -3417,7 +3198,7 @@
           <a:p>
             <a:pPr lvl="0"/>
             <a:r>
-              <a:rPr lang="en-US" smtClean="0"/>
+              <a:rPr lang="en-US"/>
               <a:t>Click to edit Master text styles</a:t>
             </a:r>
           </a:p>
@@ -3473,38 +3254,37 @@
           <a:p>
             <a:pPr lvl="0"/>
             <a:r>
-              <a:rPr lang="en-US" smtClean="0"/>
+              <a:rPr lang="en-US"/>
               <a:t>Click to edit Master text styles</a:t>
             </a:r>
           </a:p>
           <a:p>
             <a:pPr lvl="1"/>
             <a:r>
-              <a:rPr lang="en-US" smtClean="0"/>
+              <a:rPr lang="en-US"/>
               <a:t>Second level</a:t>
             </a:r>
           </a:p>
           <a:p>
             <a:pPr lvl="2"/>
             <a:r>
-              <a:rPr lang="en-US" smtClean="0"/>
+              <a:rPr lang="en-US"/>
               <a:t>Third level</a:t>
             </a:r>
           </a:p>
           <a:p>
             <a:pPr lvl="3"/>
             <a:r>
-              <a:rPr lang="en-US" smtClean="0"/>
+              <a:rPr lang="en-US"/>
               <a:t>Fourth level</a:t>
             </a:r>
           </a:p>
           <a:p>
             <a:pPr lvl="4"/>
             <a:r>
-              <a:rPr lang="en-US" smtClean="0"/>
+              <a:rPr lang="en-US"/>
               <a:t>Fifth level</a:t>
             </a:r>
-            <a:endParaRPr lang="en-US"/>
           </a:p>
         </p:txBody>
       </p:sp>
@@ -3567,7 +3347,7 @@
           <a:p>
             <a:pPr lvl="0"/>
             <a:r>
-              <a:rPr lang="en-US" smtClean="0"/>
+              <a:rPr lang="en-US"/>
               <a:t>Click to edit Master text styles</a:t>
             </a:r>
           </a:p>
@@ -3623,38 +3403,37 @@
           <a:p>
             <a:pPr lvl="0"/>
             <a:r>
-              <a:rPr lang="en-US" smtClean="0"/>
+              <a:rPr lang="en-US"/>
               <a:t>Click to edit Master text styles</a:t>
             </a:r>
           </a:p>
           <a:p>
             <a:pPr lvl="1"/>
             <a:r>
-              <a:rPr lang="en-US" smtClean="0"/>
+              <a:rPr lang="en-US"/>
               <a:t>Second level</a:t>
             </a:r>
           </a:p>
           <a:p>
             <a:pPr lvl="2"/>
             <a:r>
-              <a:rPr lang="en-US" smtClean="0"/>
+              <a:rPr lang="en-US"/>
               <a:t>Third level</a:t>
             </a:r>
           </a:p>
           <a:p>
             <a:pPr lvl="3"/>
             <a:r>
-              <a:rPr lang="en-US" smtClean="0"/>
+              <a:rPr lang="en-US"/>
               <a:t>Fourth level</a:t>
             </a:r>
           </a:p>
           <a:p>
             <a:pPr lvl="4"/>
             <a:r>
-              <a:rPr lang="en-US" smtClean="0"/>
+              <a:rPr lang="en-US"/>
               <a:t>Fifth level</a:t>
             </a:r>
-            <a:endParaRPr lang="en-US"/>
           </a:p>
         </p:txBody>
       </p:sp>
@@ -3675,7 +3454,7 @@
           <a:p>
             <a:fld id="{5BCAD085-E8A6-8845-BD4E-CB4CCA059FC4}" type="datetimeFigureOut">
               <a:rPr lang="en-US" smtClean="0"/>
-              <a:t>1/27/13</a:t>
+              <a:t>5/6/26</a:t>
             </a:fld>
             <a:endParaRPr lang="en-US"/>
           </a:p>
@@ -3769,10 +3548,9 @@
           <a:lstStyle/>
           <a:p>
             <a:r>
-              <a:rPr lang="en-US" smtClean="0"/>
+              <a:rPr lang="en-US"/>
               <a:t>Click to edit Master title style</a:t>
             </a:r>
-            <a:endParaRPr lang="en-US"/>
           </a:p>
         </p:txBody>
       </p:sp>
@@ -3793,7 +3571,7 @@
           <a:p>
             <a:fld id="{5BCAD085-E8A6-8845-BD4E-CB4CCA059FC4}" type="datetimeFigureOut">
               <a:rPr lang="en-US" smtClean="0"/>
-              <a:t>1/27/13</a:t>
+              <a:t>5/6/26</a:t>
             </a:fld>
             <a:endParaRPr lang="en-US"/>
           </a:p>
@@ -3888,7 +3666,7 @@
           <a:p>
             <a:fld id="{5BCAD085-E8A6-8845-BD4E-CB4CCA059FC4}" type="datetimeFigureOut">
               <a:rPr lang="en-US" smtClean="0"/>
-              <a:t>1/27/13</a:t>
+              <a:t>5/6/26</a:t>
             </a:fld>
             <a:endParaRPr lang="en-US"/>
           </a:p>
@@ -3991,10 +3769,9 @@
           </a:lstStyle>
           <a:p>
             <a:r>
-              <a:rPr lang="en-US" smtClean="0"/>
+              <a:rPr lang="en-US"/>
               <a:t>Click to edit Master title style</a:t>
             </a:r>
-            <a:endParaRPr lang="en-US"/>
           </a:p>
         </p:txBody>
       </p:sp>
@@ -4048,38 +3825,37 @@
           <a:p>
             <a:pPr lvl="0"/>
             <a:r>
-              <a:rPr lang="en-US" smtClean="0"/>
+              <a:rPr lang="en-US"/>
               <a:t>Click to edit Master text styles</a:t>
             </a:r>
           </a:p>
           <a:p>
             <a:pPr lvl="1"/>
             <a:r>
-              <a:rPr lang="en-US" smtClean="0"/>
+              <a:rPr lang="en-US"/>
               <a:t>Second level</a:t>
             </a:r>
           </a:p>
           <a:p>
             <a:pPr lvl="2"/>
             <a:r>
-              <a:rPr lang="en-US" smtClean="0"/>
+              <a:rPr lang="en-US"/>
               <a:t>Third level</a:t>
             </a:r>
           </a:p>
           <a:p>
             <a:pPr lvl="3"/>
             <a:r>
-              <a:rPr lang="en-US" smtClean="0"/>
+              <a:rPr lang="en-US"/>
               <a:t>Fourth level</a:t>
             </a:r>
           </a:p>
           <a:p>
             <a:pPr lvl="4"/>
             <a:r>
-              <a:rPr lang="en-US" smtClean="0"/>
+              <a:rPr lang="en-US"/>
               <a:t>Fifth level</a:t>
             </a:r>
-            <a:endParaRPr lang="en-US"/>
           </a:p>
         </p:txBody>
       </p:sp>
@@ -4142,7 +3918,7 @@
           <a:p>
             <a:pPr lvl="0"/>
             <a:r>
-              <a:rPr lang="en-US" smtClean="0"/>
+              <a:rPr lang="en-US"/>
               <a:t>Click to edit Master text styles</a:t>
             </a:r>
           </a:p>
@@ -4165,7 +3941,7 @@
           <a:p>
             <a:fld id="{5BCAD085-E8A6-8845-BD4E-CB4CCA059FC4}" type="datetimeFigureOut">
               <a:rPr lang="en-US" smtClean="0"/>
-              <a:t>1/27/13</a:t>
+              <a:t>5/6/26</a:t>
             </a:fld>
             <a:endParaRPr lang="en-US"/>
           </a:p>
@@ -4268,10 +4044,9 @@
           </a:lstStyle>
           <a:p>
             <a:r>
-              <a:rPr lang="en-US" smtClean="0"/>
+              <a:rPr lang="en-US"/>
               <a:t>Click to edit Master title style</a:t>
             </a:r>
-            <a:endParaRPr lang="en-US"/>
           </a:p>
         </p:txBody>
       </p:sp>
@@ -4395,7 +4170,7 @@
           <a:p>
             <a:pPr lvl="0"/>
             <a:r>
-              <a:rPr lang="en-US" smtClean="0"/>
+              <a:rPr lang="en-US"/>
               <a:t>Click to edit Master text styles</a:t>
             </a:r>
           </a:p>
@@ -4418,7 +4193,7 @@
           <a:p>
             <a:fld id="{5BCAD085-E8A6-8845-BD4E-CB4CCA059FC4}" type="datetimeFigureOut">
               <a:rPr lang="en-US" smtClean="0"/>
-              <a:t>1/27/13</a:t>
+              <a:t>5/6/26</a:t>
             </a:fld>
             <a:endParaRPr lang="en-US"/>
           </a:p>
@@ -4527,10 +4302,9 @@
           <a:lstStyle/>
           <a:p>
             <a:r>
-              <a:rPr lang="en-US" smtClean="0"/>
+              <a:rPr lang="en-US"/>
               <a:t>Click to edit Master title style</a:t>
             </a:r>
-            <a:endParaRPr lang="en-US"/>
           </a:p>
         </p:txBody>
       </p:sp>
@@ -4561,38 +4335,37 @@
           <a:p>
             <a:pPr lvl="0"/>
             <a:r>
-              <a:rPr lang="en-US" smtClean="0"/>
+              <a:rPr lang="en-US"/>
               <a:t>Click to edit Master text styles</a:t>
             </a:r>
           </a:p>
           <a:p>
             <a:pPr lvl="1"/>
             <a:r>
-              <a:rPr lang="en-US" smtClean="0"/>
+              <a:rPr lang="en-US"/>
               <a:t>Second level</a:t>
             </a:r>
           </a:p>
           <a:p>
             <a:pPr lvl="2"/>
             <a:r>
-              <a:rPr lang="en-US" smtClean="0"/>
+              <a:rPr lang="en-US"/>
               <a:t>Third level</a:t>
             </a:r>
           </a:p>
           <a:p>
             <a:pPr lvl="3"/>
             <a:r>
-              <a:rPr lang="en-US" smtClean="0"/>
+              <a:rPr lang="en-US"/>
               <a:t>Fourth level</a:t>
             </a:r>
           </a:p>
           <a:p>
             <a:pPr lvl="4"/>
             <a:r>
-              <a:rPr lang="en-US" smtClean="0"/>
+              <a:rPr lang="en-US"/>
               <a:t>Fifth level</a:t>
             </a:r>
-            <a:endParaRPr lang="en-US"/>
           </a:p>
         </p:txBody>
       </p:sp>
@@ -4631,7 +4404,7 @@
           <a:p>
             <a:fld id="{5BCAD085-E8A6-8845-BD4E-CB4CCA059FC4}" type="datetimeFigureOut">
               <a:rPr lang="en-US" smtClean="0"/>
-              <a:t>1/27/13</a:t>
+              <a:t>5/6/26</a:t>
             </a:fld>
             <a:endParaRPr lang="en-US"/>
           </a:p>
@@ -4990,7 +4763,7 @@
 </file>
 
 <file path=ppt/slides/slide1.xml><?xml version="1.0" encoding="utf-8"?>
-<p:sld xmlns:a="http://schemas.openxmlformats.org/drawingml/2006/main" xmlns:p="http://schemas.openxmlformats.org/presentationml/2006/main" xmlns:r="http://schemas.openxmlformats.org/officeDocument/2006/relationships">
+<p:sld xmlns:a="http://schemas.openxmlformats.org/drawingml/2006/main" xmlns:r="http://schemas.openxmlformats.org/officeDocument/2006/relationships" xmlns:p="http://schemas.openxmlformats.org/presentationml/2006/main">
   <p:cSld>
     <p:spTree>
       <p:nvGrpSpPr>
@@ -4998,7 +4771,14 @@
         <p:cNvGrpSpPr/>
         <p:nvPr/>
       </p:nvGrpSpPr>
-      <p:grpSpPr/>
+      <p:grpSpPr>
+        <a:xfrm>
+          <a:off x="0" y="0"/>
+          <a:ext cx="0" cy="0"/>
+          <a:chOff x="0" y="0"/>
+          <a:chExt cx="0" cy="0"/>
+        </a:xfrm>
+      </p:grpSpPr>
       <p:sp>
         <p:nvSpPr>
           <p:cNvPr id="2" name="Rectangle 1"/>
@@ -5039,6 +4819,7 @@
           <a:lstStyle/>
           <a:p>
             <a:pPr algn="ctr"/>
+            <a:endParaRPr/>
           </a:p>
         </p:txBody>
       </p:sp>
@@ -5059,7 +4840,7 @@
           <a:noFill/>
         </p:spPr>
         <p:txBody>
-          <a:bodyPr wrap="square" lIns="0" rIns="0" tIns="0" bIns="0" anchor="t">
+          <a:bodyPr wrap="square" lIns="0" tIns="0" rIns="0" bIns="0" anchor="t">
             <a:spAutoFit/>
           </a:bodyPr>
           <a:lstStyle/>
@@ -5112,7 +4893,7 @@
           <a:noFill/>
         </p:spPr>
         <p:txBody>
-          <a:bodyPr wrap="square" lIns="0" rIns="0" tIns="0" bIns="0" anchor="t">
+          <a:bodyPr wrap="square" lIns="0" tIns="0" rIns="0" bIns="0" anchor="t">
             <a:spAutoFit/>
           </a:bodyPr>
           <a:lstStyle/>
@@ -5139,22 +4920,22 @@
         <p:spPr>
           <a:xfrm>
             <a:off x="950976" y="4032504"/>
-            <a:ext cx="13716000" cy="3200400"/>
-          </a:xfrm>
-          <a:prstGeom prst="rect">
-            <a:avLst/>
-          </a:prstGeom>
-          <a:noFill/>
-        </p:spPr>
-        <p:txBody>
-          <a:bodyPr wrap="square" lIns="0" rIns="0" tIns="0" bIns="0">
+            <a:ext cx="13716000" cy="2954655"/>
+          </a:xfrm>
+          <a:prstGeom prst="rect">
+            <a:avLst/>
+          </a:prstGeom>
+          <a:noFill/>
+        </p:spPr>
+        <p:txBody>
+          <a:bodyPr wrap="square" lIns="0" tIns="0" rIns="0" bIns="0">
             <a:spAutoFit/>
           </a:bodyPr>
           <a:lstStyle/>
           <a:p>
             <a:pPr algn="l"/>
             <a:r>
-              <a:rPr sz="9600" b="1">
+              <a:rPr sz="9600" b="1" dirty="0">
                 <a:solidFill>
                   <a:srgbClr val="FFFFFF"/>
                 </a:solidFill>
@@ -5163,7 +4944,7 @@
               <a:t>Building </a:t>
             </a:r>
             <a:r>
-              <a:rPr sz="9600" b="1">
+              <a:rPr sz="9600" b="1" dirty="0">
                 <a:solidFill>
                   <a:srgbClr val="3FE0D0"/>
                 </a:solidFill>
@@ -5175,13 +4956,13 @@
           <a:p>
             <a:pPr algn="l"/>
             <a:r>
-              <a:rPr sz="9600" b="1">
+              <a:rPr sz="9600" b="1" dirty="0">
                 <a:solidFill>
                   <a:srgbClr val="FFFFFF"/>
                 </a:solidFill>
                 <a:latin typeface="Arial"/>
               </a:rPr>
-              <a:t>— Part 1</a:t>
+              <a:t>Part 1</a:t>
             </a:r>
           </a:p>
         </p:txBody>
@@ -5203,7 +4984,7 @@
           <a:noFill/>
         </p:spPr>
         <p:txBody>
-          <a:bodyPr wrap="square" lIns="0" rIns="0" tIns="0" bIns="0" anchor="t">
+          <a:bodyPr wrap="square" lIns="0" tIns="0" rIns="0" bIns="0" anchor="t">
             <a:spAutoFit/>
           </a:bodyPr>
           <a:lstStyle/>
@@ -5217,181 +4998,6 @@
                 <a:latin typeface="Arial"/>
               </a:rPr>
               <a:t>The concepts, the files, and what they look like when they're done right.</a:t>
-            </a:r>
-          </a:p>
-        </p:txBody>
-      </p:sp>
-      <p:sp>
-        <p:nvSpPr>
-          <p:cNvPr id="7" name="TextBox 6"/>
-          <p:cNvSpPr txBox="1"/>
-          <p:nvPr/>
-        </p:nvSpPr>
-        <p:spPr>
-          <a:xfrm>
-            <a:off x="950976" y="8321040"/>
-            <a:ext cx="7315200" cy="310896"/>
-          </a:xfrm>
-          <a:prstGeom prst="rect">
-            <a:avLst/>
-          </a:prstGeom>
-          <a:noFill/>
-        </p:spPr>
-        <p:txBody>
-          <a:bodyPr wrap="square" lIns="0" rIns="0" tIns="0" bIns="0" anchor="t">
-            <a:spAutoFit/>
-          </a:bodyPr>
-          <a:lstStyle/>
-          <a:p>
-            <a:pPr algn="l"/>
-            <a:r>
-              <a:rPr sz="1100" b="1">
-                <a:solidFill>
-                  <a:srgbClr val="F58220"/>
-                </a:solidFill>
-                <a:latin typeface="Arial"/>
-              </a:rPr>
-              <a:t>SPEAKER</a:t>
-            </a:r>
-          </a:p>
-        </p:txBody>
-      </p:sp>
-      <p:sp>
-        <p:nvSpPr>
-          <p:cNvPr id="8" name="TextBox 7"/>
-          <p:cNvSpPr txBox="1"/>
-          <p:nvPr/>
-        </p:nvSpPr>
-        <p:spPr>
-          <a:xfrm>
-            <a:off x="950976" y="8613648"/>
-            <a:ext cx="7315200" cy="457200"/>
-          </a:xfrm>
-          <a:prstGeom prst="rect">
-            <a:avLst/>
-          </a:prstGeom>
-          <a:noFill/>
-        </p:spPr>
-        <p:txBody>
-          <a:bodyPr wrap="square" lIns="0" rIns="0" tIns="0" bIns="0" anchor="t">
-            <a:spAutoFit/>
-          </a:bodyPr>
-          <a:lstStyle/>
-          <a:p>
-            <a:pPr algn="l"/>
-            <a:r>
-              <a:rPr sz="2800" b="1">
-                <a:solidFill>
-                  <a:srgbClr val="FFFFFF"/>
-                </a:solidFill>
-                <a:latin typeface="Arial"/>
-              </a:rPr>
-              <a:t>Chris Kehayias</a:t>
-            </a:r>
-          </a:p>
-        </p:txBody>
-      </p:sp>
-      <p:sp>
-        <p:nvSpPr>
-          <p:cNvPr id="9" name="TextBox 8"/>
-          <p:cNvSpPr txBox="1"/>
-          <p:nvPr/>
-        </p:nvSpPr>
-        <p:spPr>
-          <a:xfrm>
-            <a:off x="10058400" y="8321040"/>
-            <a:ext cx="7315200" cy="310896"/>
-          </a:xfrm>
-          <a:prstGeom prst="rect">
-            <a:avLst/>
-          </a:prstGeom>
-          <a:noFill/>
-        </p:spPr>
-        <p:txBody>
-          <a:bodyPr wrap="square" lIns="0" rIns="0" tIns="0" bIns="0" anchor="t">
-            <a:spAutoFit/>
-          </a:bodyPr>
-          <a:lstStyle/>
-          <a:p>
-            <a:pPr algn="l"/>
-            <a:r>
-              <a:rPr sz="1100" b="1">
-                <a:solidFill>
-                  <a:srgbClr val="F58220"/>
-                </a:solidFill>
-                <a:latin typeface="Arial"/>
-              </a:rPr>
-              <a:t>WHEN</a:t>
-            </a:r>
-          </a:p>
-        </p:txBody>
-      </p:sp>
-      <p:sp>
-        <p:nvSpPr>
-          <p:cNvPr id="10" name="TextBox 9"/>
-          <p:cNvSpPr txBox="1"/>
-          <p:nvPr/>
-        </p:nvSpPr>
-        <p:spPr>
-          <a:xfrm>
-            <a:off x="10058400" y="8613648"/>
-            <a:ext cx="8229600" cy="457200"/>
-          </a:xfrm>
-          <a:prstGeom prst="rect">
-            <a:avLst/>
-          </a:prstGeom>
-          <a:noFill/>
-        </p:spPr>
-        <p:txBody>
-          <a:bodyPr wrap="square" lIns="0" rIns="0" tIns="0" bIns="0" anchor="t">
-            <a:spAutoFit/>
-          </a:bodyPr>
-          <a:lstStyle/>
-          <a:p>
-            <a:pPr algn="l"/>
-            <a:r>
-              <a:rPr sz="2200" b="1">
-                <a:solidFill>
-                  <a:srgbClr val="FFFFFF"/>
-                </a:solidFill>
-                <a:latin typeface="Arial"/>
-              </a:rPr>
-              <a:t>Day 1  ·  11:30 AM – 12:30 PM  ·  60 min</a:t>
-            </a:r>
-          </a:p>
-        </p:txBody>
-      </p:sp>
-      <p:sp>
-        <p:nvSpPr>
-          <p:cNvPr id="11" name="TextBox 10"/>
-          <p:cNvSpPr txBox="1"/>
-          <p:nvPr/>
-        </p:nvSpPr>
-        <p:spPr>
-          <a:xfrm>
-            <a:off x="15544800" y="758952"/>
-            <a:ext cx="1828800" cy="347472"/>
-          </a:xfrm>
-          <a:prstGeom prst="rect">
-            <a:avLst/>
-          </a:prstGeom>
-          <a:noFill/>
-        </p:spPr>
-        <p:txBody>
-          <a:bodyPr wrap="square" lIns="0" rIns="0" tIns="0" bIns="0" anchor="t">
-            <a:spAutoFit/>
-          </a:bodyPr>
-          <a:lstStyle/>
-          <a:p>
-            <a:pPr algn="r"/>
-            <a:r>
-              <a:rPr sz="1100" b="1">
-                <a:solidFill>
-                  <a:srgbClr val="C9CBD1"/>
-                </a:solidFill>
-                <a:latin typeface="Arial"/>
-              </a:rPr>
-              <a:t>SESSION 04</a:t>
             </a:r>
           </a:p>
         </p:txBody>
@@ -5405,7 +5011,7 @@
 </file>
 
 <file path=ppt/slides/slide10.xml><?xml version="1.0" encoding="utf-8"?>
-<p:sld xmlns:a="http://schemas.openxmlformats.org/drawingml/2006/main" xmlns:p="http://schemas.openxmlformats.org/presentationml/2006/main" xmlns:r="http://schemas.openxmlformats.org/officeDocument/2006/relationships">
+<p:sld xmlns:a="http://schemas.openxmlformats.org/drawingml/2006/main" xmlns:r="http://schemas.openxmlformats.org/officeDocument/2006/relationships" xmlns:p="http://schemas.openxmlformats.org/presentationml/2006/main">
   <p:cSld>
     <p:spTree>
       <p:nvGrpSpPr>
@@ -5413,7 +5019,14 @@
         <p:cNvGrpSpPr/>
         <p:nvPr/>
       </p:nvGrpSpPr>
-      <p:grpSpPr/>
+      <p:grpSpPr>
+        <a:xfrm>
+          <a:off x="0" y="0"/>
+          <a:ext cx="0" cy="0"/>
+          <a:chOff x="0" y="0"/>
+          <a:chExt cx="0" cy="0"/>
+        </a:xfrm>
+      </p:grpSpPr>
       <p:sp>
         <p:nvSpPr>
           <p:cNvPr id="2" name="Rectangle 1"/>
@@ -5454,6 +5067,7 @@
           <a:lstStyle/>
           <a:p>
             <a:pPr algn="ctr"/>
+            <a:endParaRPr/>
           </a:p>
         </p:txBody>
       </p:sp>
@@ -5474,7 +5088,7 @@
           <a:noFill/>
         </p:spPr>
         <p:txBody>
-          <a:bodyPr wrap="square" lIns="0" rIns="0" tIns="0" bIns="0" anchor="t">
+          <a:bodyPr wrap="square" lIns="0" tIns="0" rIns="0" bIns="0" anchor="t">
             <a:spAutoFit/>
           </a:bodyPr>
           <a:lstStyle/>
@@ -5509,7 +5123,7 @@
           <a:noFill/>
         </p:spPr>
         <p:txBody>
-          <a:bodyPr wrap="square" lIns="0" rIns="0" tIns="0" bIns="0" anchor="t">
+          <a:bodyPr wrap="square" lIns="0" tIns="0" rIns="0" bIns="0" anchor="t">
             <a:spAutoFit/>
           </a:bodyPr>
           <a:lstStyle/>
@@ -5567,6 +5181,7 @@
           <a:lstStyle/>
           <a:p>
             <a:pPr algn="ctr"/>
+            <a:endParaRPr/>
           </a:p>
         </p:txBody>
       </p:sp>
@@ -5587,7 +5202,7 @@
           <a:noFill/>
         </p:spPr>
         <p:txBody>
-          <a:bodyPr wrap="square" lIns="0" rIns="0" tIns="0" bIns="0" anchor="t">
+          <a:bodyPr wrap="square" lIns="0" tIns="0" rIns="0" bIns="0" anchor="t">
             <a:spAutoFit/>
           </a:bodyPr>
           <a:lstStyle/>
@@ -5622,7 +5237,7 @@
           <a:noFill/>
         </p:spPr>
         <p:txBody>
-          <a:bodyPr wrap="square" lIns="0" rIns="0" tIns="0" bIns="0" anchor="t">
+          <a:bodyPr wrap="square" lIns="0" tIns="0" rIns="0" bIns="0" anchor="t">
             <a:spAutoFit/>
           </a:bodyPr>
           <a:lstStyle/>
@@ -5657,7 +5272,7 @@
           <a:noFill/>
         </p:spPr>
         <p:txBody>
-          <a:bodyPr wrap="square" lIns="0" rIns="0" tIns="0" bIns="0" anchor="t">
+          <a:bodyPr wrap="square" lIns="0" tIns="0" rIns="0" bIns="0" anchor="t">
             <a:spAutoFit/>
           </a:bodyPr>
           <a:lstStyle/>
@@ -5701,7 +5316,7 @@
           <a:noFill/>
         </p:spPr>
         <p:txBody>
-          <a:bodyPr wrap="square" lIns="0" rIns="0" tIns="0" bIns="0" anchor="t">
+          <a:bodyPr wrap="square" lIns="0" tIns="0" rIns="0" bIns="0" anchor="t">
             <a:spAutoFit/>
           </a:bodyPr>
           <a:lstStyle/>
@@ -5736,7 +5351,7 @@
           <a:noFill/>
         </p:spPr>
         <p:txBody>
-          <a:bodyPr wrap="square" lIns="0" rIns="0" tIns="0" bIns="0">
+          <a:bodyPr wrap="square" lIns="0" tIns="0" rIns="0" bIns="0">
             <a:spAutoFit/>
           </a:bodyPr>
           <a:lstStyle/>
@@ -5858,6 +5473,7 @@
           <a:lstStyle/>
           <a:p>
             <a:pPr algn="ctr"/>
+            <a:endParaRPr/>
           </a:p>
         </p:txBody>
       </p:sp>
@@ -5878,7 +5494,7 @@
           <a:noFill/>
         </p:spPr>
         <p:txBody>
-          <a:bodyPr wrap="square" lIns="0" rIns="0" tIns="0" bIns="0" anchor="t">
+          <a:bodyPr wrap="square" lIns="0" tIns="0" rIns="0" bIns="0" anchor="t">
             <a:spAutoFit/>
           </a:bodyPr>
           <a:lstStyle/>
@@ -5913,7 +5529,7 @@
           <a:noFill/>
         </p:spPr>
         <p:txBody>
-          <a:bodyPr wrap="square" lIns="0" rIns="0" tIns="0" bIns="0">
+          <a:bodyPr wrap="square" lIns="0" tIns="0" rIns="0" bIns="0">
             <a:spAutoFit/>
           </a:bodyPr>
           <a:lstStyle/>
@@ -5945,15 +5561,12 @@
                 <a:spcPts val="600"/>
               </a:spcAft>
             </a:pPr>
-            <a:r>
-              <a:rPr sz="1500" b="0">
-                <a:solidFill>
-                  <a:srgbClr val="E8E5DD"/>
-                </a:solidFill>
-                <a:latin typeface="Consolas"/>
-              </a:rPr>
-              <a:t/>
-            </a:r>
+            <a:endParaRPr sz="1500" b="0">
+              <a:solidFill>
+                <a:srgbClr val="E8E5DD"/>
+              </a:solidFill>
+              <a:latin typeface="Consolas"/>
+            </a:endParaRPr>
           </a:p>
           <a:p>
             <a:pPr algn="l">
@@ -6080,7 +5693,7 @@
 </file>
 
 <file path=ppt/slides/slide11.xml><?xml version="1.0" encoding="utf-8"?>
-<p:sld xmlns:a="http://schemas.openxmlformats.org/drawingml/2006/main" xmlns:p="http://schemas.openxmlformats.org/presentationml/2006/main" xmlns:r="http://schemas.openxmlformats.org/officeDocument/2006/relationships">
+<p:sld xmlns:a="http://schemas.openxmlformats.org/drawingml/2006/main" xmlns:r="http://schemas.openxmlformats.org/officeDocument/2006/relationships" xmlns:p="http://schemas.openxmlformats.org/presentationml/2006/main">
   <p:cSld>
     <p:spTree>
       <p:nvGrpSpPr>
@@ -6088,7 +5701,14 @@
         <p:cNvGrpSpPr/>
         <p:nvPr/>
       </p:nvGrpSpPr>
-      <p:grpSpPr/>
+      <p:grpSpPr>
+        <a:xfrm>
+          <a:off x="0" y="0"/>
+          <a:ext cx="0" cy="0"/>
+          <a:chOff x="0" y="0"/>
+          <a:chExt cx="0" cy="0"/>
+        </a:xfrm>
+      </p:grpSpPr>
       <p:sp>
         <p:nvSpPr>
           <p:cNvPr id="2" name="Rectangle 1"/>
@@ -6129,6 +5749,7 @@
           <a:lstStyle/>
           <a:p>
             <a:pPr algn="ctr"/>
+            <a:endParaRPr/>
           </a:p>
         </p:txBody>
       </p:sp>
@@ -6149,7 +5770,7 @@
           <a:noFill/>
         </p:spPr>
         <p:txBody>
-          <a:bodyPr wrap="square" lIns="0" rIns="0" tIns="0" bIns="0" anchor="t">
+          <a:bodyPr wrap="square" lIns="0" tIns="0" rIns="0" bIns="0" anchor="t">
             <a:spAutoFit/>
           </a:bodyPr>
           <a:lstStyle/>
@@ -6184,7 +5805,7 @@
           <a:noFill/>
         </p:spPr>
         <p:txBody>
-          <a:bodyPr wrap="square" lIns="0" rIns="0" tIns="0" bIns="0" anchor="t">
+          <a:bodyPr wrap="square" lIns="0" tIns="0" rIns="0" bIns="0" anchor="t">
             <a:spAutoFit/>
           </a:bodyPr>
           <a:lstStyle/>
@@ -6242,6 +5863,7 @@
           <a:lstStyle/>
           <a:p>
             <a:pPr algn="ctr"/>
+            <a:endParaRPr/>
           </a:p>
         </p:txBody>
       </p:sp>
@@ -6262,7 +5884,7 @@
           <a:noFill/>
         </p:spPr>
         <p:txBody>
-          <a:bodyPr wrap="square" lIns="0" rIns="0" tIns="0" bIns="0" anchor="t">
+          <a:bodyPr wrap="square" lIns="0" tIns="0" rIns="0" bIns="0" anchor="t">
             <a:spAutoFit/>
           </a:bodyPr>
           <a:lstStyle/>
@@ -6297,7 +5919,7 @@
           <a:noFill/>
         </p:spPr>
         <p:txBody>
-          <a:bodyPr wrap="square" lIns="0" rIns="0" tIns="0" bIns="0" anchor="t">
+          <a:bodyPr wrap="square" lIns="0" tIns="0" rIns="0" bIns="0" anchor="t">
             <a:spAutoFit/>
           </a:bodyPr>
           <a:lstStyle/>
@@ -6332,7 +5954,7 @@
           <a:noFill/>
         </p:spPr>
         <p:txBody>
-          <a:bodyPr wrap="square" lIns="0" rIns="0" tIns="0" bIns="0" anchor="t">
+          <a:bodyPr wrap="square" lIns="0" tIns="0" rIns="0" bIns="0" anchor="t">
             <a:spAutoFit/>
           </a:bodyPr>
           <a:lstStyle/>
@@ -6376,7 +5998,7 @@
           <a:noFill/>
         </p:spPr>
         <p:txBody>
-          <a:bodyPr wrap="square" lIns="0" rIns="0" tIns="0" bIns="0" anchor="t">
+          <a:bodyPr wrap="square" lIns="0" tIns="0" rIns="0" bIns="0" anchor="t">
             <a:spAutoFit/>
           </a:bodyPr>
           <a:lstStyle/>
@@ -6411,7 +6033,7 @@
           <a:noFill/>
         </p:spPr>
         <p:txBody>
-          <a:bodyPr wrap="square" lIns="0" rIns="0" tIns="0" bIns="0">
+          <a:bodyPr wrap="square" lIns="0" tIns="0" rIns="0" bIns="0">
             <a:spAutoFit/>
           </a:bodyPr>
           <a:lstStyle/>
@@ -6533,6 +6155,7 @@
           <a:lstStyle/>
           <a:p>
             <a:pPr algn="ctr"/>
+            <a:endParaRPr/>
           </a:p>
         </p:txBody>
       </p:sp>
@@ -6553,7 +6176,7 @@
           <a:noFill/>
         </p:spPr>
         <p:txBody>
-          <a:bodyPr wrap="square" lIns="0" rIns="0" tIns="0" bIns="0" anchor="t">
+          <a:bodyPr wrap="square" lIns="0" tIns="0" rIns="0" bIns="0" anchor="t">
             <a:spAutoFit/>
           </a:bodyPr>
           <a:lstStyle/>
@@ -6588,7 +6211,7 @@
           <a:noFill/>
         </p:spPr>
         <p:txBody>
-          <a:bodyPr wrap="square" lIns="0" rIns="0" tIns="0" bIns="0">
+          <a:bodyPr wrap="square" lIns="0" tIns="0" rIns="0" bIns="0">
             <a:spAutoFit/>
           </a:bodyPr>
           <a:lstStyle/>
@@ -6620,15 +6243,12 @@
                 <a:spcPts val="600"/>
               </a:spcAft>
             </a:pPr>
-            <a:r>
-              <a:rPr sz="1500" b="0">
-                <a:solidFill>
-                  <a:srgbClr val="E8E5DD"/>
-                </a:solidFill>
-                <a:latin typeface="Consolas"/>
-              </a:rPr>
-              <a:t/>
-            </a:r>
+            <a:endParaRPr sz="1500" b="0">
+              <a:solidFill>
+                <a:srgbClr val="E8E5DD"/>
+              </a:solidFill>
+              <a:latin typeface="Consolas"/>
+            </a:endParaRPr>
           </a:p>
           <a:p>
             <a:pPr algn="l">
@@ -6734,15 +6354,12 @@
                 <a:spcPts val="600"/>
               </a:spcAft>
             </a:pPr>
-            <a:r>
-              <a:rPr sz="1500" b="0">
-                <a:solidFill>
-                  <a:srgbClr val="E8E5DD"/>
-                </a:solidFill>
-                <a:latin typeface="Consolas"/>
-              </a:rPr>
-              <a:t/>
-            </a:r>
+            <a:endParaRPr sz="1500" b="0">
+              <a:solidFill>
+                <a:srgbClr val="E8E5DD"/>
+              </a:solidFill>
+              <a:latin typeface="Consolas"/>
+            </a:endParaRPr>
           </a:p>
           <a:p>
             <a:pPr algn="l">
@@ -6774,7 +6391,7 @@
 </file>
 
 <file path=ppt/slides/slide12.xml><?xml version="1.0" encoding="utf-8"?>
-<p:sld xmlns:a="http://schemas.openxmlformats.org/drawingml/2006/main" xmlns:p="http://schemas.openxmlformats.org/presentationml/2006/main" xmlns:r="http://schemas.openxmlformats.org/officeDocument/2006/relationships">
+<p:sld xmlns:a="http://schemas.openxmlformats.org/drawingml/2006/main" xmlns:r="http://schemas.openxmlformats.org/officeDocument/2006/relationships" xmlns:p="http://schemas.openxmlformats.org/presentationml/2006/main">
   <p:cSld>
     <p:spTree>
       <p:nvGrpSpPr>
@@ -6782,7 +6399,14 @@
         <p:cNvGrpSpPr/>
         <p:nvPr/>
       </p:nvGrpSpPr>
-      <p:grpSpPr/>
+      <p:grpSpPr>
+        <a:xfrm>
+          <a:off x="0" y="0"/>
+          <a:ext cx="0" cy="0"/>
+          <a:chOff x="0" y="0"/>
+          <a:chExt cx="0" cy="0"/>
+        </a:xfrm>
+      </p:grpSpPr>
       <p:sp>
         <p:nvSpPr>
           <p:cNvPr id="2" name="Rectangle 1"/>
@@ -6823,6 +6447,7 @@
           <a:lstStyle/>
           <a:p>
             <a:pPr algn="ctr"/>
+            <a:endParaRPr/>
           </a:p>
         </p:txBody>
       </p:sp>
@@ -6843,7 +6468,7 @@
           <a:noFill/>
         </p:spPr>
         <p:txBody>
-          <a:bodyPr wrap="square" lIns="0" rIns="0" tIns="0" bIns="0" anchor="t">
+          <a:bodyPr wrap="square" lIns="0" tIns="0" rIns="0" bIns="0" anchor="t">
             <a:spAutoFit/>
           </a:bodyPr>
           <a:lstStyle/>
@@ -6878,7 +6503,7 @@
           <a:noFill/>
         </p:spPr>
         <p:txBody>
-          <a:bodyPr wrap="square" lIns="0" rIns="0" tIns="0" bIns="0" anchor="t">
+          <a:bodyPr wrap="square" lIns="0" tIns="0" rIns="0" bIns="0" anchor="t">
             <a:spAutoFit/>
           </a:bodyPr>
           <a:lstStyle/>
@@ -6936,6 +6561,7 @@
           <a:lstStyle/>
           <a:p>
             <a:pPr algn="ctr"/>
+            <a:endParaRPr/>
           </a:p>
         </p:txBody>
       </p:sp>
@@ -6956,7 +6582,7 @@
           <a:noFill/>
         </p:spPr>
         <p:txBody>
-          <a:bodyPr wrap="square" lIns="0" rIns="0" tIns="0" bIns="0" anchor="t">
+          <a:bodyPr wrap="square" lIns="0" tIns="0" rIns="0" bIns="0" anchor="t">
             <a:spAutoFit/>
           </a:bodyPr>
           <a:lstStyle/>
@@ -6991,7 +6617,7 @@
           <a:noFill/>
         </p:spPr>
         <p:txBody>
-          <a:bodyPr wrap="square" lIns="0" rIns="0" tIns="0" bIns="0" anchor="t">
+          <a:bodyPr wrap="square" lIns="0" tIns="0" rIns="0" bIns="0" anchor="t">
             <a:spAutoFit/>
           </a:bodyPr>
           <a:lstStyle/>
@@ -7026,7 +6652,7 @@
           <a:noFill/>
         </p:spPr>
         <p:txBody>
-          <a:bodyPr wrap="square" lIns="0" rIns="0" tIns="0" bIns="0" anchor="t">
+          <a:bodyPr wrap="square" lIns="0" tIns="0" rIns="0" bIns="0" anchor="t">
             <a:spAutoFit/>
           </a:bodyPr>
           <a:lstStyle/>
@@ -7070,7 +6696,7 @@
           <a:noFill/>
         </p:spPr>
         <p:txBody>
-          <a:bodyPr wrap="square" lIns="0" rIns="0" tIns="0" bIns="0" anchor="t">
+          <a:bodyPr wrap="square" lIns="0" tIns="0" rIns="0" bIns="0" anchor="t">
             <a:spAutoFit/>
           </a:bodyPr>
           <a:lstStyle/>
@@ -7105,7 +6731,7 @@
           <a:noFill/>
         </p:spPr>
         <p:txBody>
-          <a:bodyPr wrap="square" lIns="0" rIns="0" tIns="0" bIns="0">
+          <a:bodyPr wrap="square" lIns="0" tIns="0" rIns="0" bIns="0">
             <a:spAutoFit/>
           </a:bodyPr>
           <a:lstStyle/>
@@ -7227,6 +6853,7 @@
           <a:lstStyle/>
           <a:p>
             <a:pPr algn="ctr"/>
+            <a:endParaRPr/>
           </a:p>
         </p:txBody>
       </p:sp>
@@ -7247,7 +6874,7 @@
           <a:noFill/>
         </p:spPr>
         <p:txBody>
-          <a:bodyPr wrap="square" lIns="0" rIns="0" tIns="0" bIns="0" anchor="t">
+          <a:bodyPr wrap="square" lIns="0" tIns="0" rIns="0" bIns="0" anchor="t">
             <a:spAutoFit/>
           </a:bodyPr>
           <a:lstStyle/>
@@ -7282,7 +6909,7 @@
           <a:noFill/>
         </p:spPr>
         <p:txBody>
-          <a:bodyPr wrap="square" lIns="0" rIns="0" tIns="0" bIns="0">
+          <a:bodyPr wrap="square" lIns="0" tIns="0" rIns="0" bIns="0">
             <a:spAutoFit/>
           </a:bodyPr>
           <a:lstStyle/>
@@ -7314,15 +6941,12 @@
                 <a:spcPts val="600"/>
               </a:spcAft>
             </a:pPr>
-            <a:r>
-              <a:rPr sz="1500" b="0">
-                <a:solidFill>
-                  <a:srgbClr val="E8E5DD"/>
-                </a:solidFill>
-                <a:latin typeface="Consolas"/>
-              </a:rPr>
-              <a:t/>
-            </a:r>
+            <a:endParaRPr sz="1500" b="0">
+              <a:solidFill>
+                <a:srgbClr val="E8E5DD"/>
+              </a:solidFill>
+              <a:latin typeface="Consolas"/>
+            </a:endParaRPr>
           </a:p>
           <a:p>
             <a:pPr algn="l">
@@ -7468,7 +7092,7 @@
 </file>
 
 <file path=ppt/slides/slide13.xml><?xml version="1.0" encoding="utf-8"?>
-<p:sld xmlns:a="http://schemas.openxmlformats.org/drawingml/2006/main" xmlns:p="http://schemas.openxmlformats.org/presentationml/2006/main" xmlns:r="http://schemas.openxmlformats.org/officeDocument/2006/relationships">
+<p:sld xmlns:a="http://schemas.openxmlformats.org/drawingml/2006/main" xmlns:r="http://schemas.openxmlformats.org/officeDocument/2006/relationships" xmlns:p="http://schemas.openxmlformats.org/presentationml/2006/main">
   <p:cSld>
     <p:spTree>
       <p:nvGrpSpPr>
@@ -7476,7 +7100,14 @@
         <p:cNvGrpSpPr/>
         <p:nvPr/>
       </p:nvGrpSpPr>
-      <p:grpSpPr/>
+      <p:grpSpPr>
+        <a:xfrm>
+          <a:off x="0" y="0"/>
+          <a:ext cx="0" cy="0"/>
+          <a:chOff x="0" y="0"/>
+          <a:chExt cx="0" cy="0"/>
+        </a:xfrm>
+      </p:grpSpPr>
       <p:sp>
         <p:nvSpPr>
           <p:cNvPr id="2" name="Rectangle 1"/>
@@ -7517,6 +7148,7 @@
           <a:lstStyle/>
           <a:p>
             <a:pPr algn="ctr"/>
+            <a:endParaRPr/>
           </a:p>
         </p:txBody>
       </p:sp>
@@ -7537,7 +7169,7 @@
           <a:noFill/>
         </p:spPr>
         <p:txBody>
-          <a:bodyPr wrap="square" lIns="0" rIns="0" tIns="0" bIns="0" anchor="t">
+          <a:bodyPr wrap="square" lIns="0" tIns="0" rIns="0" bIns="0" anchor="t">
             <a:spAutoFit/>
           </a:bodyPr>
           <a:lstStyle/>
@@ -7572,7 +7204,7 @@
           <a:noFill/>
         </p:spPr>
         <p:txBody>
-          <a:bodyPr wrap="square" lIns="0" rIns="0" tIns="0" bIns="0" anchor="t">
+          <a:bodyPr wrap="square" lIns="0" tIns="0" rIns="0" bIns="0" anchor="t">
             <a:spAutoFit/>
           </a:bodyPr>
           <a:lstStyle/>
@@ -7630,6 +7262,7 @@
           <a:lstStyle/>
           <a:p>
             <a:pPr algn="ctr"/>
+            <a:endParaRPr/>
           </a:p>
         </p:txBody>
       </p:sp>
@@ -7650,7 +7283,7 @@
           <a:noFill/>
         </p:spPr>
         <p:txBody>
-          <a:bodyPr wrap="square" lIns="0" rIns="0" tIns="0" bIns="0" anchor="t">
+          <a:bodyPr wrap="square" lIns="0" tIns="0" rIns="0" bIns="0" anchor="t">
             <a:spAutoFit/>
           </a:bodyPr>
           <a:lstStyle/>
@@ -7685,7 +7318,7 @@
           <a:noFill/>
         </p:spPr>
         <p:txBody>
-          <a:bodyPr wrap="square" lIns="0" rIns="0" tIns="0" bIns="0" anchor="t">
+          <a:bodyPr wrap="square" lIns="0" tIns="0" rIns="0" bIns="0" anchor="t">
             <a:spAutoFit/>
           </a:bodyPr>
           <a:lstStyle/>
@@ -7720,7 +7353,7 @@
           <a:noFill/>
         </p:spPr>
         <p:txBody>
-          <a:bodyPr wrap="square" lIns="0" rIns="0" tIns="0" bIns="0" anchor="t">
+          <a:bodyPr wrap="square" lIns="0" tIns="0" rIns="0" bIns="0" anchor="t">
             <a:spAutoFit/>
           </a:bodyPr>
           <a:lstStyle/>
@@ -7774,7 +7407,7 @@
           <a:noFill/>
         </p:spPr>
         <p:txBody>
-          <a:bodyPr wrap="square" lIns="0" rIns="0" tIns="0" bIns="0" anchor="t">
+          <a:bodyPr wrap="square" lIns="0" tIns="0" rIns="0" bIns="0" anchor="t">
             <a:spAutoFit/>
           </a:bodyPr>
           <a:lstStyle/>
@@ -7834,6 +7467,7 @@
           <a:lstStyle/>
           <a:p>
             <a:pPr algn="ctr"/>
+            <a:endParaRPr/>
           </a:p>
         </p:txBody>
       </p:sp>
@@ -7854,7 +7488,7 @@
           <a:noFill/>
         </p:spPr>
         <p:txBody>
-          <a:bodyPr wrap="square" lIns="0" rIns="0" tIns="0" bIns="0" anchor="t">
+          <a:bodyPr wrap="square" lIns="0" tIns="0" rIns="0" bIns="0" anchor="t">
             <a:spAutoFit/>
           </a:bodyPr>
           <a:lstStyle/>
@@ -7889,7 +7523,7 @@
           <a:noFill/>
         </p:spPr>
         <p:txBody>
-          <a:bodyPr wrap="square" lIns="0" rIns="0" tIns="0" bIns="0">
+          <a:bodyPr wrap="square" lIns="0" tIns="0" rIns="0" bIns="0">
             <a:spAutoFit/>
           </a:bodyPr>
           <a:lstStyle/>
@@ -8108,6 +7742,7 @@
           <a:lstStyle/>
           <a:p>
             <a:pPr algn="ctr"/>
+            <a:endParaRPr/>
           </a:p>
         </p:txBody>
       </p:sp>
@@ -8128,7 +7763,7 @@
           <a:noFill/>
         </p:spPr>
         <p:txBody>
-          <a:bodyPr wrap="square" lIns="0" rIns="0" tIns="0" bIns="0" anchor="t">
+          <a:bodyPr wrap="square" lIns="0" tIns="0" rIns="0" bIns="0" anchor="t">
             <a:spAutoFit/>
           </a:bodyPr>
           <a:lstStyle/>
@@ -8163,7 +7798,7 @@
           <a:noFill/>
         </p:spPr>
         <p:txBody>
-          <a:bodyPr wrap="square" lIns="0" rIns="0" tIns="0" bIns="0">
+          <a:bodyPr wrap="square" lIns="0" tIns="0" rIns="0" bIns="0">
             <a:spAutoFit/>
           </a:bodyPr>
           <a:lstStyle/>
@@ -8233,15 +7868,12 @@
                 <a:spcPts val="600"/>
               </a:spcAft>
             </a:pPr>
-            <a:r>
-              <a:rPr sz="1300" b="0">
-                <a:solidFill>
-                  <a:srgbClr val="14161C"/>
-                </a:solidFill>
-                <a:latin typeface="Consolas"/>
-              </a:rPr>
-              <a:t/>
-            </a:r>
+            <a:endParaRPr sz="1300" b="0">
+              <a:solidFill>
+                <a:srgbClr val="14161C"/>
+              </a:solidFill>
+              <a:latin typeface="Consolas"/>
+            </a:endParaRPr>
           </a:p>
           <a:p>
             <a:pPr algn="l">
@@ -8361,6 +7993,7 @@
           <a:lstStyle/>
           <a:p>
             <a:pPr algn="ctr"/>
+            <a:endParaRPr/>
           </a:p>
         </p:txBody>
       </p:sp>
@@ -8381,7 +8014,7 @@
           <a:noFill/>
         </p:spPr>
         <p:txBody>
-          <a:bodyPr wrap="square" lIns="0" rIns="0" tIns="0" bIns="0" anchor="t">
+          <a:bodyPr wrap="square" lIns="0" tIns="0" rIns="0" bIns="0" anchor="t">
             <a:spAutoFit/>
           </a:bodyPr>
           <a:lstStyle/>
@@ -8408,7 +8041,7 @@
 </file>
 
 <file path=ppt/slides/slide14.xml><?xml version="1.0" encoding="utf-8"?>
-<p:sld xmlns:a="http://schemas.openxmlformats.org/drawingml/2006/main" xmlns:p="http://schemas.openxmlformats.org/presentationml/2006/main" xmlns:r="http://schemas.openxmlformats.org/officeDocument/2006/relationships">
+<p:sld xmlns:a="http://schemas.openxmlformats.org/drawingml/2006/main" xmlns:r="http://schemas.openxmlformats.org/officeDocument/2006/relationships" xmlns:p="http://schemas.openxmlformats.org/presentationml/2006/main">
   <p:cSld>
     <p:spTree>
       <p:nvGrpSpPr>
@@ -8416,7 +8049,14 @@
         <p:cNvGrpSpPr/>
         <p:nvPr/>
       </p:nvGrpSpPr>
-      <p:grpSpPr/>
+      <p:grpSpPr>
+        <a:xfrm>
+          <a:off x="0" y="0"/>
+          <a:ext cx="0" cy="0"/>
+          <a:chOff x="0" y="0"/>
+          <a:chExt cx="0" cy="0"/>
+        </a:xfrm>
+      </p:grpSpPr>
       <p:sp>
         <p:nvSpPr>
           <p:cNvPr id="2" name="Rectangle 1"/>
@@ -8457,6 +8097,7 @@
           <a:lstStyle/>
           <a:p>
             <a:pPr algn="ctr"/>
+            <a:endParaRPr/>
           </a:p>
         </p:txBody>
       </p:sp>
@@ -8477,7 +8118,7 @@
           <a:noFill/>
         </p:spPr>
         <p:txBody>
-          <a:bodyPr wrap="square" lIns="0" rIns="0" tIns="0" bIns="0" anchor="t">
+          <a:bodyPr wrap="square" lIns="0" tIns="0" rIns="0" bIns="0" anchor="t">
             <a:spAutoFit/>
           </a:bodyPr>
           <a:lstStyle/>
@@ -8512,7 +8153,7 @@
           <a:noFill/>
         </p:spPr>
         <p:txBody>
-          <a:bodyPr wrap="square" lIns="0" rIns="0" tIns="0" bIns="0" anchor="t">
+          <a:bodyPr wrap="square" lIns="0" tIns="0" rIns="0" bIns="0" anchor="t">
             <a:spAutoFit/>
           </a:bodyPr>
           <a:lstStyle/>
@@ -8570,6 +8211,7 @@
           <a:lstStyle/>
           <a:p>
             <a:pPr algn="ctr"/>
+            <a:endParaRPr/>
           </a:p>
         </p:txBody>
       </p:sp>
@@ -8590,7 +8232,7 @@
           <a:noFill/>
         </p:spPr>
         <p:txBody>
-          <a:bodyPr wrap="square" lIns="0" rIns="0" tIns="0" bIns="0" anchor="t">
+          <a:bodyPr wrap="square" lIns="0" tIns="0" rIns="0" bIns="0" anchor="t">
             <a:spAutoFit/>
           </a:bodyPr>
           <a:lstStyle/>
@@ -8625,7 +8267,7 @@
           <a:noFill/>
         </p:spPr>
         <p:txBody>
-          <a:bodyPr wrap="square" lIns="0" rIns="0" tIns="0" bIns="0" anchor="t">
+          <a:bodyPr wrap="square" lIns="0" tIns="0" rIns="0" bIns="0" anchor="t">
             <a:spAutoFit/>
           </a:bodyPr>
           <a:lstStyle/>
@@ -8660,7 +8302,7 @@
           <a:noFill/>
         </p:spPr>
         <p:txBody>
-          <a:bodyPr wrap="square" lIns="0" rIns="0" tIns="0" bIns="0" anchor="t">
+          <a:bodyPr wrap="square" lIns="0" tIns="0" rIns="0" bIns="0" anchor="t">
             <a:spAutoFit/>
           </a:bodyPr>
           <a:lstStyle/>
@@ -8695,7 +8337,7 @@
           <a:noFill/>
         </p:spPr>
         <p:txBody>
-          <a:bodyPr wrap="square" lIns="0" rIns="0" tIns="0" bIns="0" anchor="t">
+          <a:bodyPr wrap="square" lIns="0" tIns="0" rIns="0" bIns="0" anchor="t">
             <a:spAutoFit/>
           </a:bodyPr>
           <a:lstStyle/>
@@ -8755,6 +8397,7 @@
           <a:lstStyle/>
           <a:p>
             <a:pPr algn="ctr"/>
+            <a:endParaRPr/>
           </a:p>
         </p:txBody>
       </p:sp>
@@ -8775,7 +8418,7 @@
           <a:noFill/>
         </p:spPr>
         <p:txBody>
-          <a:bodyPr wrap="square" lIns="0" rIns="0" tIns="0" bIns="0" anchor="t">
+          <a:bodyPr wrap="square" lIns="0" tIns="0" rIns="0" bIns="0" anchor="t">
             <a:spAutoFit/>
           </a:bodyPr>
           <a:lstStyle/>
@@ -8810,7 +8453,7 @@
           <a:noFill/>
         </p:spPr>
         <p:txBody>
-          <a:bodyPr wrap="square" lIns="0" rIns="0" tIns="0" bIns="0">
+          <a:bodyPr wrap="square" lIns="0" tIns="0" rIns="0" bIns="0">
             <a:spAutoFit/>
           </a:bodyPr>
           <a:lstStyle/>
@@ -8934,6 +8577,7 @@
           <a:lstStyle/>
           <a:p>
             <a:pPr algn="ctr"/>
+            <a:endParaRPr/>
           </a:p>
         </p:txBody>
       </p:sp>
@@ -8954,7 +8598,7 @@
           <a:noFill/>
         </p:spPr>
         <p:txBody>
-          <a:bodyPr wrap="square" lIns="0" rIns="0" tIns="0" bIns="0" anchor="t">
+          <a:bodyPr wrap="square" lIns="0" tIns="0" rIns="0" bIns="0" anchor="t">
             <a:spAutoFit/>
           </a:bodyPr>
           <a:lstStyle/>
@@ -8989,7 +8633,7 @@
           <a:noFill/>
         </p:spPr>
         <p:txBody>
-          <a:bodyPr wrap="square" lIns="0" rIns="0" tIns="0" bIns="0">
+          <a:bodyPr wrap="square" lIns="0" tIns="0" rIns="0" bIns="0">
             <a:spAutoFit/>
           </a:bodyPr>
           <a:lstStyle/>
@@ -9111,6 +8755,7 @@
           <a:lstStyle/>
           <a:p>
             <a:pPr algn="ctr"/>
+            <a:endParaRPr/>
           </a:p>
         </p:txBody>
       </p:sp>
@@ -9131,7 +8776,7 @@
           <a:noFill/>
         </p:spPr>
         <p:txBody>
-          <a:bodyPr wrap="square" lIns="0" rIns="0" tIns="0" bIns="0" anchor="t">
+          <a:bodyPr wrap="square" lIns="0" tIns="0" rIns="0" bIns="0" anchor="t">
             <a:spAutoFit/>
           </a:bodyPr>
           <a:lstStyle/>
@@ -9158,7 +8803,7 @@
 </file>
 
 <file path=ppt/slides/slide15.xml><?xml version="1.0" encoding="utf-8"?>
-<p:sld xmlns:a="http://schemas.openxmlformats.org/drawingml/2006/main" xmlns:p="http://schemas.openxmlformats.org/presentationml/2006/main" xmlns:r="http://schemas.openxmlformats.org/officeDocument/2006/relationships">
+<p:sld xmlns:a="http://schemas.openxmlformats.org/drawingml/2006/main" xmlns:r="http://schemas.openxmlformats.org/officeDocument/2006/relationships" xmlns:p="http://schemas.openxmlformats.org/presentationml/2006/main">
   <p:cSld>
     <p:spTree>
       <p:nvGrpSpPr>
@@ -9166,7 +8811,14 @@
         <p:cNvGrpSpPr/>
         <p:nvPr/>
       </p:nvGrpSpPr>
-      <p:grpSpPr/>
+      <p:grpSpPr>
+        <a:xfrm>
+          <a:off x="0" y="0"/>
+          <a:ext cx="0" cy="0"/>
+          <a:chOff x="0" y="0"/>
+          <a:chExt cx="0" cy="0"/>
+        </a:xfrm>
+      </p:grpSpPr>
       <p:sp>
         <p:nvSpPr>
           <p:cNvPr id="2" name="Rectangle 1"/>
@@ -9207,6 +8859,7 @@
           <a:lstStyle/>
           <a:p>
             <a:pPr algn="ctr"/>
+            <a:endParaRPr/>
           </a:p>
         </p:txBody>
       </p:sp>
@@ -9227,7 +8880,7 @@
           <a:noFill/>
         </p:spPr>
         <p:txBody>
-          <a:bodyPr wrap="square" lIns="0" rIns="0" tIns="0" bIns="0" anchor="t">
+          <a:bodyPr wrap="square" lIns="0" tIns="0" rIns="0" bIns="0" anchor="t">
             <a:spAutoFit/>
           </a:bodyPr>
           <a:lstStyle/>
@@ -9262,7 +8915,7 @@
           <a:noFill/>
         </p:spPr>
         <p:txBody>
-          <a:bodyPr wrap="square" lIns="0" rIns="0" tIns="0" bIns="0" anchor="t">
+          <a:bodyPr wrap="square" lIns="0" tIns="0" rIns="0" bIns="0" anchor="t">
             <a:spAutoFit/>
           </a:bodyPr>
           <a:lstStyle/>
@@ -9320,6 +8973,7 @@
           <a:lstStyle/>
           <a:p>
             <a:pPr algn="ctr"/>
+            <a:endParaRPr/>
           </a:p>
         </p:txBody>
       </p:sp>
@@ -9340,7 +8994,7 @@
           <a:noFill/>
         </p:spPr>
         <p:txBody>
-          <a:bodyPr wrap="square" lIns="0" rIns="0" tIns="0" bIns="0" anchor="t">
+          <a:bodyPr wrap="square" lIns="0" tIns="0" rIns="0" bIns="0" anchor="t">
             <a:spAutoFit/>
           </a:bodyPr>
           <a:lstStyle/>
@@ -9375,7 +9029,7 @@
           <a:noFill/>
         </p:spPr>
         <p:txBody>
-          <a:bodyPr wrap="square" lIns="0" rIns="0" tIns="0" bIns="0" anchor="t">
+          <a:bodyPr wrap="square" lIns="0" tIns="0" rIns="0" bIns="0" anchor="t">
             <a:spAutoFit/>
           </a:bodyPr>
           <a:lstStyle/>
@@ -9410,7 +9064,7 @@
           <a:noFill/>
         </p:spPr>
         <p:txBody>
-          <a:bodyPr wrap="square" lIns="0" rIns="0" tIns="0" bIns="0" anchor="t">
+          <a:bodyPr wrap="square" lIns="0" tIns="0" rIns="0" bIns="0" anchor="t">
             <a:spAutoFit/>
           </a:bodyPr>
           <a:lstStyle/>
@@ -9454,7 +9108,7 @@
           <a:noFill/>
         </p:spPr>
         <p:txBody>
-          <a:bodyPr wrap="square" lIns="0" rIns="0" tIns="0" bIns="0" anchor="t">
+          <a:bodyPr wrap="square" lIns="0" tIns="0" rIns="0" bIns="0" anchor="t">
             <a:spAutoFit/>
           </a:bodyPr>
           <a:lstStyle/>
@@ -9489,7 +9143,7 @@
           <a:noFill/>
         </p:spPr>
         <p:txBody>
-          <a:bodyPr wrap="square" lIns="0" rIns="0" tIns="0" bIns="0">
+          <a:bodyPr wrap="square" lIns="0" tIns="0" rIns="0" bIns="0">
             <a:spAutoFit/>
           </a:bodyPr>
           <a:lstStyle/>
@@ -9592,6 +9246,7 @@
           <a:lstStyle/>
           <a:p>
             <a:pPr algn="ctr"/>
+            <a:endParaRPr/>
           </a:p>
         </p:txBody>
       </p:sp>
@@ -9612,7 +9267,7 @@
           <a:noFill/>
         </p:spPr>
         <p:txBody>
-          <a:bodyPr wrap="square" lIns="0" rIns="0" tIns="0" bIns="0" anchor="t">
+          <a:bodyPr wrap="square" lIns="0" tIns="0" rIns="0" bIns="0" anchor="t">
             <a:spAutoFit/>
           </a:bodyPr>
           <a:lstStyle/>
@@ -9639,7 +9294,7 @@
 </file>
 
 <file path=ppt/slides/slide16.xml><?xml version="1.0" encoding="utf-8"?>
-<p:sld xmlns:a="http://schemas.openxmlformats.org/drawingml/2006/main" xmlns:p="http://schemas.openxmlformats.org/presentationml/2006/main" xmlns:r="http://schemas.openxmlformats.org/officeDocument/2006/relationships">
+<p:sld xmlns:a="http://schemas.openxmlformats.org/drawingml/2006/main" xmlns:r="http://schemas.openxmlformats.org/officeDocument/2006/relationships" xmlns:p="http://schemas.openxmlformats.org/presentationml/2006/main">
   <p:cSld>
     <p:spTree>
       <p:nvGrpSpPr>
@@ -9647,7 +9302,14 @@
         <p:cNvGrpSpPr/>
         <p:nvPr/>
       </p:nvGrpSpPr>
-      <p:grpSpPr/>
+      <p:grpSpPr>
+        <a:xfrm>
+          <a:off x="0" y="0"/>
+          <a:ext cx="0" cy="0"/>
+          <a:chOff x="0" y="0"/>
+          <a:chExt cx="0" cy="0"/>
+        </a:xfrm>
+      </p:grpSpPr>
       <p:sp>
         <p:nvSpPr>
           <p:cNvPr id="2" name="Rectangle 1"/>
@@ -9688,6 +9350,7 @@
           <a:lstStyle/>
           <a:p>
             <a:pPr algn="ctr"/>
+            <a:endParaRPr/>
           </a:p>
         </p:txBody>
       </p:sp>
@@ -9708,7 +9371,7 @@
           <a:noFill/>
         </p:spPr>
         <p:txBody>
-          <a:bodyPr wrap="square" lIns="0" rIns="0" tIns="0" bIns="0" anchor="t">
+          <a:bodyPr wrap="square" lIns="0" tIns="0" rIns="0" bIns="0" anchor="t">
             <a:spAutoFit/>
           </a:bodyPr>
           <a:lstStyle/>
@@ -9743,7 +9406,7 @@
           <a:noFill/>
         </p:spPr>
         <p:txBody>
-          <a:bodyPr wrap="square" lIns="0" rIns="0" tIns="0" bIns="0" anchor="t">
+          <a:bodyPr wrap="square" lIns="0" tIns="0" rIns="0" bIns="0" anchor="t">
             <a:spAutoFit/>
           </a:bodyPr>
           <a:lstStyle/>
@@ -9801,6 +9464,7 @@
           <a:lstStyle/>
           <a:p>
             <a:pPr algn="ctr"/>
+            <a:endParaRPr/>
           </a:p>
         </p:txBody>
       </p:sp>
@@ -9821,7 +9485,7 @@
           <a:noFill/>
         </p:spPr>
         <p:txBody>
-          <a:bodyPr wrap="square" lIns="0" rIns="0" tIns="0" bIns="0" anchor="t">
+          <a:bodyPr wrap="square" lIns="0" tIns="0" rIns="0" bIns="0" anchor="t">
             <a:spAutoFit/>
           </a:bodyPr>
           <a:lstStyle/>
@@ -9856,7 +9520,7 @@
           <a:noFill/>
         </p:spPr>
         <p:txBody>
-          <a:bodyPr wrap="square" lIns="0" rIns="0" tIns="0" bIns="0" anchor="t">
+          <a:bodyPr wrap="square" lIns="0" tIns="0" rIns="0" bIns="0" anchor="t">
             <a:spAutoFit/>
           </a:bodyPr>
           <a:lstStyle/>
@@ -9891,7 +9555,7 @@
           <a:noFill/>
         </p:spPr>
         <p:txBody>
-          <a:bodyPr wrap="square" lIns="0" rIns="0" tIns="0" bIns="0" anchor="t">
+          <a:bodyPr wrap="square" lIns="0" tIns="0" rIns="0" bIns="0" anchor="t">
             <a:spAutoFit/>
           </a:bodyPr>
           <a:lstStyle/>
@@ -9935,7 +9599,7 @@
           <a:noFill/>
         </p:spPr>
         <p:txBody>
-          <a:bodyPr wrap="square" lIns="0" rIns="0" tIns="0" bIns="0">
+          <a:bodyPr wrap="square" lIns="0" tIns="0" rIns="0" bIns="0">
             <a:spAutoFit/>
           </a:bodyPr>
           <a:lstStyle/>
@@ -10093,6 +9757,7 @@
           <a:lstStyle/>
           <a:p>
             <a:pPr algn="ctr"/>
+            <a:endParaRPr/>
           </a:p>
         </p:txBody>
       </p:sp>
@@ -10113,7 +9778,7 @@
           <a:noFill/>
         </p:spPr>
         <p:txBody>
-          <a:bodyPr wrap="square" lIns="0" rIns="0" tIns="0" bIns="0" anchor="t">
+          <a:bodyPr wrap="square" lIns="0" tIns="0" rIns="0" bIns="0" anchor="t">
             <a:spAutoFit/>
           </a:bodyPr>
           <a:lstStyle/>
@@ -10140,7 +9805,7 @@
 </file>
 
 <file path=ppt/slides/slide17.xml><?xml version="1.0" encoding="utf-8"?>
-<p:sld xmlns:a="http://schemas.openxmlformats.org/drawingml/2006/main" xmlns:p="http://schemas.openxmlformats.org/presentationml/2006/main" xmlns:r="http://schemas.openxmlformats.org/officeDocument/2006/relationships">
+<p:sld xmlns:a="http://schemas.openxmlformats.org/drawingml/2006/main" xmlns:r="http://schemas.openxmlformats.org/officeDocument/2006/relationships" xmlns:p="http://schemas.openxmlformats.org/presentationml/2006/main">
   <p:cSld>
     <p:spTree>
       <p:nvGrpSpPr>
@@ -10148,7 +9813,14 @@
         <p:cNvGrpSpPr/>
         <p:nvPr/>
       </p:nvGrpSpPr>
-      <p:grpSpPr/>
+      <p:grpSpPr>
+        <a:xfrm>
+          <a:off x="0" y="0"/>
+          <a:ext cx="0" cy="0"/>
+          <a:chOff x="0" y="0"/>
+          <a:chExt cx="0" cy="0"/>
+        </a:xfrm>
+      </p:grpSpPr>
       <p:sp>
         <p:nvSpPr>
           <p:cNvPr id="2" name="Rectangle 1"/>
@@ -10189,6 +9861,7 @@
           <a:lstStyle/>
           <a:p>
             <a:pPr algn="ctr"/>
+            <a:endParaRPr/>
           </a:p>
         </p:txBody>
       </p:sp>
@@ -10209,7 +9882,7 @@
           <a:noFill/>
         </p:spPr>
         <p:txBody>
-          <a:bodyPr wrap="square" lIns="0" rIns="0" tIns="0" bIns="0" anchor="t">
+          <a:bodyPr wrap="square" lIns="0" tIns="0" rIns="0" bIns="0" anchor="t">
             <a:spAutoFit/>
           </a:bodyPr>
           <a:lstStyle/>
@@ -10244,7 +9917,7 @@
           <a:noFill/>
         </p:spPr>
         <p:txBody>
-          <a:bodyPr wrap="square" lIns="0" rIns="0" tIns="0" bIns="0" anchor="t">
+          <a:bodyPr wrap="square" lIns="0" tIns="0" rIns="0" bIns="0" anchor="t">
             <a:spAutoFit/>
           </a:bodyPr>
           <a:lstStyle/>
@@ -10302,6 +9975,7 @@
           <a:lstStyle/>
           <a:p>
             <a:pPr algn="ctr"/>
+            <a:endParaRPr/>
           </a:p>
         </p:txBody>
       </p:sp>
@@ -10322,7 +9996,7 @@
           <a:noFill/>
         </p:spPr>
         <p:txBody>
-          <a:bodyPr wrap="square" lIns="0" rIns="0" tIns="0" bIns="0" anchor="t">
+          <a:bodyPr wrap="square" lIns="0" tIns="0" rIns="0" bIns="0" anchor="t">
             <a:spAutoFit/>
           </a:bodyPr>
           <a:lstStyle/>
@@ -10357,7 +10031,7 @@
           <a:noFill/>
         </p:spPr>
         <p:txBody>
-          <a:bodyPr wrap="square" lIns="0" rIns="0" tIns="0" bIns="0" anchor="t">
+          <a:bodyPr wrap="square" lIns="0" tIns="0" rIns="0" bIns="0" anchor="t">
             <a:spAutoFit/>
           </a:bodyPr>
           <a:lstStyle/>
@@ -10392,7 +10066,7 @@
           <a:noFill/>
         </p:spPr>
         <p:txBody>
-          <a:bodyPr wrap="square" lIns="0" rIns="0" tIns="0" bIns="0" anchor="t">
+          <a:bodyPr wrap="square" lIns="0" tIns="0" rIns="0" bIns="0" anchor="t">
             <a:spAutoFit/>
           </a:bodyPr>
           <a:lstStyle/>
@@ -10461,6 +10135,7 @@
           <a:lstStyle/>
           <a:p>
             <a:pPr algn="ctr"/>
+            <a:endParaRPr/>
           </a:p>
         </p:txBody>
       </p:sp>
@@ -10481,7 +10156,7 @@
           <a:noFill/>
         </p:spPr>
         <p:txBody>
-          <a:bodyPr wrap="square" lIns="0" rIns="0" tIns="0" bIns="0" anchor="t">
+          <a:bodyPr wrap="square" lIns="0" tIns="0" rIns="0" bIns="0" anchor="t">
             <a:spAutoFit/>
           </a:bodyPr>
           <a:lstStyle/>
@@ -10516,7 +10191,7 @@
           <a:noFill/>
         </p:spPr>
         <p:txBody>
-          <a:bodyPr wrap="square" lIns="0" rIns="0" tIns="0" bIns="0" anchor="t">
+          <a:bodyPr wrap="square" lIns="0" tIns="0" rIns="0" bIns="0" anchor="t">
             <a:spAutoFit/>
           </a:bodyPr>
           <a:lstStyle/>
@@ -10576,6 +10251,7 @@
           <a:lstStyle/>
           <a:p>
             <a:pPr algn="ctr"/>
+            <a:endParaRPr/>
           </a:p>
         </p:txBody>
       </p:sp>
@@ -10596,7 +10272,7 @@
           <a:noFill/>
         </p:spPr>
         <p:txBody>
-          <a:bodyPr wrap="square" lIns="0" rIns="0" tIns="0" bIns="0" anchor="t">
+          <a:bodyPr wrap="square" lIns="0" tIns="0" rIns="0" bIns="0" anchor="t">
             <a:spAutoFit/>
           </a:bodyPr>
           <a:lstStyle/>
@@ -10631,7 +10307,7 @@
           <a:noFill/>
         </p:spPr>
         <p:txBody>
-          <a:bodyPr wrap="square" lIns="0" rIns="0" tIns="0" bIns="0" anchor="t">
+          <a:bodyPr wrap="square" lIns="0" tIns="0" rIns="0" bIns="0" anchor="t">
             <a:spAutoFit/>
           </a:bodyPr>
           <a:lstStyle/>
@@ -10691,6 +10367,7 @@
           <a:lstStyle/>
           <a:p>
             <a:pPr algn="ctr"/>
+            <a:endParaRPr/>
           </a:p>
         </p:txBody>
       </p:sp>
@@ -10711,7 +10388,7 @@
           <a:noFill/>
         </p:spPr>
         <p:txBody>
-          <a:bodyPr wrap="square" lIns="0" rIns="0" tIns="0" bIns="0" anchor="t">
+          <a:bodyPr wrap="square" lIns="0" tIns="0" rIns="0" bIns="0" anchor="t">
             <a:spAutoFit/>
           </a:bodyPr>
           <a:lstStyle/>
@@ -10746,7 +10423,7 @@
           <a:noFill/>
         </p:spPr>
         <p:txBody>
-          <a:bodyPr wrap="square" lIns="0" rIns="0" tIns="0" bIns="0" anchor="t">
+          <a:bodyPr wrap="square" lIns="0" tIns="0" rIns="0" bIns="0" anchor="t">
             <a:spAutoFit/>
           </a:bodyPr>
           <a:lstStyle/>
@@ -10806,6 +10483,7 @@
           <a:lstStyle/>
           <a:p>
             <a:pPr algn="ctr"/>
+            <a:endParaRPr/>
           </a:p>
         </p:txBody>
       </p:sp>
@@ -10826,7 +10504,7 @@
           <a:noFill/>
         </p:spPr>
         <p:txBody>
-          <a:bodyPr wrap="square" lIns="0" rIns="0" tIns="0" bIns="0" anchor="t">
+          <a:bodyPr wrap="square" lIns="0" tIns="0" rIns="0" bIns="0" anchor="t">
             <a:spAutoFit/>
           </a:bodyPr>
           <a:lstStyle/>
@@ -10861,7 +10539,7 @@
           <a:noFill/>
         </p:spPr>
         <p:txBody>
-          <a:bodyPr wrap="square" lIns="0" rIns="0" tIns="0" bIns="0" anchor="t">
+          <a:bodyPr wrap="square" lIns="0" tIns="0" rIns="0" bIns="0" anchor="t">
             <a:spAutoFit/>
           </a:bodyPr>
           <a:lstStyle/>
@@ -10896,7 +10574,7 @@
           <a:noFill/>
         </p:spPr>
         <p:txBody>
-          <a:bodyPr wrap="square" lIns="0" rIns="0" tIns="0" bIns="0" anchor="t">
+          <a:bodyPr wrap="square" lIns="0" tIns="0" rIns="0" bIns="0" anchor="t">
             <a:spAutoFit/>
           </a:bodyPr>
           <a:lstStyle/>
@@ -10954,6 +10632,7 @@
           <a:lstStyle/>
           <a:p>
             <a:pPr algn="ctr"/>
+            <a:endParaRPr/>
           </a:p>
         </p:txBody>
       </p:sp>
@@ -10974,7 +10653,7 @@
           <a:noFill/>
         </p:spPr>
         <p:txBody>
-          <a:bodyPr wrap="square" lIns="0" rIns="0" tIns="0" bIns="0" anchor="t">
+          <a:bodyPr wrap="square" lIns="0" tIns="0" rIns="0" bIns="0" anchor="t">
             <a:spAutoFit/>
           </a:bodyPr>
           <a:lstStyle/>
@@ -11001,7 +10680,7 @@
 </file>
 
 <file path=ppt/slides/slide18.xml><?xml version="1.0" encoding="utf-8"?>
-<p:sld xmlns:a="http://schemas.openxmlformats.org/drawingml/2006/main" xmlns:p="http://schemas.openxmlformats.org/presentationml/2006/main" xmlns:r="http://schemas.openxmlformats.org/officeDocument/2006/relationships">
+<p:sld xmlns:a="http://schemas.openxmlformats.org/drawingml/2006/main" xmlns:r="http://schemas.openxmlformats.org/officeDocument/2006/relationships" xmlns:p="http://schemas.openxmlformats.org/presentationml/2006/main">
   <p:cSld>
     <p:spTree>
       <p:nvGrpSpPr>
@@ -11009,7 +10688,14 @@
         <p:cNvGrpSpPr/>
         <p:nvPr/>
       </p:nvGrpSpPr>
-      <p:grpSpPr/>
+      <p:grpSpPr>
+        <a:xfrm>
+          <a:off x="0" y="0"/>
+          <a:ext cx="0" cy="0"/>
+          <a:chOff x="0" y="0"/>
+          <a:chExt cx="0" cy="0"/>
+        </a:xfrm>
+      </p:grpSpPr>
       <p:sp>
         <p:nvSpPr>
           <p:cNvPr id="2" name="Rectangle 1"/>
@@ -11050,6 +10736,7 @@
           <a:lstStyle/>
           <a:p>
             <a:pPr algn="ctr"/>
+            <a:endParaRPr/>
           </a:p>
         </p:txBody>
       </p:sp>
@@ -11070,7 +10757,7 @@
           <a:noFill/>
         </p:spPr>
         <p:txBody>
-          <a:bodyPr wrap="square" lIns="0" rIns="0" tIns="0" bIns="0" anchor="t">
+          <a:bodyPr wrap="square" lIns="0" tIns="0" rIns="0" bIns="0" anchor="t">
             <a:spAutoFit/>
           </a:bodyPr>
           <a:lstStyle/>
@@ -11105,7 +10792,7 @@
           <a:noFill/>
         </p:spPr>
         <p:txBody>
-          <a:bodyPr wrap="square" lIns="0" rIns="0" tIns="0" bIns="0" anchor="t">
+          <a:bodyPr wrap="square" lIns="0" tIns="0" rIns="0" bIns="0" anchor="t">
             <a:spAutoFit/>
           </a:bodyPr>
           <a:lstStyle/>
@@ -11163,6 +10850,7 @@
           <a:lstStyle/>
           <a:p>
             <a:pPr algn="ctr"/>
+            <a:endParaRPr/>
           </a:p>
         </p:txBody>
       </p:sp>
@@ -11183,7 +10871,7 @@
           <a:noFill/>
         </p:spPr>
         <p:txBody>
-          <a:bodyPr wrap="square" lIns="0" rIns="0" tIns="0" bIns="0" anchor="t">
+          <a:bodyPr wrap="square" lIns="0" tIns="0" rIns="0" bIns="0" anchor="t">
             <a:spAutoFit/>
           </a:bodyPr>
           <a:lstStyle/>
@@ -11218,7 +10906,7 @@
           <a:noFill/>
         </p:spPr>
         <p:txBody>
-          <a:bodyPr wrap="square" lIns="0" rIns="0" tIns="0" bIns="0" anchor="t">
+          <a:bodyPr wrap="square" lIns="0" tIns="0" rIns="0" bIns="0" anchor="t">
             <a:spAutoFit/>
           </a:bodyPr>
           <a:lstStyle/>
@@ -11253,7 +10941,7 @@
           <a:noFill/>
         </p:spPr>
         <p:txBody>
-          <a:bodyPr wrap="square" lIns="0" rIns="0" tIns="0" bIns="0" anchor="t">
+          <a:bodyPr wrap="square" lIns="0" tIns="0" rIns="0" bIns="0" anchor="t">
             <a:spAutoFit/>
           </a:bodyPr>
           <a:lstStyle/>
@@ -11311,6 +10999,7 @@
           <a:lstStyle/>
           <a:p>
             <a:pPr algn="ctr"/>
+            <a:endParaRPr/>
           </a:p>
         </p:txBody>
       </p:sp>
@@ -11331,7 +11020,7 @@
           <a:noFill/>
         </p:spPr>
         <p:txBody>
-          <a:bodyPr wrap="square" lIns="0" rIns="0" tIns="0" bIns="0" anchor="t">
+          <a:bodyPr wrap="square" lIns="0" tIns="0" rIns="0" bIns="0" anchor="t">
             <a:spAutoFit/>
           </a:bodyPr>
           <a:lstStyle/>
@@ -11366,7 +11055,7 @@
           <a:noFill/>
         </p:spPr>
         <p:txBody>
-          <a:bodyPr wrap="square" lIns="0" rIns="0" tIns="0" bIns="0" anchor="t">
+          <a:bodyPr wrap="square" lIns="0" tIns="0" rIns="0" bIns="0" anchor="t">
             <a:spAutoFit/>
           </a:bodyPr>
           <a:lstStyle/>
@@ -11401,7 +11090,7 @@
           <a:noFill/>
         </p:spPr>
         <p:txBody>
-          <a:bodyPr wrap="square" lIns="0" rIns="0" tIns="0" bIns="0">
+          <a:bodyPr wrap="square" lIns="0" tIns="0" rIns="0" bIns="0">
             <a:spAutoFit/>
           </a:bodyPr>
           <a:lstStyle/>
@@ -11485,6 +11174,7 @@
           <a:lstStyle/>
           <a:p>
             <a:pPr algn="ctr"/>
+            <a:endParaRPr/>
           </a:p>
         </p:txBody>
       </p:sp>
@@ -11505,7 +11195,7 @@
           <a:noFill/>
         </p:spPr>
         <p:txBody>
-          <a:bodyPr wrap="square" lIns="0" rIns="0" tIns="0" bIns="0" anchor="t">
+          <a:bodyPr wrap="square" lIns="0" tIns="0" rIns="0" bIns="0" anchor="t">
             <a:spAutoFit/>
           </a:bodyPr>
           <a:lstStyle/>
@@ -11532,7 +11222,7 @@
 </file>
 
 <file path=ppt/slides/slide19.xml><?xml version="1.0" encoding="utf-8"?>
-<p:sld xmlns:a="http://schemas.openxmlformats.org/drawingml/2006/main" xmlns:p="http://schemas.openxmlformats.org/presentationml/2006/main" xmlns:r="http://schemas.openxmlformats.org/officeDocument/2006/relationships">
+<p:sld xmlns:a="http://schemas.openxmlformats.org/drawingml/2006/main" xmlns:r="http://schemas.openxmlformats.org/officeDocument/2006/relationships" xmlns:p="http://schemas.openxmlformats.org/presentationml/2006/main">
   <p:cSld>
     <p:spTree>
       <p:nvGrpSpPr>
@@ -11540,7 +11230,14 @@
         <p:cNvGrpSpPr/>
         <p:nvPr/>
       </p:nvGrpSpPr>
-      <p:grpSpPr/>
+      <p:grpSpPr>
+        <a:xfrm>
+          <a:off x="0" y="0"/>
+          <a:ext cx="0" cy="0"/>
+          <a:chOff x="0" y="0"/>
+          <a:chExt cx="0" cy="0"/>
+        </a:xfrm>
+      </p:grpSpPr>
       <p:sp>
         <p:nvSpPr>
           <p:cNvPr id="2" name="Rectangle 1"/>
@@ -11581,6 +11278,7 @@
           <a:lstStyle/>
           <a:p>
             <a:pPr algn="ctr"/>
+            <a:endParaRPr/>
           </a:p>
         </p:txBody>
       </p:sp>
@@ -11601,7 +11299,7 @@
           <a:noFill/>
         </p:spPr>
         <p:txBody>
-          <a:bodyPr wrap="square" lIns="0" rIns="0" tIns="0" bIns="0" anchor="t">
+          <a:bodyPr wrap="square" lIns="0" tIns="0" rIns="0" bIns="0" anchor="t">
             <a:spAutoFit/>
           </a:bodyPr>
           <a:lstStyle/>
@@ -11636,7 +11334,7 @@
           <a:noFill/>
         </p:spPr>
         <p:txBody>
-          <a:bodyPr wrap="square" lIns="0" rIns="0" tIns="0" bIns="0" anchor="t">
+          <a:bodyPr wrap="square" lIns="0" tIns="0" rIns="0" bIns="0" anchor="t">
             <a:spAutoFit/>
           </a:bodyPr>
           <a:lstStyle/>
@@ -11694,6 +11392,7 @@
           <a:lstStyle/>
           <a:p>
             <a:pPr algn="ctr"/>
+            <a:endParaRPr/>
           </a:p>
         </p:txBody>
       </p:sp>
@@ -11714,7 +11413,7 @@
           <a:noFill/>
         </p:spPr>
         <p:txBody>
-          <a:bodyPr wrap="square" lIns="0" rIns="0" tIns="0" bIns="0" anchor="t">
+          <a:bodyPr wrap="square" lIns="0" tIns="0" rIns="0" bIns="0" anchor="t">
             <a:spAutoFit/>
           </a:bodyPr>
           <a:lstStyle/>
@@ -11749,7 +11448,7 @@
           <a:noFill/>
         </p:spPr>
         <p:txBody>
-          <a:bodyPr wrap="square" lIns="0" rIns="0" tIns="0" bIns="0" anchor="t">
+          <a:bodyPr wrap="square" lIns="0" tIns="0" rIns="0" bIns="0" anchor="t">
             <a:spAutoFit/>
           </a:bodyPr>
           <a:lstStyle/>
@@ -11784,7 +11483,7 @@
           <a:noFill/>
         </p:spPr>
         <p:txBody>
-          <a:bodyPr wrap="square" lIns="0" rIns="0" tIns="0" bIns="0" anchor="t">
+          <a:bodyPr wrap="square" lIns="0" tIns="0" rIns="0" bIns="0" anchor="t">
             <a:spAutoFit/>
           </a:bodyPr>
           <a:lstStyle/>
@@ -11828,7 +11527,7 @@
           <a:noFill/>
         </p:spPr>
         <p:txBody>
-          <a:bodyPr wrap="square" lIns="0" rIns="0" tIns="0" bIns="0" anchor="t">
+          <a:bodyPr wrap="square" lIns="0" tIns="0" rIns="0" bIns="0" anchor="t">
             <a:spAutoFit/>
           </a:bodyPr>
           <a:lstStyle/>
@@ -11863,7 +11562,7 @@
           <a:noFill/>
         </p:spPr>
         <p:txBody>
-          <a:bodyPr wrap="square" lIns="0" rIns="0" tIns="0" bIns="0">
+          <a:bodyPr wrap="square" lIns="0" tIns="0" rIns="0" bIns="0">
             <a:spAutoFit/>
           </a:bodyPr>
           <a:lstStyle/>
@@ -11966,6 +11665,7 @@
           <a:lstStyle/>
           <a:p>
             <a:pPr algn="ctr"/>
+            <a:endParaRPr/>
           </a:p>
         </p:txBody>
       </p:sp>
@@ -11986,7 +11686,7 @@
           <a:noFill/>
         </p:spPr>
         <p:txBody>
-          <a:bodyPr wrap="square" lIns="0" rIns="0" tIns="0" bIns="0" anchor="t">
+          <a:bodyPr wrap="square" lIns="0" tIns="0" rIns="0" bIns="0" anchor="t">
             <a:spAutoFit/>
           </a:bodyPr>
           <a:lstStyle/>
@@ -12013,7 +11713,7 @@
 </file>
 
 <file path=ppt/slides/slide2.xml><?xml version="1.0" encoding="utf-8"?>
-<p:sld xmlns:a="http://schemas.openxmlformats.org/drawingml/2006/main" xmlns:p="http://schemas.openxmlformats.org/presentationml/2006/main" xmlns:r="http://schemas.openxmlformats.org/officeDocument/2006/relationships">
+<p:sld xmlns:a="http://schemas.openxmlformats.org/drawingml/2006/main" xmlns:r="http://schemas.openxmlformats.org/officeDocument/2006/relationships" xmlns:p="http://schemas.openxmlformats.org/presentationml/2006/main">
   <p:cSld>
     <p:spTree>
       <p:nvGrpSpPr>
@@ -12021,7 +11721,14 @@
         <p:cNvGrpSpPr/>
         <p:nvPr/>
       </p:nvGrpSpPr>
-      <p:grpSpPr/>
+      <p:grpSpPr>
+        <a:xfrm>
+          <a:off x="0" y="0"/>
+          <a:ext cx="0" cy="0"/>
+          <a:chOff x="0" y="0"/>
+          <a:chExt cx="0" cy="0"/>
+        </a:xfrm>
+      </p:grpSpPr>
       <p:sp>
         <p:nvSpPr>
           <p:cNvPr id="2" name="Rectangle 1"/>
@@ -12062,6 +11769,7 @@
           <a:lstStyle/>
           <a:p>
             <a:pPr algn="ctr"/>
+            <a:endParaRPr/>
           </a:p>
         </p:txBody>
       </p:sp>
@@ -12082,7 +11790,7 @@
           <a:noFill/>
         </p:spPr>
         <p:txBody>
-          <a:bodyPr wrap="square" lIns="0" rIns="0" tIns="0" bIns="0" anchor="t">
+          <a:bodyPr wrap="square" lIns="0" tIns="0" rIns="0" bIns="0" anchor="t">
             <a:spAutoFit/>
           </a:bodyPr>
           <a:lstStyle/>
@@ -12117,7 +11825,7 @@
           <a:noFill/>
         </p:spPr>
         <p:txBody>
-          <a:bodyPr wrap="square" lIns="0" rIns="0" tIns="0" bIns="0" anchor="t">
+          <a:bodyPr wrap="square" lIns="0" tIns="0" rIns="0" bIns="0" anchor="t">
             <a:spAutoFit/>
           </a:bodyPr>
           <a:lstStyle/>
@@ -12175,6 +11883,7 @@
           <a:lstStyle/>
           <a:p>
             <a:pPr algn="ctr"/>
+            <a:endParaRPr/>
           </a:p>
         </p:txBody>
       </p:sp>
@@ -12195,7 +11904,7 @@
           <a:noFill/>
         </p:spPr>
         <p:txBody>
-          <a:bodyPr wrap="square" lIns="0" rIns="0" tIns="0" bIns="0" anchor="t">
+          <a:bodyPr wrap="square" lIns="0" tIns="0" rIns="0" bIns="0" anchor="t">
             <a:spAutoFit/>
           </a:bodyPr>
           <a:lstStyle/>
@@ -12230,7 +11939,7 @@
           <a:noFill/>
         </p:spPr>
         <p:txBody>
-          <a:bodyPr wrap="square" lIns="0" rIns="0" tIns="0" bIns="0" anchor="t">
+          <a:bodyPr wrap="square" lIns="0" tIns="0" rIns="0" bIns="0" anchor="t">
             <a:spAutoFit/>
           </a:bodyPr>
           <a:lstStyle/>
@@ -12265,7 +11974,7 @@
           <a:noFill/>
         </p:spPr>
         <p:txBody>
-          <a:bodyPr wrap="square" lIns="0" rIns="0" tIns="0" bIns="0" anchor="t">
+          <a:bodyPr wrap="square" lIns="0" tIns="0" rIns="0" bIns="0" anchor="t">
             <a:spAutoFit/>
           </a:bodyPr>
           <a:lstStyle/>
@@ -12309,7 +12018,7 @@
           <a:noFill/>
         </p:spPr>
         <p:txBody>
-          <a:bodyPr wrap="square" lIns="0" rIns="0" tIns="0" bIns="0" anchor="t">
+          <a:bodyPr wrap="square" lIns="0" tIns="0" rIns="0" bIns="0" anchor="t">
             <a:spAutoFit/>
           </a:bodyPr>
           <a:lstStyle/>
@@ -12344,7 +12053,7 @@
           <a:noFill/>
         </p:spPr>
         <p:txBody>
-          <a:bodyPr wrap="square" lIns="0" rIns="0" tIns="0" bIns="0">
+          <a:bodyPr wrap="square" lIns="0" tIns="0" rIns="0" bIns="0">
             <a:spAutoFit/>
           </a:bodyPr>
           <a:lstStyle/>
@@ -12447,6 +12156,7 @@
           <a:lstStyle/>
           <a:p>
             <a:pPr algn="ctr"/>
+            <a:endParaRPr/>
           </a:p>
         </p:txBody>
       </p:sp>
@@ -12467,7 +12177,7 @@
           <a:noFill/>
         </p:spPr>
         <p:txBody>
-          <a:bodyPr wrap="square" lIns="0" rIns="0" tIns="0" bIns="0" anchor="t">
+          <a:bodyPr wrap="square" lIns="0" tIns="0" rIns="0" bIns="0" anchor="t">
             <a:spAutoFit/>
           </a:bodyPr>
           <a:lstStyle/>
@@ -12494,7 +12204,7 @@
 </file>
 
 <file path=ppt/slides/slide20.xml><?xml version="1.0" encoding="utf-8"?>
-<p:sld xmlns:a="http://schemas.openxmlformats.org/drawingml/2006/main" xmlns:p="http://schemas.openxmlformats.org/presentationml/2006/main" xmlns:r="http://schemas.openxmlformats.org/officeDocument/2006/relationships">
+<p:sld xmlns:a="http://schemas.openxmlformats.org/drawingml/2006/main" xmlns:r="http://schemas.openxmlformats.org/officeDocument/2006/relationships" xmlns:p="http://schemas.openxmlformats.org/presentationml/2006/main">
   <p:cSld>
     <p:spTree>
       <p:nvGrpSpPr>
@@ -12502,7 +12212,14 @@
         <p:cNvGrpSpPr/>
         <p:nvPr/>
       </p:nvGrpSpPr>
-      <p:grpSpPr/>
+      <p:grpSpPr>
+        <a:xfrm>
+          <a:off x="0" y="0"/>
+          <a:ext cx="0" cy="0"/>
+          <a:chOff x="0" y="0"/>
+          <a:chExt cx="0" cy="0"/>
+        </a:xfrm>
+      </p:grpSpPr>
       <p:sp>
         <p:nvSpPr>
           <p:cNvPr id="2" name="Rectangle 1"/>
@@ -12543,6 +12260,7 @@
           <a:lstStyle/>
           <a:p>
             <a:pPr algn="ctr"/>
+            <a:endParaRPr/>
           </a:p>
         </p:txBody>
       </p:sp>
@@ -12555,7 +12273,7 @@
           <p:nvPr/>
         </p:nvPicPr>
         <p:blipFill>
-          <a:blip r:embed="rId2"/>
+          <a:blip r:embed="rId3"/>
           <a:stretch>
             <a:fillRect/>
           </a:stretch>
@@ -12587,7 +12305,7 @@
           <a:noFill/>
         </p:spPr>
         <p:txBody>
-          <a:bodyPr wrap="square" lIns="0" rIns="0" tIns="0" bIns="0" anchor="t">
+          <a:bodyPr wrap="square" lIns="0" tIns="0" rIns="0" bIns="0" anchor="t">
             <a:spAutoFit/>
           </a:bodyPr>
           <a:lstStyle/>
@@ -12614,7 +12332,7 @@
 </file>
 
 <file path=ppt/slides/slide21.xml><?xml version="1.0" encoding="utf-8"?>
-<p:sld xmlns:a="http://schemas.openxmlformats.org/drawingml/2006/main" xmlns:p="http://schemas.openxmlformats.org/presentationml/2006/main" xmlns:r="http://schemas.openxmlformats.org/officeDocument/2006/relationships">
+<p:sld xmlns:a="http://schemas.openxmlformats.org/drawingml/2006/main" xmlns:r="http://schemas.openxmlformats.org/officeDocument/2006/relationships" xmlns:p="http://schemas.openxmlformats.org/presentationml/2006/main">
   <p:cSld>
     <p:spTree>
       <p:nvGrpSpPr>
@@ -12622,7 +12340,14 @@
         <p:cNvGrpSpPr/>
         <p:nvPr/>
       </p:nvGrpSpPr>
-      <p:grpSpPr/>
+      <p:grpSpPr>
+        <a:xfrm>
+          <a:off x="0" y="0"/>
+          <a:ext cx="0" cy="0"/>
+          <a:chOff x="0" y="0"/>
+          <a:chExt cx="0" cy="0"/>
+        </a:xfrm>
+      </p:grpSpPr>
       <p:sp>
         <p:nvSpPr>
           <p:cNvPr id="2" name="Rectangle 1"/>
@@ -12663,6 +12388,7 @@
           <a:lstStyle/>
           <a:p>
             <a:pPr algn="ctr"/>
+            <a:endParaRPr/>
           </a:p>
         </p:txBody>
       </p:sp>
@@ -12683,7 +12409,7 @@
           <a:noFill/>
         </p:spPr>
         <p:txBody>
-          <a:bodyPr wrap="square" lIns="0" rIns="0" tIns="0" bIns="0" anchor="t">
+          <a:bodyPr wrap="square" lIns="0" tIns="0" rIns="0" bIns="0" anchor="t">
             <a:spAutoFit/>
           </a:bodyPr>
           <a:lstStyle/>
@@ -12718,7 +12444,7 @@
           <a:noFill/>
         </p:spPr>
         <p:txBody>
-          <a:bodyPr wrap="square" lIns="0" rIns="0" tIns="0" bIns="0" anchor="t">
+          <a:bodyPr wrap="square" lIns="0" tIns="0" rIns="0" bIns="0" anchor="t">
             <a:spAutoFit/>
           </a:bodyPr>
           <a:lstStyle/>
@@ -12776,6 +12502,7 @@
           <a:lstStyle/>
           <a:p>
             <a:pPr algn="ctr"/>
+            <a:endParaRPr/>
           </a:p>
         </p:txBody>
       </p:sp>
@@ -12796,7 +12523,7 @@
           <a:noFill/>
         </p:spPr>
         <p:txBody>
-          <a:bodyPr wrap="square" lIns="0" rIns="0" tIns="0" bIns="0" anchor="t">
+          <a:bodyPr wrap="square" lIns="0" tIns="0" rIns="0" bIns="0" anchor="t">
             <a:spAutoFit/>
           </a:bodyPr>
           <a:lstStyle/>
@@ -12831,7 +12558,7 @@
           <a:noFill/>
         </p:spPr>
         <p:txBody>
-          <a:bodyPr wrap="square" lIns="0" rIns="0" tIns="0" bIns="0" anchor="t">
+          <a:bodyPr wrap="square" lIns="0" tIns="0" rIns="0" bIns="0" anchor="t">
             <a:spAutoFit/>
           </a:bodyPr>
           <a:lstStyle/>
@@ -12866,7 +12593,7 @@
           <a:noFill/>
         </p:spPr>
         <p:txBody>
-          <a:bodyPr wrap="square" lIns="0" rIns="0" tIns="0" bIns="0" anchor="t">
+          <a:bodyPr wrap="square" lIns="0" tIns="0" rIns="0" bIns="0" anchor="t">
             <a:spAutoFit/>
           </a:bodyPr>
           <a:lstStyle/>
@@ -12935,6 +12662,7 @@
           <a:lstStyle/>
           <a:p>
             <a:pPr algn="ctr"/>
+            <a:endParaRPr/>
           </a:p>
         </p:txBody>
       </p:sp>
@@ -12955,7 +12683,7 @@
           <a:noFill/>
         </p:spPr>
         <p:txBody>
-          <a:bodyPr wrap="square" lIns="0" rIns="0" tIns="0" bIns="0" anchor="t">
+          <a:bodyPr wrap="square" lIns="0" tIns="0" rIns="0" bIns="0" anchor="t">
             <a:spAutoFit/>
           </a:bodyPr>
           <a:lstStyle/>
@@ -12990,7 +12718,7 @@
           <a:noFill/>
         </p:spPr>
         <p:txBody>
-          <a:bodyPr wrap="square" lIns="0" rIns="0" tIns="0" bIns="0" anchor="t">
+          <a:bodyPr wrap="square" lIns="0" tIns="0" rIns="0" bIns="0" anchor="t">
             <a:spAutoFit/>
           </a:bodyPr>
           <a:lstStyle/>
@@ -13025,7 +12753,7 @@
           <a:noFill/>
         </p:spPr>
         <p:txBody>
-          <a:bodyPr wrap="square" lIns="0" rIns="0" tIns="0" bIns="0" anchor="t">
+          <a:bodyPr wrap="square" lIns="0" tIns="0" rIns="0" bIns="0" anchor="t">
             <a:spAutoFit/>
           </a:bodyPr>
           <a:lstStyle/>
@@ -13085,6 +12813,7 @@
           <a:lstStyle/>
           <a:p>
             <a:pPr algn="ctr"/>
+            <a:endParaRPr/>
           </a:p>
         </p:txBody>
       </p:sp>
@@ -13105,7 +12834,7 @@
           <a:noFill/>
         </p:spPr>
         <p:txBody>
-          <a:bodyPr wrap="square" lIns="0" rIns="0" tIns="0" bIns="0" anchor="t">
+          <a:bodyPr wrap="square" lIns="0" tIns="0" rIns="0" bIns="0" anchor="t">
             <a:spAutoFit/>
           </a:bodyPr>
           <a:lstStyle/>
@@ -13140,7 +12869,7 @@
           <a:noFill/>
         </p:spPr>
         <p:txBody>
-          <a:bodyPr wrap="square" lIns="0" rIns="0" tIns="0" bIns="0" anchor="t">
+          <a:bodyPr wrap="square" lIns="0" tIns="0" rIns="0" bIns="0" anchor="t">
             <a:spAutoFit/>
           </a:bodyPr>
           <a:lstStyle/>
@@ -13175,7 +12904,7 @@
           <a:noFill/>
         </p:spPr>
         <p:txBody>
-          <a:bodyPr wrap="square" lIns="0" rIns="0" tIns="0" bIns="0" anchor="t">
+          <a:bodyPr wrap="square" lIns="0" tIns="0" rIns="0" bIns="0" anchor="t">
             <a:spAutoFit/>
           </a:bodyPr>
           <a:lstStyle/>
@@ -13235,6 +12964,7 @@
           <a:lstStyle/>
           <a:p>
             <a:pPr algn="ctr"/>
+            <a:endParaRPr/>
           </a:p>
         </p:txBody>
       </p:sp>
@@ -13255,7 +12985,7 @@
           <a:noFill/>
         </p:spPr>
         <p:txBody>
-          <a:bodyPr wrap="square" lIns="0" rIns="0" tIns="0" bIns="0" anchor="t">
+          <a:bodyPr wrap="square" lIns="0" tIns="0" rIns="0" bIns="0" anchor="t">
             <a:spAutoFit/>
           </a:bodyPr>
           <a:lstStyle/>
@@ -13290,7 +13020,7 @@
           <a:noFill/>
         </p:spPr>
         <p:txBody>
-          <a:bodyPr wrap="square" lIns="0" rIns="0" tIns="0" bIns="0" anchor="t">
+          <a:bodyPr wrap="square" lIns="0" tIns="0" rIns="0" bIns="0" anchor="t">
             <a:spAutoFit/>
           </a:bodyPr>
           <a:lstStyle/>
@@ -13325,7 +13055,7 @@
           <a:noFill/>
         </p:spPr>
         <p:txBody>
-          <a:bodyPr wrap="square" lIns="0" rIns="0" tIns="0" bIns="0" anchor="t">
+          <a:bodyPr wrap="square" lIns="0" tIns="0" rIns="0" bIns="0" anchor="t">
             <a:spAutoFit/>
           </a:bodyPr>
           <a:lstStyle/>
@@ -13383,6 +13113,7 @@
           <a:lstStyle/>
           <a:p>
             <a:pPr algn="ctr"/>
+            <a:endParaRPr/>
           </a:p>
         </p:txBody>
       </p:sp>
@@ -13403,7 +13134,7 @@
           <a:noFill/>
         </p:spPr>
         <p:txBody>
-          <a:bodyPr wrap="square" lIns="0" rIns="0" tIns="0" bIns="0" anchor="t">
+          <a:bodyPr wrap="square" lIns="0" tIns="0" rIns="0" bIns="0" anchor="t">
             <a:spAutoFit/>
           </a:bodyPr>
           <a:lstStyle/>
@@ -13430,7 +13161,7 @@
 </file>
 
 <file path=ppt/slides/slide22.xml><?xml version="1.0" encoding="utf-8"?>
-<p:sld xmlns:a="http://schemas.openxmlformats.org/drawingml/2006/main" xmlns:p="http://schemas.openxmlformats.org/presentationml/2006/main" xmlns:r="http://schemas.openxmlformats.org/officeDocument/2006/relationships">
+<p:sld xmlns:a="http://schemas.openxmlformats.org/drawingml/2006/main" xmlns:r="http://schemas.openxmlformats.org/officeDocument/2006/relationships" xmlns:p="http://schemas.openxmlformats.org/presentationml/2006/main">
   <p:cSld>
     <p:spTree>
       <p:nvGrpSpPr>
@@ -13438,7 +13169,14 @@
         <p:cNvGrpSpPr/>
         <p:nvPr/>
       </p:nvGrpSpPr>
-      <p:grpSpPr/>
+      <p:grpSpPr>
+        <a:xfrm>
+          <a:off x="0" y="0"/>
+          <a:ext cx="0" cy="0"/>
+          <a:chOff x="0" y="0"/>
+          <a:chExt cx="0" cy="0"/>
+        </a:xfrm>
+      </p:grpSpPr>
       <p:sp>
         <p:nvSpPr>
           <p:cNvPr id="2" name="Rectangle 1"/>
@@ -13479,6 +13217,7 @@
           <a:lstStyle/>
           <a:p>
             <a:pPr algn="ctr"/>
+            <a:endParaRPr/>
           </a:p>
         </p:txBody>
       </p:sp>
@@ -13499,7 +13238,7 @@
           <a:noFill/>
         </p:spPr>
         <p:txBody>
-          <a:bodyPr wrap="square" lIns="0" rIns="0" tIns="0" bIns="0" anchor="t">
+          <a:bodyPr wrap="square" lIns="0" tIns="0" rIns="0" bIns="0" anchor="t">
             <a:spAutoFit/>
           </a:bodyPr>
           <a:lstStyle/>
@@ -13534,7 +13273,7 @@
           <a:noFill/>
         </p:spPr>
         <p:txBody>
-          <a:bodyPr wrap="square" lIns="0" rIns="0" tIns="0" bIns="0" anchor="t">
+          <a:bodyPr wrap="square" lIns="0" tIns="0" rIns="0" bIns="0" anchor="t">
             <a:spAutoFit/>
           </a:bodyPr>
           <a:lstStyle/>
@@ -13592,6 +13331,7 @@
           <a:lstStyle/>
           <a:p>
             <a:pPr algn="ctr"/>
+            <a:endParaRPr/>
           </a:p>
         </p:txBody>
       </p:sp>
@@ -13612,7 +13352,7 @@
           <a:noFill/>
         </p:spPr>
         <p:txBody>
-          <a:bodyPr wrap="square" lIns="0" rIns="0" tIns="0" bIns="0" anchor="t">
+          <a:bodyPr wrap="square" lIns="0" tIns="0" rIns="0" bIns="0" anchor="t">
             <a:spAutoFit/>
           </a:bodyPr>
           <a:lstStyle/>
@@ -13626,120 +13366,6 @@
                 <a:latin typeface="Arial"/>
               </a:rPr>
               <a:t>THE TRANSITION</a:t>
-            </a:r>
-          </a:p>
-        </p:txBody>
-      </p:sp>
-      <p:sp>
-        <p:nvSpPr>
-          <p:cNvPr id="7" name="TextBox 6"/>
-          <p:cNvSpPr txBox="1"/>
-          <p:nvPr/>
-        </p:nvSpPr>
-        <p:spPr>
-          <a:xfrm>
-            <a:off x="1143000" y="2743200"/>
-            <a:ext cx="15544800" cy="2011680"/>
-          </a:xfrm>
-          <a:prstGeom prst="rect">
-            <a:avLst/>
-          </a:prstGeom>
-          <a:noFill/>
-        </p:spPr>
-        <p:txBody>
-          <a:bodyPr wrap="square" lIns="0" rIns="0" tIns="0" bIns="0" anchor="t">
-            <a:spAutoFit/>
-          </a:bodyPr>
-          <a:lstStyle/>
-          <a:p>
-            <a:pPr algn="l"/>
-            <a:r>
-              <a:rPr sz="24000" b="1">
-                <a:solidFill>
-                  <a:srgbClr val="F58220"/>
-                </a:solidFill>
-                <a:latin typeface="Arial"/>
-              </a:rPr>
-              <a:t>“</a:t>
-            </a:r>
-          </a:p>
-        </p:txBody>
-      </p:sp>
-      <p:sp>
-        <p:nvSpPr>
-          <p:cNvPr id="8" name="TextBox 7"/>
-          <p:cNvSpPr txBox="1"/>
-          <p:nvPr/>
-        </p:nvSpPr>
-        <p:spPr>
-          <a:xfrm>
-            <a:off x="1143000" y="5029200"/>
-            <a:ext cx="15544800" cy="2286000"/>
-          </a:xfrm>
-          <a:prstGeom prst="rect">
-            <a:avLst/>
-          </a:prstGeom>
-          <a:noFill/>
-        </p:spPr>
-        <p:txBody>
-          <a:bodyPr wrap="square" lIns="0" rIns="0" tIns="0" bIns="0" anchor="t">
-            <a:spAutoFit/>
-          </a:bodyPr>
-          <a:lstStyle/>
-          <a:p>
-            <a:pPr algn="l"/>
-            <a:r>
-              <a:rPr sz="6800" b="0">
-                <a:solidFill>
-                  <a:srgbClr val="14161C"/>
-                </a:solidFill>
-                <a:latin typeface="Arial"/>
-              </a:rPr>
-              <a:t>After lunch — </a:t>
-            </a:r>
-            <a:r>
-              <a:rPr sz="6800" b="1">
-                <a:solidFill>
-                  <a:srgbClr val="14161C"/>
-                </a:solidFill>
-                <a:latin typeface="Arial"/>
-              </a:rPr>
-              <a:t>you write yours.</a:t>
-            </a:r>
-          </a:p>
-        </p:txBody>
-      </p:sp>
-      <p:sp>
-        <p:nvSpPr>
-          <p:cNvPr id="9" name="TextBox 8"/>
-          <p:cNvSpPr txBox="1"/>
-          <p:nvPr/>
-        </p:nvSpPr>
-        <p:spPr>
-          <a:xfrm>
-            <a:off x="1143000" y="7863840"/>
-            <a:ext cx="15544800" cy="365760"/>
-          </a:xfrm>
-          <a:prstGeom prst="rect">
-            <a:avLst/>
-          </a:prstGeom>
-          <a:noFill/>
-        </p:spPr>
-        <p:txBody>
-          <a:bodyPr wrap="square" lIns="0" rIns="0" tIns="0" bIns="0" anchor="t">
-            <a:spAutoFit/>
-          </a:bodyPr>
-          <a:lstStyle/>
-          <a:p>
-            <a:pPr algn="l"/>
-            <a:r>
-              <a:rPr sz="1400" b="1">
-                <a:solidFill>
-                  <a:srgbClr val="6B6E78"/>
-                </a:solidFill>
-                <a:latin typeface="Arial"/>
-              </a:rPr>
-              <a:t>— CHRIS KEHAYIAS  ·  ACS TECHNOLOGIES</a:t>
             </a:r>
           </a:p>
         </p:txBody>
@@ -13784,6 +13410,7 @@
           <a:lstStyle/>
           <a:p>
             <a:pPr algn="ctr"/>
+            <a:endParaRPr/>
           </a:p>
         </p:txBody>
       </p:sp>
@@ -13804,7 +13431,7 @@
           <a:noFill/>
         </p:spPr>
         <p:txBody>
-          <a:bodyPr wrap="square" lIns="0" rIns="0" tIns="0" bIns="0" anchor="t">
+          <a:bodyPr wrap="square" lIns="0" tIns="0" rIns="0" bIns="0" anchor="t">
             <a:spAutoFit/>
           </a:bodyPr>
           <a:lstStyle/>
@@ -13831,7 +13458,7 @@
 </file>
 
 <file path=ppt/slides/slide3.xml><?xml version="1.0" encoding="utf-8"?>
-<p:sld xmlns:a="http://schemas.openxmlformats.org/drawingml/2006/main" xmlns:p="http://schemas.openxmlformats.org/presentationml/2006/main" xmlns:r="http://schemas.openxmlformats.org/officeDocument/2006/relationships">
+<p:sld xmlns:a="http://schemas.openxmlformats.org/drawingml/2006/main" xmlns:r="http://schemas.openxmlformats.org/officeDocument/2006/relationships" xmlns:p="http://schemas.openxmlformats.org/presentationml/2006/main">
   <p:cSld>
     <p:spTree>
       <p:nvGrpSpPr>
@@ -13839,7 +13466,14 @@
         <p:cNvGrpSpPr/>
         <p:nvPr/>
       </p:nvGrpSpPr>
-      <p:grpSpPr/>
+      <p:grpSpPr>
+        <a:xfrm>
+          <a:off x="0" y="0"/>
+          <a:ext cx="0" cy="0"/>
+          <a:chOff x="0" y="0"/>
+          <a:chExt cx="0" cy="0"/>
+        </a:xfrm>
+      </p:grpSpPr>
       <p:sp>
         <p:nvSpPr>
           <p:cNvPr id="2" name="Rectangle 1"/>
@@ -13880,6 +13514,7 @@
           <a:lstStyle/>
           <a:p>
             <a:pPr algn="ctr"/>
+            <a:endParaRPr/>
           </a:p>
         </p:txBody>
       </p:sp>
@@ -13900,7 +13535,7 @@
           <a:noFill/>
         </p:spPr>
         <p:txBody>
-          <a:bodyPr wrap="square" lIns="0" rIns="0" tIns="0" bIns="0" anchor="t">
+          <a:bodyPr wrap="square" lIns="0" tIns="0" rIns="0" bIns="0" anchor="t">
             <a:spAutoFit/>
           </a:bodyPr>
           <a:lstStyle/>
@@ -13935,7 +13570,7 @@
           <a:noFill/>
         </p:spPr>
         <p:txBody>
-          <a:bodyPr wrap="square" lIns="0" rIns="0" tIns="0" bIns="0" anchor="t">
+          <a:bodyPr wrap="square" lIns="0" tIns="0" rIns="0" bIns="0" anchor="t">
             <a:spAutoFit/>
           </a:bodyPr>
           <a:lstStyle/>
@@ -13993,6 +13628,7 @@
           <a:lstStyle/>
           <a:p>
             <a:pPr algn="ctr"/>
+            <a:endParaRPr/>
           </a:p>
         </p:txBody>
       </p:sp>
@@ -14013,7 +13649,7 @@
           <a:noFill/>
         </p:spPr>
         <p:txBody>
-          <a:bodyPr wrap="square" lIns="0" rIns="0" tIns="0" bIns="0" anchor="t">
+          <a:bodyPr wrap="square" lIns="0" tIns="0" rIns="0" bIns="0" anchor="t">
             <a:spAutoFit/>
           </a:bodyPr>
           <a:lstStyle/>
@@ -14048,7 +13684,7 @@
           <a:noFill/>
         </p:spPr>
         <p:txBody>
-          <a:bodyPr wrap="square" lIns="0" rIns="0" tIns="0" bIns="0" anchor="t">
+          <a:bodyPr wrap="square" lIns="0" tIns="0" rIns="0" bIns="0" anchor="t">
             <a:spAutoFit/>
           </a:bodyPr>
           <a:lstStyle/>
@@ -14083,7 +13719,7 @@
           <a:noFill/>
         </p:spPr>
         <p:txBody>
-          <a:bodyPr wrap="square" lIns="0" rIns="0" tIns="0" bIns="0" anchor="t">
+          <a:bodyPr wrap="square" lIns="0" tIns="0" rIns="0" bIns="0" anchor="t">
             <a:spAutoFit/>
           </a:bodyPr>
           <a:lstStyle/>
@@ -14136,7 +13772,7 @@
           <a:noFill/>
         </p:spPr>
         <p:txBody>
-          <a:bodyPr wrap="square" lIns="0" rIns="0" tIns="0" bIns="0">
+          <a:bodyPr wrap="square" lIns="0" tIns="0" rIns="0" bIns="0">
             <a:spAutoFit/>
           </a:bodyPr>
           <a:lstStyle/>
@@ -14266,6 +13902,7 @@
           <a:lstStyle/>
           <a:p>
             <a:pPr algn="ctr"/>
+            <a:endParaRPr/>
           </a:p>
         </p:txBody>
       </p:sp>
@@ -14286,7 +13923,7 @@
           <a:noFill/>
         </p:spPr>
         <p:txBody>
-          <a:bodyPr wrap="square" lIns="0" rIns="0" tIns="0" bIns="0" anchor="t">
+          <a:bodyPr wrap="square" lIns="0" tIns="0" rIns="0" bIns="0" anchor="t">
             <a:spAutoFit/>
           </a:bodyPr>
           <a:lstStyle/>
@@ -14313,7 +13950,7 @@
 </file>
 
 <file path=ppt/slides/slide4.xml><?xml version="1.0" encoding="utf-8"?>
-<p:sld xmlns:a="http://schemas.openxmlformats.org/drawingml/2006/main" xmlns:p="http://schemas.openxmlformats.org/presentationml/2006/main" xmlns:r="http://schemas.openxmlformats.org/officeDocument/2006/relationships">
+<p:sld xmlns:a="http://schemas.openxmlformats.org/drawingml/2006/main" xmlns:r="http://schemas.openxmlformats.org/officeDocument/2006/relationships" xmlns:p="http://schemas.openxmlformats.org/presentationml/2006/main">
   <p:cSld>
     <p:spTree>
       <p:nvGrpSpPr>
@@ -14321,7 +13958,14 @@
         <p:cNvGrpSpPr/>
         <p:nvPr/>
       </p:nvGrpSpPr>
-      <p:grpSpPr/>
+      <p:grpSpPr>
+        <a:xfrm>
+          <a:off x="0" y="0"/>
+          <a:ext cx="0" cy="0"/>
+          <a:chOff x="0" y="0"/>
+          <a:chExt cx="0" cy="0"/>
+        </a:xfrm>
+      </p:grpSpPr>
       <p:sp>
         <p:nvSpPr>
           <p:cNvPr id="2" name="Rectangle 1"/>
@@ -14362,6 +14006,7 @@
           <a:lstStyle/>
           <a:p>
             <a:pPr algn="ctr"/>
+            <a:endParaRPr/>
           </a:p>
         </p:txBody>
       </p:sp>
@@ -14382,7 +14027,7 @@
           <a:noFill/>
         </p:spPr>
         <p:txBody>
-          <a:bodyPr wrap="square" lIns="0" rIns="0" tIns="0" bIns="0" anchor="t">
+          <a:bodyPr wrap="square" lIns="0" tIns="0" rIns="0" bIns="0" anchor="t">
             <a:spAutoFit/>
           </a:bodyPr>
           <a:lstStyle/>
@@ -14417,7 +14062,7 @@
           <a:noFill/>
         </p:spPr>
         <p:txBody>
-          <a:bodyPr wrap="square" lIns="0" rIns="0" tIns="0" bIns="0" anchor="t">
+          <a:bodyPr wrap="square" lIns="0" tIns="0" rIns="0" bIns="0" anchor="t">
             <a:spAutoFit/>
           </a:bodyPr>
           <a:lstStyle/>
@@ -14475,6 +14120,7 @@
           <a:lstStyle/>
           <a:p>
             <a:pPr algn="ctr"/>
+            <a:endParaRPr/>
           </a:p>
         </p:txBody>
       </p:sp>
@@ -14495,7 +14141,7 @@
           <a:noFill/>
         </p:spPr>
         <p:txBody>
-          <a:bodyPr wrap="square" lIns="0" rIns="0" tIns="0" bIns="0" anchor="t">
+          <a:bodyPr wrap="square" lIns="0" tIns="0" rIns="0" bIns="0" anchor="t">
             <a:spAutoFit/>
           </a:bodyPr>
           <a:lstStyle/>
@@ -14530,7 +14176,7 @@
           <a:noFill/>
         </p:spPr>
         <p:txBody>
-          <a:bodyPr wrap="square" lIns="0" rIns="0" tIns="0" bIns="0" anchor="t">
+          <a:bodyPr wrap="square" lIns="0" tIns="0" rIns="0" bIns="0" anchor="t">
             <a:spAutoFit/>
           </a:bodyPr>
           <a:lstStyle/>
@@ -14565,7 +14211,7 @@
           <a:noFill/>
         </p:spPr>
         <p:txBody>
-          <a:bodyPr wrap="square" lIns="0" rIns="0" tIns="0" bIns="0" anchor="t">
+          <a:bodyPr wrap="square" lIns="0" tIns="0" rIns="0" bIns="0" anchor="t">
             <a:spAutoFit/>
           </a:bodyPr>
           <a:lstStyle/>
@@ -14618,7 +14264,7 @@
           <a:noFill/>
         </p:spPr>
         <p:txBody>
-          <a:bodyPr wrap="square" lIns="0" rIns="0" tIns="0" bIns="0">
+          <a:bodyPr wrap="square" lIns="0" tIns="0" rIns="0" bIns="0">
             <a:spAutoFit/>
           </a:bodyPr>
           <a:lstStyle/>
@@ -14776,6 +14422,7 @@
           <a:lstStyle/>
           <a:p>
             <a:pPr algn="ctr"/>
+            <a:endParaRPr/>
           </a:p>
         </p:txBody>
       </p:sp>
@@ -14796,7 +14443,7 @@
           <a:noFill/>
         </p:spPr>
         <p:txBody>
-          <a:bodyPr wrap="square" lIns="0" rIns="0" tIns="0" bIns="0" anchor="t">
+          <a:bodyPr wrap="square" lIns="0" tIns="0" rIns="0" bIns="0" anchor="t">
             <a:spAutoFit/>
           </a:bodyPr>
           <a:lstStyle/>
@@ -14823,7 +14470,7 @@
 </file>
 
 <file path=ppt/slides/slide5.xml><?xml version="1.0" encoding="utf-8"?>
-<p:sld xmlns:a="http://schemas.openxmlformats.org/drawingml/2006/main" xmlns:p="http://schemas.openxmlformats.org/presentationml/2006/main" xmlns:r="http://schemas.openxmlformats.org/officeDocument/2006/relationships">
+<p:sld xmlns:a="http://schemas.openxmlformats.org/drawingml/2006/main" xmlns:r="http://schemas.openxmlformats.org/officeDocument/2006/relationships" xmlns:p="http://schemas.openxmlformats.org/presentationml/2006/main">
   <p:cSld>
     <p:spTree>
       <p:nvGrpSpPr>
@@ -14831,7 +14478,14 @@
         <p:cNvGrpSpPr/>
         <p:nvPr/>
       </p:nvGrpSpPr>
-      <p:grpSpPr/>
+      <p:grpSpPr>
+        <a:xfrm>
+          <a:off x="0" y="0"/>
+          <a:ext cx="0" cy="0"/>
+          <a:chOff x="0" y="0"/>
+          <a:chExt cx="0" cy="0"/>
+        </a:xfrm>
+      </p:grpSpPr>
       <p:sp>
         <p:nvSpPr>
           <p:cNvPr id="2" name="Rectangle 1"/>
@@ -14872,6 +14526,7 @@
           <a:lstStyle/>
           <a:p>
             <a:pPr algn="ctr"/>
+            <a:endParaRPr/>
           </a:p>
         </p:txBody>
       </p:sp>
@@ -14892,7 +14547,7 @@
           <a:noFill/>
         </p:spPr>
         <p:txBody>
-          <a:bodyPr wrap="square" lIns="0" rIns="0" tIns="0" bIns="0" anchor="t">
+          <a:bodyPr wrap="square" lIns="0" tIns="0" rIns="0" bIns="0" anchor="t">
             <a:spAutoFit/>
           </a:bodyPr>
           <a:lstStyle/>
@@ -14927,7 +14582,7 @@
           <a:noFill/>
         </p:spPr>
         <p:txBody>
-          <a:bodyPr wrap="square" lIns="0" rIns="0" tIns="0" bIns="0" anchor="t">
+          <a:bodyPr wrap="square" lIns="0" tIns="0" rIns="0" bIns="0" anchor="t">
             <a:spAutoFit/>
           </a:bodyPr>
           <a:lstStyle/>
@@ -14985,6 +14640,7 @@
           <a:lstStyle/>
           <a:p>
             <a:pPr algn="ctr"/>
+            <a:endParaRPr/>
           </a:p>
         </p:txBody>
       </p:sp>
@@ -15005,7 +14661,7 @@
           <a:noFill/>
         </p:spPr>
         <p:txBody>
-          <a:bodyPr wrap="square" lIns="0" rIns="0" tIns="0" bIns="0" anchor="t">
+          <a:bodyPr wrap="square" lIns="0" tIns="0" rIns="0" bIns="0" anchor="t">
             <a:spAutoFit/>
           </a:bodyPr>
           <a:lstStyle/>
@@ -15040,7 +14696,7 @@
           <a:noFill/>
         </p:spPr>
         <p:txBody>
-          <a:bodyPr wrap="square" lIns="0" rIns="0" tIns="0" bIns="0" anchor="t">
+          <a:bodyPr wrap="square" lIns="0" tIns="0" rIns="0" bIns="0" anchor="t">
             <a:spAutoFit/>
           </a:bodyPr>
           <a:lstStyle/>
@@ -15075,7 +14731,7 @@
           <a:noFill/>
         </p:spPr>
         <p:txBody>
-          <a:bodyPr wrap="square" lIns="0" rIns="0" tIns="0" bIns="0" anchor="t">
+          <a:bodyPr wrap="square" lIns="0" tIns="0" rIns="0" bIns="0" anchor="t">
             <a:spAutoFit/>
           </a:bodyPr>
           <a:lstStyle/>
@@ -15119,7 +14775,7 @@
           <a:noFill/>
         </p:spPr>
         <p:txBody>
-          <a:bodyPr wrap="square" lIns="0" rIns="0" tIns="0" bIns="0" anchor="t">
+          <a:bodyPr wrap="square" lIns="0" tIns="0" rIns="0" bIns="0" anchor="t">
             <a:spAutoFit/>
           </a:bodyPr>
           <a:lstStyle/>
@@ -15154,7 +14810,7 @@
           <a:noFill/>
         </p:spPr>
         <p:txBody>
-          <a:bodyPr wrap="square" lIns="0" rIns="0" tIns="0" bIns="0">
+          <a:bodyPr wrap="square" lIns="0" tIns="0" rIns="0" bIns="0">
             <a:spAutoFit/>
           </a:bodyPr>
           <a:lstStyle/>
@@ -15257,6 +14913,7 @@
           <a:lstStyle/>
           <a:p>
             <a:pPr algn="ctr"/>
+            <a:endParaRPr/>
           </a:p>
         </p:txBody>
       </p:sp>
@@ -15277,7 +14934,7 @@
           <a:noFill/>
         </p:spPr>
         <p:txBody>
-          <a:bodyPr wrap="square" lIns="0" rIns="0" tIns="0" bIns="0" anchor="t">
+          <a:bodyPr wrap="square" lIns="0" tIns="0" rIns="0" bIns="0" anchor="t">
             <a:spAutoFit/>
           </a:bodyPr>
           <a:lstStyle/>
@@ -15304,7 +14961,7 @@
 </file>
 
 <file path=ppt/slides/slide6.xml><?xml version="1.0" encoding="utf-8"?>
-<p:sld xmlns:a="http://schemas.openxmlformats.org/drawingml/2006/main" xmlns:p="http://schemas.openxmlformats.org/presentationml/2006/main" xmlns:r="http://schemas.openxmlformats.org/officeDocument/2006/relationships">
+<p:sld xmlns:a="http://schemas.openxmlformats.org/drawingml/2006/main" xmlns:r="http://schemas.openxmlformats.org/officeDocument/2006/relationships" xmlns:p="http://schemas.openxmlformats.org/presentationml/2006/main">
   <p:cSld>
     <p:spTree>
       <p:nvGrpSpPr>
@@ -15312,7 +14969,14 @@
         <p:cNvGrpSpPr/>
         <p:nvPr/>
       </p:nvGrpSpPr>
-      <p:grpSpPr/>
+      <p:grpSpPr>
+        <a:xfrm>
+          <a:off x="0" y="0"/>
+          <a:ext cx="0" cy="0"/>
+          <a:chOff x="0" y="0"/>
+          <a:chExt cx="0" cy="0"/>
+        </a:xfrm>
+      </p:grpSpPr>
       <p:sp>
         <p:nvSpPr>
           <p:cNvPr id="2" name="Rectangle 1"/>
@@ -15353,6 +15017,7 @@
           <a:lstStyle/>
           <a:p>
             <a:pPr algn="ctr"/>
+            <a:endParaRPr/>
           </a:p>
         </p:txBody>
       </p:sp>
@@ -15373,7 +15038,7 @@
           <a:noFill/>
         </p:spPr>
         <p:txBody>
-          <a:bodyPr wrap="square" lIns="0" rIns="0" tIns="0" bIns="0" anchor="t">
+          <a:bodyPr wrap="square" lIns="0" tIns="0" rIns="0" bIns="0" anchor="t">
             <a:spAutoFit/>
           </a:bodyPr>
           <a:lstStyle/>
@@ -15408,7 +15073,7 @@
           <a:noFill/>
         </p:spPr>
         <p:txBody>
-          <a:bodyPr wrap="square" lIns="0" rIns="0" tIns="0" bIns="0" anchor="t">
+          <a:bodyPr wrap="square" lIns="0" tIns="0" rIns="0" bIns="0" anchor="t">
             <a:spAutoFit/>
           </a:bodyPr>
           <a:lstStyle/>
@@ -15466,6 +15131,7 @@
           <a:lstStyle/>
           <a:p>
             <a:pPr algn="ctr"/>
+            <a:endParaRPr/>
           </a:p>
         </p:txBody>
       </p:sp>
@@ -15486,7 +15152,7 @@
           <a:noFill/>
         </p:spPr>
         <p:txBody>
-          <a:bodyPr wrap="square" lIns="0" rIns="0" tIns="0" bIns="0" anchor="t">
+          <a:bodyPr wrap="square" lIns="0" tIns="0" rIns="0" bIns="0" anchor="t">
             <a:spAutoFit/>
           </a:bodyPr>
           <a:lstStyle/>
@@ -15521,7 +15187,7 @@
           <a:noFill/>
         </p:spPr>
         <p:txBody>
-          <a:bodyPr wrap="square" lIns="0" rIns="0" tIns="0" bIns="0" anchor="t">
+          <a:bodyPr wrap="square" lIns="0" tIns="0" rIns="0" bIns="0" anchor="t">
             <a:spAutoFit/>
           </a:bodyPr>
           <a:lstStyle/>
@@ -15556,7 +15222,7 @@
           <a:noFill/>
         </p:spPr>
         <p:txBody>
-          <a:bodyPr wrap="square" lIns="0" rIns="0" tIns="0" bIns="0" anchor="t">
+          <a:bodyPr wrap="square" lIns="0" tIns="0" rIns="0" bIns="0" anchor="t">
             <a:spAutoFit/>
           </a:bodyPr>
           <a:lstStyle/>
@@ -15625,6 +15291,7 @@
           <a:lstStyle/>
           <a:p>
             <a:pPr algn="ctr"/>
+            <a:endParaRPr/>
           </a:p>
         </p:txBody>
       </p:sp>
@@ -15645,7 +15312,7 @@
           <a:noFill/>
         </p:spPr>
         <p:txBody>
-          <a:bodyPr wrap="square" lIns="0" rIns="0" tIns="0" bIns="0" anchor="t">
+          <a:bodyPr wrap="square" lIns="0" tIns="0" rIns="0" bIns="0" anchor="t">
             <a:spAutoFit/>
           </a:bodyPr>
           <a:lstStyle/>
@@ -15680,7 +15347,7 @@
           <a:noFill/>
         </p:spPr>
         <p:txBody>
-          <a:bodyPr wrap="square" lIns="0" rIns="0" tIns="0" bIns="0" anchor="t">
+          <a:bodyPr wrap="square" lIns="0" tIns="0" rIns="0" bIns="0" anchor="t">
             <a:spAutoFit/>
           </a:bodyPr>
           <a:lstStyle/>
@@ -15715,7 +15382,7 @@
           <a:noFill/>
         </p:spPr>
         <p:txBody>
-          <a:bodyPr wrap="square" lIns="0" rIns="0" tIns="0" bIns="0" anchor="t">
+          <a:bodyPr wrap="square" lIns="0" tIns="0" rIns="0" bIns="0" anchor="t">
             <a:spAutoFit/>
           </a:bodyPr>
           <a:lstStyle/>
@@ -15775,6 +15442,7 @@
           <a:lstStyle/>
           <a:p>
             <a:pPr algn="ctr"/>
+            <a:endParaRPr/>
           </a:p>
         </p:txBody>
       </p:sp>
@@ -15795,7 +15463,7 @@
           <a:noFill/>
         </p:spPr>
         <p:txBody>
-          <a:bodyPr wrap="square" lIns="0" rIns="0" tIns="0" bIns="0" anchor="t">
+          <a:bodyPr wrap="square" lIns="0" tIns="0" rIns="0" bIns="0" anchor="t">
             <a:spAutoFit/>
           </a:bodyPr>
           <a:lstStyle/>
@@ -15830,7 +15498,7 @@
           <a:noFill/>
         </p:spPr>
         <p:txBody>
-          <a:bodyPr wrap="square" lIns="0" rIns="0" tIns="0" bIns="0" anchor="t">
+          <a:bodyPr wrap="square" lIns="0" tIns="0" rIns="0" bIns="0" anchor="t">
             <a:spAutoFit/>
           </a:bodyPr>
           <a:lstStyle/>
@@ -15865,7 +15533,7 @@
           <a:noFill/>
         </p:spPr>
         <p:txBody>
-          <a:bodyPr wrap="square" lIns="0" rIns="0" tIns="0" bIns="0" anchor="t">
+          <a:bodyPr wrap="square" lIns="0" tIns="0" rIns="0" bIns="0" anchor="t">
             <a:spAutoFit/>
           </a:bodyPr>
           <a:lstStyle/>
@@ -15925,6 +15593,7 @@
           <a:lstStyle/>
           <a:p>
             <a:pPr algn="ctr"/>
+            <a:endParaRPr/>
           </a:p>
         </p:txBody>
       </p:sp>
@@ -15945,7 +15614,7 @@
           <a:noFill/>
         </p:spPr>
         <p:txBody>
-          <a:bodyPr wrap="square" lIns="0" rIns="0" tIns="0" bIns="0" anchor="t">
+          <a:bodyPr wrap="square" lIns="0" tIns="0" rIns="0" bIns="0" anchor="t">
             <a:spAutoFit/>
           </a:bodyPr>
           <a:lstStyle/>
@@ -15980,7 +15649,7 @@
           <a:noFill/>
         </p:spPr>
         <p:txBody>
-          <a:bodyPr wrap="square" lIns="0" rIns="0" tIns="0" bIns="0" anchor="t">
+          <a:bodyPr wrap="square" lIns="0" tIns="0" rIns="0" bIns="0" anchor="t">
             <a:spAutoFit/>
           </a:bodyPr>
           <a:lstStyle/>
@@ -16015,7 +15684,7 @@
           <a:noFill/>
         </p:spPr>
         <p:txBody>
-          <a:bodyPr wrap="square" lIns="0" rIns="0" tIns="0" bIns="0" anchor="t">
+          <a:bodyPr wrap="square" lIns="0" tIns="0" rIns="0" bIns="0" anchor="t">
             <a:spAutoFit/>
           </a:bodyPr>
           <a:lstStyle/>
@@ -16075,6 +15744,7 @@
           <a:lstStyle/>
           <a:p>
             <a:pPr algn="ctr"/>
+            <a:endParaRPr/>
           </a:p>
         </p:txBody>
       </p:sp>
@@ -16095,7 +15765,7 @@
           <a:noFill/>
         </p:spPr>
         <p:txBody>
-          <a:bodyPr wrap="square" lIns="0" rIns="0" tIns="0" bIns="0" anchor="t">
+          <a:bodyPr wrap="square" lIns="0" tIns="0" rIns="0" bIns="0" anchor="t">
             <a:spAutoFit/>
           </a:bodyPr>
           <a:lstStyle/>
@@ -16130,7 +15800,7 @@
           <a:noFill/>
         </p:spPr>
         <p:txBody>
-          <a:bodyPr wrap="square" lIns="0" rIns="0" tIns="0" bIns="0" anchor="t">
+          <a:bodyPr wrap="square" lIns="0" tIns="0" rIns="0" bIns="0" anchor="t">
             <a:spAutoFit/>
           </a:bodyPr>
           <a:lstStyle/>
@@ -16165,7 +15835,7 @@
           <a:noFill/>
         </p:spPr>
         <p:txBody>
-          <a:bodyPr wrap="square" lIns="0" rIns="0" tIns="0" bIns="0" anchor="t">
+          <a:bodyPr wrap="square" lIns="0" tIns="0" rIns="0" bIns="0" anchor="t">
             <a:spAutoFit/>
           </a:bodyPr>
           <a:lstStyle/>
@@ -16225,6 +15895,7 @@
           <a:lstStyle/>
           <a:p>
             <a:pPr algn="ctr"/>
+            <a:endParaRPr/>
           </a:p>
         </p:txBody>
       </p:sp>
@@ -16245,7 +15916,7 @@
           <a:noFill/>
         </p:spPr>
         <p:txBody>
-          <a:bodyPr wrap="square" lIns="0" rIns="0" tIns="0" bIns="0" anchor="t">
+          <a:bodyPr wrap="square" lIns="0" tIns="0" rIns="0" bIns="0" anchor="t">
             <a:spAutoFit/>
           </a:bodyPr>
           <a:lstStyle/>
@@ -16280,7 +15951,7 @@
           <a:noFill/>
         </p:spPr>
         <p:txBody>
-          <a:bodyPr wrap="square" lIns="0" rIns="0" tIns="0" bIns="0" anchor="t">
+          <a:bodyPr wrap="square" lIns="0" tIns="0" rIns="0" bIns="0" anchor="t">
             <a:spAutoFit/>
           </a:bodyPr>
           <a:lstStyle/>
@@ -16315,7 +15986,7 @@
           <a:noFill/>
         </p:spPr>
         <p:txBody>
-          <a:bodyPr wrap="square" lIns="0" rIns="0" tIns="0" bIns="0" anchor="t">
+          <a:bodyPr wrap="square" lIns="0" tIns="0" rIns="0" bIns="0" anchor="t">
             <a:spAutoFit/>
           </a:bodyPr>
           <a:lstStyle/>
@@ -16375,6 +16046,7 @@
           <a:lstStyle/>
           <a:p>
             <a:pPr algn="ctr"/>
+            <a:endParaRPr/>
           </a:p>
         </p:txBody>
       </p:sp>
@@ -16395,7 +16067,7 @@
           <a:noFill/>
         </p:spPr>
         <p:txBody>
-          <a:bodyPr wrap="square" lIns="0" rIns="0" tIns="0" bIns="0" anchor="t">
+          <a:bodyPr wrap="square" lIns="0" tIns="0" rIns="0" bIns="0" anchor="t">
             <a:spAutoFit/>
           </a:bodyPr>
           <a:lstStyle/>
@@ -16430,7 +16102,7 @@
           <a:noFill/>
         </p:spPr>
         <p:txBody>
-          <a:bodyPr wrap="square" lIns="0" rIns="0" tIns="0" bIns="0" anchor="t">
+          <a:bodyPr wrap="square" lIns="0" tIns="0" rIns="0" bIns="0" anchor="t">
             <a:spAutoFit/>
           </a:bodyPr>
           <a:lstStyle/>
@@ -16465,7 +16137,7 @@
           <a:noFill/>
         </p:spPr>
         <p:txBody>
-          <a:bodyPr wrap="square" lIns="0" rIns="0" tIns="0" bIns="0" anchor="t">
+          <a:bodyPr wrap="square" lIns="0" tIns="0" rIns="0" bIns="0" anchor="t">
             <a:spAutoFit/>
           </a:bodyPr>
           <a:lstStyle/>
@@ -16523,6 +16195,7 @@
           <a:lstStyle/>
           <a:p>
             <a:pPr algn="ctr"/>
+            <a:endParaRPr/>
           </a:p>
         </p:txBody>
       </p:sp>
@@ -16543,7 +16216,7 @@
           <a:noFill/>
         </p:spPr>
         <p:txBody>
-          <a:bodyPr wrap="square" lIns="0" rIns="0" tIns="0" bIns="0" anchor="t">
+          <a:bodyPr wrap="square" lIns="0" tIns="0" rIns="0" bIns="0" anchor="t">
             <a:spAutoFit/>
           </a:bodyPr>
           <a:lstStyle/>
@@ -16570,7 +16243,7 @@
 </file>
 
 <file path=ppt/slides/slide7.xml><?xml version="1.0" encoding="utf-8"?>
-<p:sld xmlns:a="http://schemas.openxmlformats.org/drawingml/2006/main" xmlns:p="http://schemas.openxmlformats.org/presentationml/2006/main" xmlns:r="http://schemas.openxmlformats.org/officeDocument/2006/relationships">
+<p:sld xmlns:a="http://schemas.openxmlformats.org/drawingml/2006/main" xmlns:r="http://schemas.openxmlformats.org/officeDocument/2006/relationships" xmlns:p="http://schemas.openxmlformats.org/presentationml/2006/main">
   <p:cSld>
     <p:spTree>
       <p:nvGrpSpPr>
@@ -16578,7 +16251,14 @@
         <p:cNvGrpSpPr/>
         <p:nvPr/>
       </p:nvGrpSpPr>
-      <p:grpSpPr/>
+      <p:grpSpPr>
+        <a:xfrm>
+          <a:off x="0" y="0"/>
+          <a:ext cx="0" cy="0"/>
+          <a:chOff x="0" y="0"/>
+          <a:chExt cx="0" cy="0"/>
+        </a:xfrm>
+      </p:grpSpPr>
       <p:sp>
         <p:nvSpPr>
           <p:cNvPr id="2" name="Rectangle 1"/>
@@ -16619,6 +16299,7 @@
           <a:lstStyle/>
           <a:p>
             <a:pPr algn="ctr"/>
+            <a:endParaRPr/>
           </a:p>
         </p:txBody>
       </p:sp>
@@ -16639,7 +16320,7 @@
           <a:noFill/>
         </p:spPr>
         <p:txBody>
-          <a:bodyPr wrap="square" lIns="0" rIns="0" tIns="0" bIns="0" anchor="t">
+          <a:bodyPr wrap="square" lIns="0" tIns="0" rIns="0" bIns="0" anchor="t">
             <a:spAutoFit/>
           </a:bodyPr>
           <a:lstStyle/>
@@ -16674,7 +16355,7 @@
           <a:noFill/>
         </p:spPr>
         <p:txBody>
-          <a:bodyPr wrap="square" lIns="0" rIns="0" tIns="0" bIns="0" anchor="t">
+          <a:bodyPr wrap="square" lIns="0" tIns="0" rIns="0" bIns="0" anchor="t">
             <a:spAutoFit/>
           </a:bodyPr>
           <a:lstStyle/>
@@ -16732,6 +16413,7 @@
           <a:lstStyle/>
           <a:p>
             <a:pPr algn="ctr"/>
+            <a:endParaRPr/>
           </a:p>
         </p:txBody>
       </p:sp>
@@ -16752,7 +16434,7 @@
           <a:noFill/>
         </p:spPr>
         <p:txBody>
-          <a:bodyPr wrap="square" lIns="0" rIns="0" tIns="0" bIns="0" anchor="t">
+          <a:bodyPr wrap="square" lIns="0" tIns="0" rIns="0" bIns="0" anchor="t">
             <a:spAutoFit/>
           </a:bodyPr>
           <a:lstStyle/>
@@ -16787,7 +16469,7 @@
           <a:noFill/>
         </p:spPr>
         <p:txBody>
-          <a:bodyPr wrap="square" lIns="0" rIns="0" tIns="0" bIns="0" anchor="t">
+          <a:bodyPr wrap="square" lIns="0" tIns="0" rIns="0" bIns="0" anchor="t">
             <a:spAutoFit/>
           </a:bodyPr>
           <a:lstStyle/>
@@ -16822,7 +16504,7 @@
           <a:noFill/>
         </p:spPr>
         <p:txBody>
-          <a:bodyPr wrap="square" lIns="0" rIns="0" tIns="0" bIns="0" anchor="t">
+          <a:bodyPr wrap="square" lIns="0" tIns="0" rIns="0" bIns="0" anchor="t">
             <a:spAutoFit/>
           </a:bodyPr>
           <a:lstStyle/>
@@ -16866,7 +16548,7 @@
           <a:noFill/>
         </p:spPr>
         <p:txBody>
-          <a:bodyPr wrap="square" lIns="0" rIns="0" tIns="0" bIns="0" anchor="t">
+          <a:bodyPr wrap="square" lIns="0" tIns="0" rIns="0" bIns="0" anchor="t">
             <a:spAutoFit/>
           </a:bodyPr>
           <a:lstStyle/>
@@ -16901,7 +16583,7 @@
           <a:noFill/>
         </p:spPr>
         <p:txBody>
-          <a:bodyPr wrap="square" lIns="0" rIns="0" tIns="0" bIns="0">
+          <a:bodyPr wrap="square" lIns="0" tIns="0" rIns="0" bIns="0">
             <a:spAutoFit/>
           </a:bodyPr>
           <a:lstStyle/>
@@ -17023,6 +16705,7 @@
           <a:lstStyle/>
           <a:p>
             <a:pPr algn="ctr"/>
+            <a:endParaRPr/>
           </a:p>
         </p:txBody>
       </p:sp>
@@ -17043,7 +16726,7 @@
           <a:noFill/>
         </p:spPr>
         <p:txBody>
-          <a:bodyPr wrap="square" lIns="0" rIns="0" tIns="0" bIns="0" anchor="t">
+          <a:bodyPr wrap="square" lIns="0" tIns="0" rIns="0" bIns="0" anchor="t">
             <a:spAutoFit/>
           </a:bodyPr>
           <a:lstStyle/>
@@ -17078,7 +16761,7 @@
           <a:noFill/>
         </p:spPr>
         <p:txBody>
-          <a:bodyPr wrap="square" lIns="0" rIns="0" tIns="0" bIns="0">
+          <a:bodyPr wrap="square" lIns="0" tIns="0" rIns="0" bIns="0">
             <a:spAutoFit/>
           </a:bodyPr>
           <a:lstStyle/>
@@ -17110,15 +16793,12 @@
                 <a:spcPts val="600"/>
               </a:spcAft>
             </a:pPr>
-            <a:r>
-              <a:rPr sz="1500" b="0">
-                <a:solidFill>
-                  <a:srgbClr val="E8E5DD"/>
-                </a:solidFill>
-                <a:latin typeface="Consolas"/>
-              </a:rPr>
-              <a:t/>
-            </a:r>
+            <a:endParaRPr sz="1500" b="0">
+              <a:solidFill>
+                <a:srgbClr val="E8E5DD"/>
+              </a:solidFill>
+              <a:latin typeface="Consolas"/>
+            </a:endParaRPr>
           </a:p>
           <a:p>
             <a:pPr algn="l">
@@ -17226,7 +16906,7 @@
 </file>
 
 <file path=ppt/slides/slide8.xml><?xml version="1.0" encoding="utf-8"?>
-<p:sld xmlns:a="http://schemas.openxmlformats.org/drawingml/2006/main" xmlns:p="http://schemas.openxmlformats.org/presentationml/2006/main" xmlns:r="http://schemas.openxmlformats.org/officeDocument/2006/relationships">
+<p:sld xmlns:a="http://schemas.openxmlformats.org/drawingml/2006/main" xmlns:r="http://schemas.openxmlformats.org/officeDocument/2006/relationships" xmlns:p="http://schemas.openxmlformats.org/presentationml/2006/main">
   <p:cSld>
     <p:spTree>
       <p:nvGrpSpPr>
@@ -17234,7 +16914,14 @@
         <p:cNvGrpSpPr/>
         <p:nvPr/>
       </p:nvGrpSpPr>
-      <p:grpSpPr/>
+      <p:grpSpPr>
+        <a:xfrm>
+          <a:off x="0" y="0"/>
+          <a:ext cx="0" cy="0"/>
+          <a:chOff x="0" y="0"/>
+          <a:chExt cx="0" cy="0"/>
+        </a:xfrm>
+      </p:grpSpPr>
       <p:sp>
         <p:nvSpPr>
           <p:cNvPr id="2" name="Rectangle 1"/>
@@ -17275,6 +16962,7 @@
           <a:lstStyle/>
           <a:p>
             <a:pPr algn="ctr"/>
+            <a:endParaRPr/>
           </a:p>
         </p:txBody>
       </p:sp>
@@ -17295,7 +16983,7 @@
           <a:noFill/>
         </p:spPr>
         <p:txBody>
-          <a:bodyPr wrap="square" lIns="0" rIns="0" tIns="0" bIns="0" anchor="t">
+          <a:bodyPr wrap="square" lIns="0" tIns="0" rIns="0" bIns="0" anchor="t">
             <a:spAutoFit/>
           </a:bodyPr>
           <a:lstStyle/>
@@ -17330,7 +17018,7 @@
           <a:noFill/>
         </p:spPr>
         <p:txBody>
-          <a:bodyPr wrap="square" lIns="0" rIns="0" tIns="0" bIns="0" anchor="t">
+          <a:bodyPr wrap="square" lIns="0" tIns="0" rIns="0" bIns="0" anchor="t">
             <a:spAutoFit/>
           </a:bodyPr>
           <a:lstStyle/>
@@ -17388,6 +17076,7 @@
           <a:lstStyle/>
           <a:p>
             <a:pPr algn="ctr"/>
+            <a:endParaRPr/>
           </a:p>
         </p:txBody>
       </p:sp>
@@ -17408,7 +17097,7 @@
           <a:noFill/>
         </p:spPr>
         <p:txBody>
-          <a:bodyPr wrap="square" lIns="0" rIns="0" tIns="0" bIns="0" anchor="t">
+          <a:bodyPr wrap="square" lIns="0" tIns="0" rIns="0" bIns="0" anchor="t">
             <a:spAutoFit/>
           </a:bodyPr>
           <a:lstStyle/>
@@ -17443,7 +17132,7 @@
           <a:noFill/>
         </p:spPr>
         <p:txBody>
-          <a:bodyPr wrap="square" lIns="0" rIns="0" tIns="0" bIns="0" anchor="t">
+          <a:bodyPr wrap="square" lIns="0" tIns="0" rIns="0" bIns="0" anchor="t">
             <a:spAutoFit/>
           </a:bodyPr>
           <a:lstStyle/>
@@ -17478,7 +17167,7 @@
           <a:noFill/>
         </p:spPr>
         <p:txBody>
-          <a:bodyPr wrap="square" lIns="0" rIns="0" tIns="0" bIns="0" anchor="t">
+          <a:bodyPr wrap="square" lIns="0" tIns="0" rIns="0" bIns="0" anchor="t">
             <a:spAutoFit/>
           </a:bodyPr>
           <a:lstStyle/>
@@ -17522,7 +17211,7 @@
           <a:noFill/>
         </p:spPr>
         <p:txBody>
-          <a:bodyPr wrap="square" lIns="0" rIns="0" tIns="0" bIns="0" anchor="t">
+          <a:bodyPr wrap="square" lIns="0" tIns="0" rIns="0" bIns="0" anchor="t">
             <a:spAutoFit/>
           </a:bodyPr>
           <a:lstStyle/>
@@ -17557,7 +17246,7 @@
           <a:noFill/>
         </p:spPr>
         <p:txBody>
-          <a:bodyPr wrap="square" lIns="0" rIns="0" tIns="0" bIns="0">
+          <a:bodyPr wrap="square" lIns="0" tIns="0" rIns="0" bIns="0">
             <a:spAutoFit/>
           </a:bodyPr>
           <a:lstStyle/>
@@ -17679,6 +17368,7 @@
           <a:lstStyle/>
           <a:p>
             <a:pPr algn="ctr"/>
+            <a:endParaRPr/>
           </a:p>
         </p:txBody>
       </p:sp>
@@ -17699,7 +17389,7 @@
           <a:noFill/>
         </p:spPr>
         <p:txBody>
-          <a:bodyPr wrap="square" lIns="0" rIns="0" tIns="0" bIns="0" anchor="t">
+          <a:bodyPr wrap="square" lIns="0" tIns="0" rIns="0" bIns="0" anchor="t">
             <a:spAutoFit/>
           </a:bodyPr>
           <a:lstStyle/>
@@ -17734,7 +17424,7 @@
           <a:noFill/>
         </p:spPr>
         <p:txBody>
-          <a:bodyPr wrap="square" lIns="0" rIns="0" tIns="0" bIns="0">
+          <a:bodyPr wrap="square" lIns="0" tIns="0" rIns="0" bIns="0">
             <a:spAutoFit/>
           </a:bodyPr>
           <a:lstStyle/>
@@ -17766,15 +17456,12 @@
                 <a:spcPts val="600"/>
               </a:spcAft>
             </a:pPr>
-            <a:r>
-              <a:rPr sz="1500" b="0">
-                <a:solidFill>
-                  <a:srgbClr val="E8E5DD"/>
-                </a:solidFill>
-                <a:latin typeface="Consolas"/>
-              </a:rPr>
-              <a:t/>
-            </a:r>
+            <a:endParaRPr sz="1500" b="0">
+              <a:solidFill>
+                <a:srgbClr val="E8E5DD"/>
+              </a:solidFill>
+              <a:latin typeface="Consolas"/>
+            </a:endParaRPr>
           </a:p>
           <a:p>
             <a:pPr algn="l">
@@ -17901,7 +17588,7 @@
 </file>
 
 <file path=ppt/slides/slide9.xml><?xml version="1.0" encoding="utf-8"?>
-<p:sld xmlns:a="http://schemas.openxmlformats.org/drawingml/2006/main" xmlns:p="http://schemas.openxmlformats.org/presentationml/2006/main" xmlns:r="http://schemas.openxmlformats.org/officeDocument/2006/relationships">
+<p:sld xmlns:a="http://schemas.openxmlformats.org/drawingml/2006/main" xmlns:r="http://schemas.openxmlformats.org/officeDocument/2006/relationships" xmlns:p="http://schemas.openxmlformats.org/presentationml/2006/main">
   <p:cSld>
     <p:spTree>
       <p:nvGrpSpPr>
@@ -17909,7 +17596,14 @@
         <p:cNvGrpSpPr/>
         <p:nvPr/>
       </p:nvGrpSpPr>
-      <p:grpSpPr/>
+      <p:grpSpPr>
+        <a:xfrm>
+          <a:off x="0" y="0"/>
+          <a:ext cx="0" cy="0"/>
+          <a:chOff x="0" y="0"/>
+          <a:chExt cx="0" cy="0"/>
+        </a:xfrm>
+      </p:grpSpPr>
       <p:sp>
         <p:nvSpPr>
           <p:cNvPr id="2" name="Rectangle 1"/>
@@ -17950,6 +17644,7 @@
           <a:lstStyle/>
           <a:p>
             <a:pPr algn="ctr"/>
+            <a:endParaRPr/>
           </a:p>
         </p:txBody>
       </p:sp>
@@ -17970,7 +17665,7 @@
           <a:noFill/>
         </p:spPr>
         <p:txBody>
-          <a:bodyPr wrap="square" lIns="0" rIns="0" tIns="0" bIns="0" anchor="t">
+          <a:bodyPr wrap="square" lIns="0" tIns="0" rIns="0" bIns="0" anchor="t">
             <a:spAutoFit/>
           </a:bodyPr>
           <a:lstStyle/>
@@ -18005,7 +17700,7 @@
           <a:noFill/>
         </p:spPr>
         <p:txBody>
-          <a:bodyPr wrap="square" lIns="0" rIns="0" tIns="0" bIns="0" anchor="t">
+          <a:bodyPr wrap="square" lIns="0" tIns="0" rIns="0" bIns="0" anchor="t">
             <a:spAutoFit/>
           </a:bodyPr>
           <a:lstStyle/>
@@ -18063,6 +17758,7 @@
           <a:lstStyle/>
           <a:p>
             <a:pPr algn="ctr"/>
+            <a:endParaRPr/>
           </a:p>
         </p:txBody>
       </p:sp>
@@ -18083,7 +17779,7 @@
           <a:noFill/>
         </p:spPr>
         <p:txBody>
-          <a:bodyPr wrap="square" lIns="0" rIns="0" tIns="0" bIns="0" anchor="t">
+          <a:bodyPr wrap="square" lIns="0" tIns="0" rIns="0" bIns="0" anchor="t">
             <a:spAutoFit/>
           </a:bodyPr>
           <a:lstStyle/>
@@ -18118,7 +17814,7 @@
           <a:noFill/>
         </p:spPr>
         <p:txBody>
-          <a:bodyPr wrap="square" lIns="0" rIns="0" tIns="0" bIns="0" anchor="t">
+          <a:bodyPr wrap="square" lIns="0" tIns="0" rIns="0" bIns="0" anchor="t">
             <a:spAutoFit/>
           </a:bodyPr>
           <a:lstStyle/>
@@ -18153,7 +17849,7 @@
           <a:noFill/>
         </p:spPr>
         <p:txBody>
-          <a:bodyPr wrap="square" lIns="0" rIns="0" tIns="0" bIns="0" anchor="t">
+          <a:bodyPr wrap="square" lIns="0" tIns="0" rIns="0" bIns="0" anchor="t">
             <a:spAutoFit/>
           </a:bodyPr>
           <a:lstStyle/>
@@ -18197,7 +17893,7 @@
           <a:noFill/>
         </p:spPr>
         <p:txBody>
-          <a:bodyPr wrap="square" lIns="0" rIns="0" tIns="0" bIns="0" anchor="t">
+          <a:bodyPr wrap="square" lIns="0" tIns="0" rIns="0" bIns="0" anchor="t">
             <a:spAutoFit/>
           </a:bodyPr>
           <a:lstStyle/>
@@ -18232,7 +17928,7 @@
           <a:noFill/>
         </p:spPr>
         <p:txBody>
-          <a:bodyPr wrap="square" lIns="0" rIns="0" tIns="0" bIns="0">
+          <a:bodyPr wrap="square" lIns="0" tIns="0" rIns="0" bIns="0">
             <a:spAutoFit/>
           </a:bodyPr>
           <a:lstStyle/>
@@ -18354,6 +18050,7 @@
           <a:lstStyle/>
           <a:p>
             <a:pPr algn="ctr"/>
+            <a:endParaRPr/>
           </a:p>
         </p:txBody>
       </p:sp>
@@ -18374,7 +18071,7 @@
           <a:noFill/>
         </p:spPr>
         <p:txBody>
-          <a:bodyPr wrap="square" lIns="0" rIns="0" tIns="0" bIns="0" anchor="t">
+          <a:bodyPr wrap="square" lIns="0" tIns="0" rIns="0" bIns="0" anchor="t">
             <a:spAutoFit/>
           </a:bodyPr>
           <a:lstStyle/>
@@ -18409,7 +18106,7 @@
           <a:noFill/>
         </p:spPr>
         <p:txBody>
-          <a:bodyPr wrap="square" lIns="0" rIns="0" tIns="0" bIns="0">
+          <a:bodyPr wrap="square" lIns="0" tIns="0" rIns="0" bIns="0">
             <a:spAutoFit/>
           </a:bodyPr>
           <a:lstStyle/>
@@ -18441,15 +18138,12 @@
                 <a:spcPts val="600"/>
               </a:spcAft>
             </a:pPr>
-            <a:r>
-              <a:rPr sz="1500" b="0">
-                <a:solidFill>
-                  <a:srgbClr val="E8E5DD"/>
-                </a:solidFill>
-                <a:latin typeface="Consolas"/>
-              </a:rPr>
-              <a:t/>
-            </a:r>
+            <a:endParaRPr sz="1500" b="0">
+              <a:solidFill>
+                <a:srgbClr val="E8E5DD"/>
+              </a:solidFill>
+              <a:latin typeface="Consolas"/>
+            </a:endParaRPr>
           </a:p>
           <a:p>
             <a:pPr algn="l">
@@ -18906,44 +18600,44 @@
         <a:sysClr val="window" lastClr="FFFFFF"/>
       </a:lt1>
       <a:dk2>
-        <a:srgbClr val="1F497D"/>
+        <a:srgbClr val="0E2841"/>
       </a:dk2>
       <a:lt2>
-        <a:srgbClr val="EEECE1"/>
+        <a:srgbClr val="E8E8E8"/>
       </a:lt2>
       <a:accent1>
-        <a:srgbClr val="4F81BD"/>
+        <a:srgbClr val="156082"/>
       </a:accent1>
       <a:accent2>
-        <a:srgbClr val="C0504D"/>
+        <a:srgbClr val="E97132"/>
       </a:accent2>
       <a:accent3>
-        <a:srgbClr val="9BBB59"/>
+        <a:srgbClr val="196B24"/>
       </a:accent3>
       <a:accent4>
-        <a:srgbClr val="8064A2"/>
+        <a:srgbClr val="0F9ED5"/>
       </a:accent4>
       <a:accent5>
-        <a:srgbClr val="4BACC6"/>
+        <a:srgbClr val="A02B93"/>
       </a:accent5>
       <a:accent6>
-        <a:srgbClr val="F79646"/>
+        <a:srgbClr val="4EA72E"/>
       </a:accent6>
       <a:hlink>
-        <a:srgbClr val="0000FF"/>
+        <a:srgbClr val="467886"/>
       </a:hlink>
       <a:folHlink>
-        <a:srgbClr val="800080"/>
+        <a:srgbClr val="96607D"/>
       </a:folHlink>
     </a:clrScheme>
     <a:fontScheme name="Office">
       <a:majorFont>
-        <a:latin typeface="Calibri"/>
+        <a:latin typeface="Aptos Display" panose="02110004020202020204"/>
         <a:ea typeface=""/>
         <a:cs typeface=""/>
-        <a:font script="Jpan" typeface="ＭＳ Ｐゴシック"/>
+        <a:font script="Jpan" typeface="游ゴシック Light"/>
         <a:font script="Hang" typeface="맑은 고딕"/>
-        <a:font script="Hans" typeface="宋体"/>
+        <a:font script="Hans" typeface="等线 Light"/>
         <a:font script="Hant" typeface="新細明體"/>
         <a:font script="Arab" typeface="Times New Roman"/>
         <a:font script="Hebr" typeface="Times New Roman"/>
@@ -18971,14 +18665,31 @@
         <a:font script="Viet" typeface="Times New Roman"/>
         <a:font script="Uigh" typeface="Microsoft Uighur"/>
         <a:font script="Geor" typeface="Sylfaen"/>
+        <a:font script="Armn" typeface="Arial"/>
+        <a:font script="Bugi" typeface="Leelawadee UI"/>
+        <a:font script="Bopo" typeface="Microsoft JhengHei"/>
+        <a:font script="Java" typeface="Javanese Text"/>
+        <a:font script="Lisu" typeface="Segoe UI"/>
+        <a:font script="Mymr" typeface="Myanmar Text"/>
+        <a:font script="Nkoo" typeface="Ebrima"/>
+        <a:font script="Olck" typeface="Nirmala UI"/>
+        <a:font script="Osma" typeface="Ebrima"/>
+        <a:font script="Phag" typeface="Phagspa"/>
+        <a:font script="Syrn" typeface="Estrangelo Edessa"/>
+        <a:font script="Syrj" typeface="Estrangelo Edessa"/>
+        <a:font script="Syre" typeface="Estrangelo Edessa"/>
+        <a:font script="Sora" typeface="Nirmala UI"/>
+        <a:font script="Tale" typeface="Microsoft Tai Le"/>
+        <a:font script="Talu" typeface="Microsoft New Tai Lue"/>
+        <a:font script="Tfng" typeface="Ebrima"/>
       </a:majorFont>
       <a:minorFont>
-        <a:latin typeface="Calibri"/>
+        <a:latin typeface="Aptos" panose="02110004020202020204"/>
         <a:ea typeface=""/>
         <a:cs typeface=""/>
-        <a:font script="Jpan" typeface="ＭＳ Ｐゴシック"/>
+        <a:font script="Jpan" typeface="游ゴシック"/>
         <a:font script="Hang" typeface="맑은 고딕"/>
-        <a:font script="Hans" typeface="宋体"/>
+        <a:font script="Hans" typeface="等线"/>
         <a:font script="Hant" typeface="新細明體"/>
         <a:font script="Arab" typeface="Arial"/>
         <a:font script="Hebr" typeface="Arial"/>
@@ -19006,6 +18717,23 @@
         <a:font script="Viet" typeface="Arial"/>
         <a:font script="Uigh" typeface="Microsoft Uighur"/>
         <a:font script="Geor" typeface="Sylfaen"/>
+        <a:font script="Armn" typeface="Arial"/>
+        <a:font script="Bugi" typeface="Leelawadee UI"/>
+        <a:font script="Bopo" typeface="Microsoft JhengHei"/>
+        <a:font script="Java" typeface="Javanese Text"/>
+        <a:font script="Lisu" typeface="Segoe UI"/>
+        <a:font script="Mymr" typeface="Myanmar Text"/>
+        <a:font script="Nkoo" typeface="Ebrima"/>
+        <a:font script="Olck" typeface="Nirmala UI"/>
+        <a:font script="Osma" typeface="Ebrima"/>
+        <a:font script="Phag" typeface="Phagspa"/>
+        <a:font script="Syrn" typeface="Estrangelo Edessa"/>
+        <a:font script="Syrj" typeface="Estrangelo Edessa"/>
+        <a:font script="Syre" typeface="Estrangelo Edessa"/>
+        <a:font script="Sora" typeface="Nirmala UI"/>
+        <a:font script="Tale" typeface="Microsoft Tai Le"/>
+        <a:font script="Talu" typeface="Microsoft New Tai Lue"/>
+        <a:font script="Tfng" typeface="Ebrima"/>
       </a:minorFont>
     </a:fontScheme>
     <a:fmtScheme name="Office">
@@ -19017,180 +18745,136 @@
           <a:gsLst>
             <a:gs pos="0">
               <a:schemeClr val="phClr">
-                <a:tint val="50000"/>
-                <a:satMod val="300000"/>
+                <a:lumMod val="110000"/>
+                <a:satMod val="105000"/>
+                <a:tint val="67000"/>
               </a:schemeClr>
             </a:gs>
-            <a:gs pos="35000">
+            <a:gs pos="50000">
               <a:schemeClr val="phClr">
-                <a:tint val="37000"/>
-                <a:satMod val="300000"/>
+                <a:lumMod val="105000"/>
+                <a:satMod val="103000"/>
+                <a:tint val="73000"/>
               </a:schemeClr>
             </a:gs>
             <a:gs pos="100000">
               <a:schemeClr val="phClr">
-                <a:tint val="15000"/>
-                <a:satMod val="350000"/>
+                <a:lumMod val="105000"/>
+                <a:satMod val="109000"/>
+                <a:tint val="81000"/>
               </a:schemeClr>
             </a:gs>
           </a:gsLst>
-          <a:lin ang="16200000" scaled="1"/>
+          <a:lin ang="5400000" scaled="0"/>
         </a:gradFill>
         <a:gradFill rotWithShape="1">
           <a:gsLst>
             <a:gs pos="0">
               <a:schemeClr val="phClr">
-                <a:tint val="100000"/>
+                <a:satMod val="103000"/>
+                <a:lumMod val="102000"/>
+                <a:tint val="94000"/>
+              </a:schemeClr>
+            </a:gs>
+            <a:gs pos="50000">
+              <a:schemeClr val="phClr">
+                <a:satMod val="110000"/>
+                <a:lumMod val="100000"/>
                 <a:shade val="100000"/>
-                <a:satMod val="130000"/>
               </a:schemeClr>
             </a:gs>
             <a:gs pos="100000">
               <a:schemeClr val="phClr">
-                <a:tint val="50000"/>
-                <a:shade val="100000"/>
-                <a:satMod val="350000"/>
+                <a:lumMod val="99000"/>
+                <a:satMod val="120000"/>
+                <a:shade val="78000"/>
               </a:schemeClr>
             </a:gs>
           </a:gsLst>
-          <a:lin ang="16200000" scaled="0"/>
+          <a:lin ang="5400000" scaled="0"/>
         </a:gradFill>
       </a:fillStyleLst>
       <a:lnStyleLst>
-        <a:ln w="9525" cap="flat" cmpd="sng" algn="ctr">
+        <a:ln w="12700" cap="flat" cmpd="sng" algn="ctr">
           <a:solidFill>
-            <a:schemeClr val="phClr">
-              <a:shade val="95000"/>
-              <a:satMod val="105000"/>
-            </a:schemeClr>
+            <a:schemeClr val="phClr"/>
           </a:solidFill>
           <a:prstDash val="solid"/>
+          <a:miter lim="800000"/>
+        </a:ln>
+        <a:ln w="19050" cap="flat" cmpd="sng" algn="ctr">
+          <a:solidFill>
+            <a:schemeClr val="phClr"/>
+          </a:solidFill>
+          <a:prstDash val="solid"/>
+          <a:miter lim="800000"/>
         </a:ln>
         <a:ln w="25400" cap="flat" cmpd="sng" algn="ctr">
           <a:solidFill>
             <a:schemeClr val="phClr"/>
           </a:solidFill>
           <a:prstDash val="solid"/>
-        </a:ln>
-        <a:ln w="38100" cap="flat" cmpd="sng" algn="ctr">
-          <a:solidFill>
-            <a:schemeClr val="phClr"/>
-          </a:solidFill>
-          <a:prstDash val="solid"/>
+          <a:miter lim="800000"/>
         </a:ln>
       </a:lnStyleLst>
       <a:effectStyleLst>
         <a:effectStyle>
+          <a:effectLst/>
+        </a:effectStyle>
+        <a:effectStyle>
+          <a:effectLst/>
+        </a:effectStyle>
+        <a:effectStyle>
           <a:effectLst>
-            <a:outerShdw blurRad="40000" dist="20000" dir="5400000" rotWithShape="0">
+            <a:outerShdw blurRad="57150" dist="19050" dir="5400000" algn="ctr" rotWithShape="0">
               <a:srgbClr val="000000">
-                <a:alpha val="38000"/>
+                <a:alpha val="63000"/>
               </a:srgbClr>
             </a:outerShdw>
           </a:effectLst>
-        </a:effectStyle>
-        <a:effectStyle>
-          <a:effectLst>
-            <a:outerShdw blurRad="40000" dist="23000" dir="5400000" rotWithShape="0">
-              <a:srgbClr val="000000">
-                <a:alpha val="35000"/>
-              </a:srgbClr>
-            </a:outerShdw>
-          </a:effectLst>
-        </a:effectStyle>
-        <a:effectStyle>
-          <a:effectLst>
-            <a:outerShdw blurRad="40000" dist="23000" dir="5400000" rotWithShape="0">
-              <a:srgbClr val="000000">
-                <a:alpha val="35000"/>
-              </a:srgbClr>
-            </a:outerShdw>
-          </a:effectLst>
-          <a:scene3d>
-            <a:camera prst="orthographicFront">
-              <a:rot lat="0" lon="0" rev="0"/>
-            </a:camera>
-            <a:lightRig rig="threePt" dir="t">
-              <a:rot lat="0" lon="0" rev="1200000"/>
-            </a:lightRig>
-          </a:scene3d>
-          <a:sp3d>
-            <a:bevelT w="63500" h="25400"/>
-          </a:sp3d>
         </a:effectStyle>
       </a:effectStyleLst>
       <a:bgFillStyleLst>
         <a:solidFill>
           <a:schemeClr val="phClr"/>
         </a:solidFill>
+        <a:solidFill>
+          <a:schemeClr val="phClr">
+            <a:tint val="95000"/>
+            <a:satMod val="170000"/>
+          </a:schemeClr>
+        </a:solidFill>
         <a:gradFill rotWithShape="1">
           <a:gsLst>
             <a:gs pos="0">
               <a:schemeClr val="phClr">
-                <a:tint val="40000"/>
-                <a:satMod val="350000"/>
+                <a:tint val="93000"/>
+                <a:satMod val="150000"/>
+                <a:shade val="98000"/>
+                <a:lumMod val="102000"/>
               </a:schemeClr>
             </a:gs>
-            <a:gs pos="40000">
+            <a:gs pos="50000">
               <a:schemeClr val="phClr">
-                <a:tint val="45000"/>
-                <a:shade val="99000"/>
-                <a:satMod val="350000"/>
+                <a:tint val="98000"/>
+                <a:satMod val="130000"/>
+                <a:shade val="90000"/>
+                <a:lumMod val="103000"/>
               </a:schemeClr>
             </a:gs>
             <a:gs pos="100000">
               <a:schemeClr val="phClr">
-                <a:shade val="20000"/>
-                <a:satMod val="255000"/>
+                <a:shade val="63000"/>
+                <a:satMod val="120000"/>
               </a:schemeClr>
             </a:gs>
           </a:gsLst>
-          <a:path path="circle">
-            <a:fillToRect l="50000" t="-80000" r="50000" b="180000"/>
-          </a:path>
-        </a:gradFill>
-        <a:gradFill rotWithShape="1">
-          <a:gsLst>
-            <a:gs pos="0">
-              <a:schemeClr val="phClr">
-                <a:tint val="80000"/>
-                <a:satMod val="300000"/>
-              </a:schemeClr>
-            </a:gs>
-            <a:gs pos="100000">
-              <a:schemeClr val="phClr">
-                <a:shade val="30000"/>
-                <a:satMod val="200000"/>
-              </a:schemeClr>
-            </a:gs>
-          </a:gsLst>
-          <a:path path="circle">
-            <a:fillToRect l="50000" t="50000" r="50000" b="50000"/>
-          </a:path>
+          <a:lin ang="5400000" scaled="0"/>
         </a:gradFill>
       </a:bgFillStyleLst>
     </a:fmtScheme>
   </a:themeElements>
   <a:objectDefaults>
-    <a:spDef>
-      <a:spPr/>
-      <a:bodyPr/>
-      <a:lstStyle/>
-      <a:style>
-        <a:lnRef idx="1">
-          <a:schemeClr val="accent1"/>
-        </a:lnRef>
-        <a:fillRef idx="3">
-          <a:schemeClr val="accent1"/>
-        </a:fillRef>
-        <a:effectRef idx="2">
-          <a:schemeClr val="accent1"/>
-        </a:effectRef>
-        <a:fontRef idx="minor">
-          <a:schemeClr val="lt1"/>
-        </a:fontRef>
-      </a:style>
-    </a:spDef>
     <a:lnDef>
       <a:spPr/>
       <a:bodyPr/>
@@ -19212,5 +18896,10 @@
     </a:lnDef>
   </a:objectDefaults>
   <a:extraClrSchemeLst/>
+  <a:extLst>
+    <a:ext uri="{05A4C25C-085E-4340-85A3-A5531E510DB2}">
+      <thm15:themeFamily xmlns:thm15="http://schemas.microsoft.com/office/thememl/2012/main" name="Office Theme" id="{2E142A2C-CD16-42D6-873A-C26D2A0506FA}" vid="{1BDDFF52-6CD6-40A5-AB3C-68EB2F1E4D0A}"/>
+    </a:ext>
+  </a:extLst>
 </a:theme>
 </file>